--- a/deliverables/TwinVerse_Inspect_AI_Pitch.pptx
+++ b/deliverables/TwinVerse_Inspect_AI_Pitch.pptx
@@ -2936,7 +2936,7 @@
                 <a:ea typeface="Calibri" pitchFamily="34" charset="-122"/>
                 <a:cs typeface="Calibri" pitchFamily="34" charset="-120"/>
               </a:rPr>
-              <a:t>Muhammad Muneed</a:t>
+              <a:t>Muhammad Muneeb</a:t>
             </a:r>
             <a:endParaRPr lang="en-US" sz="1400" dirty="0"/>
           </a:p>
@@ -2975,7 +2975,7 @@
                 <a:ea typeface="Calibri" pitchFamily="34" charset="-122"/>
                 <a:cs typeface="Calibri" pitchFamily="34" charset="-120"/>
               </a:rPr>
-              <a:t>Team Member</a:t>
+              <a:t>Backend, Data &amp; API</a:t>
             </a:r>
             <a:endParaRPr lang="en-US" sz="1150" dirty="0"/>
           </a:p>
@@ -3073,7 +3073,7 @@
                 <a:ea typeface="Calibri" pitchFamily="34" charset="-122"/>
                 <a:cs typeface="Calibri" pitchFamily="34" charset="-120"/>
               </a:rPr>
-              <a:t>Team Member</a:t>
+              <a:t>Marketing &amp; Outreach</a:t>
             </a:r>
             <a:endParaRPr lang="en-US" sz="1150" dirty="0"/>
           </a:p>
@@ -4625,7 +4625,7 @@
                 <a:ea typeface="Calibri" pitchFamily="34" charset="-122"/>
                 <a:cs typeface="Calibri" pitchFamily="34" charset="-120"/>
               </a:rPr>
-              <a:t>Muhammad Muneed</a:t>
+              <a:t>Muhammad Muneeb</a:t>
             </a:r>
             <a:endParaRPr lang="en-US" sz="1600" dirty="0"/>
           </a:p>
@@ -4664,7 +4664,7 @@
                 <a:ea typeface="Calibri" pitchFamily="34" charset="-122"/>
                 <a:cs typeface="Calibri" pitchFamily="34" charset="-120"/>
               </a:rPr>
-              <a:t>Team Member</a:t>
+              <a:t>Backend, Data &amp; API</a:t>
             </a:r>
             <a:endParaRPr lang="en-US" sz="1200" dirty="0"/>
           </a:p>
@@ -4694,6 +4694,17 @@
             <a:pPr algn="ctr" indent="0" marL="0">
               <a:buNone/>
             </a:pPr>
+            <a:r>
+              <a:rPr lang="en-US" sz="1150" dirty="0">
+                <a:solidFill>
+                  <a:srgbClr val="9FB0CC"/>
+                </a:solidFill>
+                <a:latin typeface="Calibri" pitchFamily="34" charset="0"/>
+                <a:ea typeface="Calibri" pitchFamily="34" charset="-122"/>
+                <a:cs typeface="Calibri" pitchFamily="34" charset="-120"/>
+              </a:rPr>
+              <a:t>Services, database and the upload pipeline</a:t>
+            </a:r>
             <a:endParaRPr lang="en-US" sz="1150" dirty="0"/>
           </a:p>
         </p:txBody>
@@ -4872,7 +4883,7 @@
                 <a:ea typeface="Calibri" pitchFamily="34" charset="-122"/>
                 <a:cs typeface="Calibri" pitchFamily="34" charset="-120"/>
               </a:rPr>
-              <a:t>Team Member</a:t>
+              <a:t>Marketing &amp; Outreach</a:t>
             </a:r>
             <a:endParaRPr lang="en-US" sz="1200" dirty="0"/>
           </a:p>
@@ -4902,6 +4913,17 @@
             <a:pPr algn="ctr" indent="0" marL="0">
               <a:buNone/>
             </a:pPr>
+            <a:r>
+              <a:rPr lang="en-US" sz="1150" dirty="0">
+                <a:solidFill>
+                  <a:srgbClr val="9FB0CC"/>
+                </a:solidFill>
+                <a:latin typeface="Calibri" pitchFamily="34" charset="0"/>
+                <a:ea typeface="Calibri" pitchFamily="34" charset="-122"/>
+                <a:cs typeface="Calibri" pitchFamily="34" charset="-120"/>
+              </a:rPr>
+              <a:t>Positioning, launch material and the pitch</a:t>
+            </a:r>
             <a:endParaRPr lang="en-US" sz="1150" dirty="0"/>
           </a:p>
         </p:txBody>
@@ -6121,7 +6143,7 @@
                 <a:ea typeface="Calibri" pitchFamily="34" charset="-122"/>
                 <a:cs typeface="Calibri" pitchFamily="34" charset="-120"/>
               </a:rPr>
-              <a:t>Ayaan Aatif  ·  Muhammad Muneed  ·  Inshrah Mehmood</a:t>
+              <a:t>Ayaan Aatif  ·  Muhammad Muneeb  ·  Inshrah Mehmood</a:t>
             </a:r>
             <a:endParaRPr lang="en-US" sz="1400" dirty="0"/>
           </a:p>

--- a/deliverables/TwinVerse_Inspect_AI_Pitch.pptx
+++ b/deliverables/TwinVerse_Inspect_AI_Pitch.pptx
@@ -18,9 +18,10 @@
     <p:sldId id="266" r:id="rId12"/>
     <p:sldId id="267" r:id="rId13"/>
     <p:sldId id="268" r:id="rId14"/>
+    <p:sldId id="269" r:id="rId15"/>
   </p:sldIdLst>
   <p:notesMasterIdLst>
-    <p:notesMasterId r:id="rId15"/>
+    <p:notesMasterId r:id="rId16"/>
   </p:notesMasterIdLst>
   <p:sldSz cx="12192000" cy="6858000"/>
   <p:notesSz cx="6858000" cy="12192000"/>
@@ -1244,7 +1245,7 @@
           <a:p>
             <a:r>
               <a:rPr lang="en-US" dirty="0"/>
-              <a:t>Cloud note: the S3 layer means MinIO swaps for Alibaba OSS or AWS S3 with a config change only.</a:t>
+              <a:t>Do not skip this slide to save time. It is the one that separates us. Deliver it confidently, not apologetically.</a:t>
             </a:r>
             <a:endParaRPr lang="en-US" dirty="0"/>
           </a:p>
@@ -1332,7 +1333,7 @@
           <a:p>
             <a:r>
               <a:rPr lang="en-US" dirty="0"/>
-              <a:t>Replace the circles with headshots and fill in each member's focus area before presenting.</a:t>
+              <a:t>Cloud note: the S3 layer means MinIO swaps for Alibaba OSS or AWS S3 with a config change only.</a:t>
             </a:r>
             <a:endParaRPr lang="en-US" dirty="0"/>
           </a:p>
@@ -1420,7 +1421,7 @@
           <a:p>
             <a:r>
               <a:rPr lang="en-US" dirty="0"/>
-              <a:t>The 'later' column is deliberately labelled later, not coming soon.</a:t>
+              <a:t>Replace the circles with headshots and fill in each member's focus area before presenting.</a:t>
             </a:r>
             <a:endParaRPr lang="en-US" dirty="0"/>
           </a:p>
@@ -1508,7 +1509,7 @@
           <a:p>
             <a:r>
               <a:rPr lang="en-US" dirty="0"/>
-              <a:t>Land on the sentence, pause, then invite questions. Do not add a summary slide after this.</a:t>
+              <a:t>The 'later' column is deliberately labelled later, not coming soon.</a:t>
             </a:r>
             <a:endParaRPr lang="en-US" dirty="0"/>
           </a:p>
@@ -1532,6 +1533,94 @@
             <a:fld id="{F7021451-1387-4CA6-816F-3879F97B5CBC}" type="slidenum">
               <a:rPr lang="en-US"/>
               <a:t>13</a:t>
+            </a:fld>
+            <a:endParaRPr lang="en-US"/>
+          </a:p>
+        </p:txBody>
+      </p:sp>
+    </p:spTree>
+    <p:extLst>
+      <p:ext uri="{BB962C8B-B14F-4D97-AF65-F5344CB8AC3E}">
+        <p14:creationId xmlns:p14="http://schemas.microsoft.com/office/powerpoint/2010/main" val="1024086991"/>
+      </p:ext>
+    </p:extLst>
+  </p:cSld>
+  <p:clrMapOvr>
+    <a:masterClrMapping/>
+  </p:clrMapOvr>
+</p:notes>
+</file>
+
+<file path=ppt/notesSlides/notesSlide14.xml><?xml version="1.0" encoding="utf-8"?>
+<p:notes xmlns:a="http://schemas.openxmlformats.org/drawingml/2006/main" xmlns:r="http://schemas.openxmlformats.org/officeDocument/2006/relationships" xmlns:p="http://schemas.openxmlformats.org/presentationml/2006/main">
+  <p:cSld>
+    <p:spTree>
+      <p:nvGrpSpPr>
+        <p:cNvPr id="1" name=""/>
+        <p:cNvGrpSpPr/>
+        <p:nvPr/>
+      </p:nvGrpSpPr>
+      <p:grpSpPr>
+        <a:xfrm>
+          <a:off x="0" y="0"/>
+          <a:ext cx="0" cy="0"/>
+          <a:chOff x="0" y="0"/>
+          <a:chExt cx="0" cy="0"/>
+        </a:xfrm>
+      </p:grpSpPr>
+      <p:sp>
+        <p:nvSpPr>
+          <p:cNvPr id="2" name="Slide Image Placeholder 1"/>
+          <p:cNvSpPr>
+            <a:spLocks noGrp="1" noRot="1" noChangeAspect="1"/>
+          </p:cNvSpPr>
+          <p:nvPr>
+            <p:ph type="sldImg"/>
+          </p:nvPr>
+        </p:nvSpPr>
+        <p:spPr/>
+      </p:sp>
+      <p:sp>
+        <p:nvSpPr>
+          <p:cNvPr id="3" name="Notes Placeholder 2"/>
+          <p:cNvSpPr>
+            <a:spLocks noGrp="1"/>
+          </p:cNvSpPr>
+          <p:nvPr>
+            <p:ph type="body" idx="1"/>
+          </p:nvPr>
+        </p:nvSpPr>
+        <p:spPr/>
+        <p:txBody>
+          <a:bodyPr/>
+          <a:lstStyle/>
+          <a:p>
+            <a:r>
+              <a:rPr lang="en-US" dirty="0"/>
+              <a:t>Land on the sentence, pause, then invite questions. Do not add a summary slide after this.</a:t>
+            </a:r>
+            <a:endParaRPr lang="en-US" dirty="0"/>
+          </a:p>
+        </p:txBody>
+      </p:sp>
+      <p:sp>
+        <p:nvSpPr>
+          <p:cNvPr id="4" name="Slide Number Placeholder 3"/>
+          <p:cNvSpPr>
+            <a:spLocks noGrp="1"/>
+          </p:cNvSpPr>
+          <p:nvPr>
+            <p:ph type="sldNum" sz="quarter" idx="10"/>
+          </p:nvPr>
+        </p:nvSpPr>
+        <p:spPr/>
+        <p:txBody>
+          <a:bodyPr/>
+          <a:lstStyle/>
+          <a:p>
+            <a:fld id="{F7021451-1387-4CA6-816F-3879F97B5CBC}" type="slidenum">
+              <a:rPr lang="en-US"/>
+              <a:t>14</a:t>
             </a:fld>
             <a:endParaRPr lang="en-US"/>
           </a:p>
@@ -2212,7 +2301,7 @@
           <a:p>
             <a:r>
               <a:rPr lang="en-US" dirty="0"/>
-              <a:t>Do not skip this slide to save time. It is the one that separates us. Deliver it confidently, not apologetically.</a:t>
+              <a:t>This is the slide that separates the project from an MVP. The claim is not that the simulation is realistic — it is that it has ground truth, which no public dataset does. Say the missed-cracks finding out loud: the two it missed were the biggest and the most centrally framed, so 'we will certainly catch the big ones' is not supported.</a:t>
             </a:r>
             <a:endParaRPr lang="en-US" dirty="0"/>
           </a:p>
@@ -3227,7 +3316,7 @@
                 <a:ea typeface="Calibri" pitchFamily="34" charset="-122"/>
                 <a:cs typeface="Calibri" pitchFamily="34" charset="-120"/>
               </a:rPr>
-              <a:t>UNDER THE HOOD</a:t>
+              <a:t>WHAT IT DOES NOT DO</a:t>
             </a:r>
             <a:endParaRPr lang="en-US" sz="1100" dirty="0"/>
           </a:p>
@@ -3266,7 +3355,7 @@
                 <a:ea typeface="Calibri" pitchFamily="34" charset="-122"/>
                 <a:cs typeface="Calibri" pitchFamily="34" charset="-120"/>
               </a:rPr>
-              <a:t>Boring technology, deliberately.</a:t>
+              <a:t>We measured the weaknesses too.</a:t>
             </a:r>
             <a:endParaRPr lang="en-US" sz="3800" dirty="0"/>
           </a:p>
@@ -3274,18 +3363,57 @@
       </p:sp>
       <p:sp>
         <p:nvSpPr>
-          <p:cNvPr id="6" name="Shape 4"/>
+          <p:cNvPr id="6" name="Text 4"/>
+          <p:cNvSpPr txBox="1"/>
+          <p:nvPr/>
+        </p:nvSpPr>
+        <p:spPr>
+          <a:xfrm>
+            <a:off x="685800" y="1783080"/>
+            <a:ext cx="10515600" cy="320040"/>
+          </a:xfrm>
+          <a:prstGeom prst="rect">
+            <a:avLst/>
+          </a:prstGeom>
+          <a:noFill/>
+          <a:ln/>
+        </p:spPr>
+        <p:txBody>
+          <a:bodyPr wrap="square" lIns="0" tIns="0" rIns="0" bIns="0" rtlCol="0" anchor="ctr"/>
+          <a:lstStyle/>
+          <a:p>
+            <a:pPr indent="0" marL="0">
+              <a:buNone/>
+            </a:pPr>
+            <a:r>
+              <a:rPr lang="en-US" sz="1350" dirty="0">
+                <a:solidFill>
+                  <a:srgbClr val="22D3EE"/>
+                </a:solidFill>
+                <a:latin typeface="Calibri" pitchFamily="34" charset="0"/>
+                <a:ea typeface="Calibri" pitchFamily="34" charset="-122"/>
+                <a:cs typeface="Calibri" pitchFamily="34" charset="-120"/>
+              </a:rPr>
+              <a:t>Every one of these is stated in the product itself and on the last page of every report.</a:t>
+            </a:r>
+            <a:endParaRPr lang="en-US" sz="1350" dirty="0"/>
+          </a:p>
+        </p:txBody>
+      </p:sp>
+      <p:sp>
+        <p:nvSpPr>
+          <p:cNvPr id="7" name="Shape 5"/>
           <p:cNvSpPr/>
           <p:nvPr/>
         </p:nvSpPr>
         <p:spPr>
           <a:xfrm>
-            <a:off x="685800" y="2240280"/>
-            <a:ext cx="6492240" cy="585216"/>
+            <a:off x="685800" y="2395728"/>
+            <a:ext cx="3429000" cy="1143000"/>
           </a:xfrm>
           <a:prstGeom prst="roundRect">
             <a:avLst>
-              <a:gd name="adj" fmla="val 18750"/>
+              <a:gd name="adj" fmla="val 9600"/>
             </a:avLst>
           </a:prstGeom>
           <a:solidFill>
@@ -3310,50 +3438,30 @@
       </p:sp>
       <p:sp>
         <p:nvSpPr>
-          <p:cNvPr id="7" name="Shape 5"/>
-          <p:cNvSpPr/>
-          <p:nvPr/>
-        </p:nvSpPr>
-        <p:spPr>
-          <a:xfrm>
-            <a:off x="960120" y="2468880"/>
-            <a:ext cx="128016" cy="128016"/>
-          </a:xfrm>
-          <a:prstGeom prst="ellipse">
-            <a:avLst/>
-          </a:prstGeom>
-          <a:solidFill>
-            <a:srgbClr val="22D3EE"/>
-          </a:solidFill>
-          <a:ln/>
-        </p:spPr>
-      </p:sp>
-      <p:sp>
-        <p:nvSpPr>
           <p:cNvPr id="8" name="Text 6"/>
           <p:cNvSpPr txBox="1"/>
           <p:nvPr/>
         </p:nvSpPr>
         <p:spPr>
           <a:xfrm>
-            <a:off x="1234440" y="2377440"/>
-            <a:ext cx="1463040" cy="310896"/>
-          </a:xfrm>
-          <a:prstGeom prst="rect">
-            <a:avLst/>
-          </a:prstGeom>
-          <a:noFill/>
-          <a:ln/>
-        </p:spPr>
-        <p:txBody>
-          <a:bodyPr wrap="square" lIns="0" tIns="0" rIns="0" bIns="0" rtlCol="0" anchor="ctr"/>
-          <a:lstStyle/>
-          <a:p>
-            <a:pPr indent="0" marL="0">
-              <a:buNone/>
-            </a:pPr>
-            <a:r>
-              <a:rPr lang="en-US" sz="1350" b="1" dirty="0">
+            <a:off x="923544" y="2514600"/>
+            <a:ext cx="2971800" cy="274320"/>
+          </a:xfrm>
+          <a:prstGeom prst="rect">
+            <a:avLst/>
+          </a:prstGeom>
+          <a:noFill/>
+          <a:ln/>
+        </p:spPr>
+        <p:txBody>
+          <a:bodyPr wrap="square" lIns="0" tIns="0" rIns="0" bIns="0" rtlCol="0" anchor="ctr"/>
+          <a:lstStyle/>
+          <a:p>
+            <a:pPr indent="0" marL="0">
+              <a:buNone/>
+            </a:pPr>
+            <a:r>
+              <a:rPr lang="en-US" sz="1300" b="1" dirty="0">
                 <a:solidFill>
                   <a:srgbClr val="E8EEF8"/>
                 </a:solidFill>
@@ -3361,9 +3469,9 @@
                 <a:ea typeface="Calibri" pitchFamily="34" charset="-122"/>
                 <a:cs typeface="Calibri" pitchFamily="34" charset="-120"/>
               </a:rPr>
-              <a:t>Frontend</a:t>
-            </a:r>
-            <a:endParaRPr lang="en-US" sz="1350" dirty="0"/>
+              <a:t>Cracks only</a:t>
+            </a:r>
+            <a:endParaRPr lang="en-US" sz="1300" dirty="0"/>
           </a:p>
         </p:txBody>
       </p:sp>
@@ -3375,24 +3483,27 @@
         </p:nvSpPr>
         <p:spPr>
           <a:xfrm>
-            <a:off x="2697480" y="2386584"/>
-            <a:ext cx="4297680" cy="310896"/>
-          </a:xfrm>
-          <a:prstGeom prst="rect">
-            <a:avLst/>
-          </a:prstGeom>
-          <a:noFill/>
-          <a:ln/>
-        </p:spPr>
-        <p:txBody>
-          <a:bodyPr wrap="square" lIns="0" tIns="0" rIns="0" bIns="0" rtlCol="0" anchor="ctr"/>
-          <a:lstStyle/>
-          <a:p>
-            <a:pPr indent="0" marL="0">
-              <a:buNone/>
-            </a:pPr>
-            <a:r>
-              <a:rPr lang="en-US" sz="1150" dirty="0">
+            <a:off x="923544" y="2807208"/>
+            <a:ext cx="3017520" cy="658368"/>
+          </a:xfrm>
+          <a:prstGeom prst="rect">
+            <a:avLst/>
+          </a:prstGeom>
+          <a:noFill/>
+          <a:ln/>
+        </p:spPr>
+        <p:txBody>
+          <a:bodyPr wrap="square" lIns="0" tIns="0" rIns="0" bIns="0" rtlCol="0" anchor="ctr"/>
+          <a:lstStyle/>
+          <a:p>
+            <a:pPr indent="0" marL="0">
+              <a:lnSpc>
+                <a:spcPct val="105000"/>
+              </a:lnSpc>
+              <a:buNone/>
+            </a:pPr>
+            <a:r>
+              <a:rPr lang="en-US" sz="1050" dirty="0">
                 <a:solidFill>
                   <a:srgbClr val="9FB0CC"/>
                 </a:solidFill>
@@ -3400,9 +3511,9 @@
                 <a:ea typeface="Calibri" pitchFamily="34" charset="-122"/>
                 <a:cs typeface="Calibri" pitchFamily="34" charset="-120"/>
               </a:rPr>
-              <a:t>Next.js 16 · React 19 · Three.js · Tailwind</a:t>
-            </a:r>
-            <a:endParaRPr lang="en-US" sz="1150" dirty="0"/>
+              <a:t>One defect class. It has never seen corrosion or spalling and will not report them.</a:t>
+            </a:r>
+            <a:endParaRPr lang="en-US" sz="1050" dirty="0"/>
           </a:p>
         </p:txBody>
       </p:sp>
@@ -3414,12 +3525,12 @@
         </p:nvSpPr>
         <p:spPr>
           <a:xfrm>
-            <a:off x="685800" y="2953512"/>
-            <a:ext cx="6492240" cy="585216"/>
+            <a:off x="4370832" y="2395728"/>
+            <a:ext cx="3429000" cy="1143000"/>
           </a:xfrm>
           <a:prstGeom prst="roundRect">
             <a:avLst>
-              <a:gd name="adj" fmla="val 18750"/>
+              <a:gd name="adj" fmla="val 9600"/>
             </a:avLst>
           </a:prstGeom>
           <a:solidFill>
@@ -3444,116 +3555,99 @@
       </p:sp>
       <p:sp>
         <p:nvSpPr>
-          <p:cNvPr id="11" name="Shape 9"/>
+          <p:cNvPr id="11" name="Text 9"/>
+          <p:cNvSpPr txBox="1"/>
+          <p:nvPr/>
+        </p:nvSpPr>
+        <p:spPr>
+          <a:xfrm>
+            <a:off x="4608576" y="2514600"/>
+            <a:ext cx="2971800" cy="274320"/>
+          </a:xfrm>
+          <a:prstGeom prst="rect">
+            <a:avLst/>
+          </a:prstGeom>
+          <a:noFill/>
+          <a:ln/>
+        </p:spPr>
+        <p:txBody>
+          <a:bodyPr wrap="square" lIns="0" tIns="0" rIns="0" bIns="0" rtlCol="0" anchor="ctr"/>
+          <a:lstStyle/>
+          <a:p>
+            <a:pPr indent="0" marL="0">
+              <a:buNone/>
+            </a:pPr>
+            <a:r>
+              <a:rPr lang="en-US" sz="1300" b="1" dirty="0">
+                <a:solidFill>
+                  <a:srgbClr val="E8EEF8"/>
+                </a:solidFill>
+                <a:latin typeface="Calibri" pitchFamily="34" charset="0"/>
+                <a:ea typeface="Calibri" pitchFamily="34" charset="-122"/>
+                <a:cs typeface="Calibri" pitchFamily="34" charset="-120"/>
+              </a:rPr>
+              <a:t>We flag 60% of photographs</a:t>
+            </a:r>
+            <a:endParaRPr lang="en-US" sz="1300" dirty="0"/>
+          </a:p>
+        </p:txBody>
+      </p:sp>
+      <p:sp>
+        <p:nvSpPr>
+          <p:cNvPr id="12" name="Text 10"/>
+          <p:cNvSpPr txBox="1"/>
+          <p:nvPr/>
+        </p:nvSpPr>
+        <p:spPr>
+          <a:xfrm>
+            <a:off x="4608576" y="2807208"/>
+            <a:ext cx="3017520" cy="658368"/>
+          </a:xfrm>
+          <a:prstGeom prst="rect">
+            <a:avLst/>
+          </a:prstGeom>
+          <a:noFill/>
+          <a:ln/>
+        </p:spPr>
+        <p:txBody>
+          <a:bodyPr wrap="square" lIns="0" tIns="0" rIns="0" bIns="0" rtlCol="0" anchor="ctr"/>
+          <a:lstStyle/>
+          <a:p>
+            <a:pPr indent="0" marL="0">
+              <a:lnSpc>
+                <a:spcPct val="105000"/>
+              </a:lnSpc>
+              <a:buNone/>
+            </a:pPr>
+            <a:r>
+              <a:rPr lang="en-US" sz="1050" dirty="0">
+                <a:solidFill>
+                  <a:srgbClr val="9FB0CC"/>
+                </a:solidFill>
+                <a:latin typeface="Calibri" pitchFamily="34" charset="0"/>
+                <a:ea typeface="Calibri" pitchFamily="34" charset="-122"/>
+                <a:cs typeface="Calibri" pitchFamily="34" charset="-120"/>
+              </a:rPr>
+              <a:t>Deliberate. Recall is the safety metric; review time is the cost. The threshold is a slider.</a:t>
+            </a:r>
+            <a:endParaRPr lang="en-US" sz="1050" dirty="0"/>
+          </a:p>
+        </p:txBody>
+      </p:sp>
+      <p:sp>
+        <p:nvSpPr>
+          <p:cNvPr id="13" name="Shape 11"/>
           <p:cNvSpPr/>
           <p:nvPr/>
         </p:nvSpPr>
         <p:spPr>
           <a:xfrm>
-            <a:off x="960120" y="3182112"/>
-            <a:ext cx="128016" cy="128016"/>
-          </a:xfrm>
-          <a:prstGeom prst="ellipse">
-            <a:avLst/>
-          </a:prstGeom>
-          <a:solidFill>
-            <a:srgbClr val="6366F1"/>
-          </a:solidFill>
-          <a:ln/>
-        </p:spPr>
-      </p:sp>
-      <p:sp>
-        <p:nvSpPr>
-          <p:cNvPr id="12" name="Text 10"/>
-          <p:cNvSpPr txBox="1"/>
-          <p:nvPr/>
-        </p:nvSpPr>
-        <p:spPr>
-          <a:xfrm>
-            <a:off x="1234440" y="3090672"/>
-            <a:ext cx="1463040" cy="310896"/>
-          </a:xfrm>
-          <a:prstGeom prst="rect">
-            <a:avLst/>
-          </a:prstGeom>
-          <a:noFill/>
-          <a:ln/>
-        </p:spPr>
-        <p:txBody>
-          <a:bodyPr wrap="square" lIns="0" tIns="0" rIns="0" bIns="0" rtlCol="0" anchor="ctr"/>
-          <a:lstStyle/>
-          <a:p>
-            <a:pPr indent="0" marL="0">
-              <a:buNone/>
-            </a:pPr>
-            <a:r>
-              <a:rPr lang="en-US" sz="1350" b="1" dirty="0">
-                <a:solidFill>
-                  <a:srgbClr val="E8EEF8"/>
-                </a:solidFill>
-                <a:latin typeface="Calibri" pitchFamily="34" charset="0"/>
-                <a:ea typeface="Calibri" pitchFamily="34" charset="-122"/>
-                <a:cs typeface="Calibri" pitchFamily="34" charset="-120"/>
-              </a:rPr>
-              <a:t>API</a:t>
-            </a:r>
-            <a:endParaRPr lang="en-US" sz="1350" dirty="0"/>
-          </a:p>
-        </p:txBody>
-      </p:sp>
-      <p:sp>
-        <p:nvSpPr>
-          <p:cNvPr id="13" name="Text 11"/>
-          <p:cNvSpPr txBox="1"/>
-          <p:nvPr/>
-        </p:nvSpPr>
-        <p:spPr>
-          <a:xfrm>
-            <a:off x="2697480" y="3099816"/>
-            <a:ext cx="4297680" cy="310896"/>
-          </a:xfrm>
-          <a:prstGeom prst="rect">
-            <a:avLst/>
-          </a:prstGeom>
-          <a:noFill/>
-          <a:ln/>
-        </p:spPr>
-        <p:txBody>
-          <a:bodyPr wrap="square" lIns="0" tIns="0" rIns="0" bIns="0" rtlCol="0" anchor="ctr"/>
-          <a:lstStyle/>
-          <a:p>
-            <a:pPr indent="0" marL="0">
-              <a:buNone/>
-            </a:pPr>
-            <a:r>
-              <a:rPr lang="en-US" sz="1150" dirty="0">
-                <a:solidFill>
-                  <a:srgbClr val="9FB0CC"/>
-                </a:solidFill>
-                <a:latin typeface="Calibri" pitchFamily="34" charset="0"/>
-                <a:ea typeface="Calibri" pitchFamily="34" charset="-122"/>
-                <a:cs typeface="Calibri" pitchFamily="34" charset="-120"/>
-              </a:rPr>
-              <a:t>FastAPI · Python 3.12 · SQLAlchemy · Alembic</a:t>
-            </a:r>
-            <a:endParaRPr lang="en-US" sz="1150" dirty="0"/>
-          </a:p>
-        </p:txBody>
-      </p:sp>
-      <p:sp>
-        <p:nvSpPr>
-          <p:cNvPr id="14" name="Shape 12"/>
-          <p:cNvSpPr/>
-          <p:nvPr/>
-        </p:nvSpPr>
-        <p:spPr>
-          <a:xfrm>
-            <a:off x="685800" y="3666744"/>
-            <a:ext cx="6492240" cy="585216"/>
+            <a:off x="8055864" y="2395728"/>
+            <a:ext cx="3429000" cy="1143000"/>
           </a:xfrm>
           <a:prstGeom prst="roundRect">
             <a:avLst>
-              <a:gd name="adj" fmla="val 18750"/>
+              <a:gd name="adj" fmla="val 9600"/>
             </a:avLst>
           </a:prstGeom>
           <a:solidFill>
@@ -3578,116 +3672,99 @@
       </p:sp>
       <p:sp>
         <p:nvSpPr>
-          <p:cNvPr id="15" name="Shape 13"/>
+          <p:cNvPr id="14" name="Text 12"/>
+          <p:cNvSpPr txBox="1"/>
+          <p:nvPr/>
+        </p:nvSpPr>
+        <p:spPr>
+          <a:xfrm>
+            <a:off x="8293608" y="2514600"/>
+            <a:ext cx="2971800" cy="274320"/>
+          </a:xfrm>
+          <a:prstGeom prst="rect">
+            <a:avLst/>
+          </a:prstGeom>
+          <a:noFill/>
+          <a:ln/>
+        </p:spPr>
+        <p:txBody>
+          <a:bodyPr wrap="square" lIns="0" tIns="0" rIns="0" bIns="0" rtlCol="0" anchor="ctr"/>
+          <a:lstStyle/>
+          <a:p>
+            <a:pPr indent="0" marL="0">
+              <a:buNone/>
+            </a:pPr>
+            <a:r>
+              <a:rPr lang="en-US" sz="1300" b="1" dirty="0">
+                <a:solidFill>
+                  <a:srgbClr val="E8EEF8"/>
+                </a:solidFill>
+                <a:latin typeface="Calibri" pitchFamily="34" charset="0"/>
+                <a:ea typeface="Calibri" pitchFamily="34" charset="-122"/>
+                <a:cs typeface="Calibri" pitchFamily="34" charset="-120"/>
+              </a:rPr>
+              <a:t>56% on the one unseen source</a:t>
+            </a:r>
+            <a:endParaRPr lang="en-US" sz="1300" dirty="0"/>
+          </a:p>
+        </p:txBody>
+      </p:sp>
+      <p:sp>
+        <p:nvSpPr>
+          <p:cNvPr id="15" name="Text 13"/>
+          <p:cNvSpPr txBox="1"/>
+          <p:nvPr/>
+        </p:nvSpPr>
+        <p:spPr>
+          <a:xfrm>
+            <a:off x="8293608" y="2807208"/>
+            <a:ext cx="3017520" cy="658368"/>
+          </a:xfrm>
+          <a:prstGeom prst="rect">
+            <a:avLst/>
+          </a:prstGeom>
+          <a:noFill/>
+          <a:ln/>
+        </p:spPr>
+        <p:txBody>
+          <a:bodyPr wrap="square" lIns="0" tIns="0" rIns="0" bIns="0" rtlCol="0" anchor="ctr"/>
+          <a:lstStyle/>
+          <a:p>
+            <a:pPr indent="0" marL="0">
+              <a:lnSpc>
+                <a:spcPct val="105000"/>
+              </a:lnSpc>
+              <a:buNone/>
+            </a:pPr>
+            <a:r>
+              <a:rPr lang="en-US" sz="1050" dirty="0">
+                <a:solidFill>
+                  <a:srgbClr val="9FB0CC"/>
+                </a:solidFill>
+                <a:latin typeface="Calibri" pitchFamily="34" charset="0"/>
+                <a:ea typeface="Calibri" pitchFamily="34" charset="-122"/>
+                <a:cs typeface="Calibri" pitchFamily="34" charset="-120"/>
+              </a:rPr>
+              <a:t>Versus 84-100% on the three in training. Only bridge-defect is wholly unseen, and we say so.</a:t>
+            </a:r>
+            <a:endParaRPr lang="en-US" sz="1050" dirty="0"/>
+          </a:p>
+        </p:txBody>
+      </p:sp>
+      <p:sp>
+        <p:nvSpPr>
+          <p:cNvPr id="16" name="Shape 14"/>
           <p:cNvSpPr/>
           <p:nvPr/>
         </p:nvSpPr>
         <p:spPr>
           <a:xfrm>
-            <a:off x="960120" y="3895344"/>
-            <a:ext cx="128016" cy="128016"/>
-          </a:xfrm>
-          <a:prstGeom prst="ellipse">
-            <a:avLst/>
-          </a:prstGeom>
-          <a:solidFill>
-            <a:srgbClr val="A78BFA"/>
-          </a:solidFill>
-          <a:ln/>
-        </p:spPr>
-      </p:sp>
-      <p:sp>
-        <p:nvSpPr>
-          <p:cNvPr id="16" name="Text 14"/>
-          <p:cNvSpPr txBox="1"/>
-          <p:nvPr/>
-        </p:nvSpPr>
-        <p:spPr>
-          <a:xfrm>
-            <a:off x="1234440" y="3803904"/>
-            <a:ext cx="1463040" cy="310896"/>
-          </a:xfrm>
-          <a:prstGeom prst="rect">
-            <a:avLst/>
-          </a:prstGeom>
-          <a:noFill/>
-          <a:ln/>
-        </p:spPr>
-        <p:txBody>
-          <a:bodyPr wrap="square" lIns="0" tIns="0" rIns="0" bIns="0" rtlCol="0" anchor="ctr"/>
-          <a:lstStyle/>
-          <a:p>
-            <a:pPr indent="0" marL="0">
-              <a:buNone/>
-            </a:pPr>
-            <a:r>
-              <a:rPr lang="en-US" sz="1350" b="1" dirty="0">
-                <a:solidFill>
-                  <a:srgbClr val="E8EEF8"/>
-                </a:solidFill>
-                <a:latin typeface="Calibri" pitchFamily="34" charset="0"/>
-                <a:ea typeface="Calibri" pitchFamily="34" charset="-122"/>
-                <a:cs typeface="Calibri" pitchFamily="34" charset="-120"/>
-              </a:rPr>
-              <a:t>Model</a:t>
-            </a:r>
-            <a:endParaRPr lang="en-US" sz="1350" dirty="0"/>
-          </a:p>
-        </p:txBody>
-      </p:sp>
-      <p:sp>
-        <p:nvSpPr>
-          <p:cNvPr id="17" name="Text 15"/>
-          <p:cNvSpPr txBox="1"/>
-          <p:nvPr/>
-        </p:nvSpPr>
-        <p:spPr>
-          <a:xfrm>
-            <a:off x="2697480" y="3813048"/>
-            <a:ext cx="4297680" cy="310896"/>
-          </a:xfrm>
-          <a:prstGeom prst="rect">
-            <a:avLst/>
-          </a:prstGeom>
-          <a:noFill/>
-          <a:ln/>
-        </p:spPr>
-        <p:txBody>
-          <a:bodyPr wrap="square" lIns="0" tIns="0" rIns="0" bIns="0" rtlCol="0" anchor="ctr"/>
-          <a:lstStyle/>
-          <a:p>
-            <a:pPr indent="0" marL="0">
-              <a:buNone/>
-            </a:pPr>
-            <a:r>
-              <a:rPr lang="en-US" sz="1150" dirty="0">
-                <a:solidFill>
-                  <a:srgbClr val="9FB0CC"/>
-                </a:solidFill>
-                <a:latin typeface="Calibri" pitchFamily="34" charset="0"/>
-                <a:ea typeface="Calibri" pitchFamily="34" charset="-122"/>
-                <a:cs typeface="Calibri" pitchFamily="34" charset="-120"/>
-              </a:rPr>
-              <a:t>YOLOv11n fine-tuned · PyTorch 2.13 · CUDA 13</a:t>
-            </a:r>
-            <a:endParaRPr lang="en-US" sz="1150" dirty="0"/>
-          </a:p>
-        </p:txBody>
-      </p:sp>
-      <p:sp>
-        <p:nvSpPr>
-          <p:cNvPr id="18" name="Shape 16"/>
-          <p:cNvSpPr/>
-          <p:nvPr/>
-        </p:nvSpPr>
-        <p:spPr>
-          <a:xfrm>
-            <a:off x="685800" y="4379976"/>
-            <a:ext cx="6492240" cy="585216"/>
+            <a:off x="685800" y="3675888"/>
+            <a:ext cx="3429000" cy="1143000"/>
           </a:xfrm>
           <a:prstGeom prst="roundRect">
             <a:avLst>
-              <a:gd name="adj" fmla="val 18750"/>
+              <a:gd name="adj" fmla="val 9600"/>
             </a:avLst>
           </a:prstGeom>
           <a:solidFill>
@@ -3712,116 +3789,99 @@
       </p:sp>
       <p:sp>
         <p:nvSpPr>
+          <p:cNvPr id="17" name="Text 15"/>
+          <p:cNvSpPr txBox="1"/>
+          <p:nvPr/>
+        </p:nvSpPr>
+        <p:spPr>
+          <a:xfrm>
+            <a:off x="923544" y="3794760"/>
+            <a:ext cx="2971800" cy="274320"/>
+          </a:xfrm>
+          <a:prstGeom prst="rect">
+            <a:avLst/>
+          </a:prstGeom>
+          <a:noFill/>
+          <a:ln/>
+        </p:spPr>
+        <p:txBody>
+          <a:bodyPr wrap="square" lIns="0" tIns="0" rIns="0" bIns="0" rtlCol="0" anchor="ctr"/>
+          <a:lstStyle/>
+          <a:p>
+            <a:pPr indent="0" marL="0">
+              <a:buNone/>
+            </a:pPr>
+            <a:r>
+              <a:rPr lang="en-US" sz="1300" b="1" dirty="0">
+                <a:solidFill>
+                  <a:srgbClr val="E8EEF8"/>
+                </a:solidFill>
+                <a:latin typeface="Calibri" pitchFamily="34" charset="0"/>
+                <a:ea typeface="Calibri" pitchFamily="34" charset="-122"/>
+                <a:cs typeface="Calibri" pitchFamily="34" charset="-120"/>
+              </a:rPr>
+              <a:t>Severity is relative</a:t>
+            </a:r>
+            <a:endParaRPr lang="en-US" sz="1300" dirty="0"/>
+          </a:p>
+        </p:txBody>
+      </p:sp>
+      <p:sp>
+        <p:nvSpPr>
+          <p:cNvPr id="18" name="Text 16"/>
+          <p:cNvSpPr txBox="1"/>
+          <p:nvPr/>
+        </p:nvSpPr>
+        <p:spPr>
+          <a:xfrm>
+            <a:off x="923544" y="4087368"/>
+            <a:ext cx="3017520" cy="658368"/>
+          </a:xfrm>
+          <a:prstGeom prst="rect">
+            <a:avLst/>
+          </a:prstGeom>
+          <a:noFill/>
+          <a:ln/>
+        </p:spPr>
+        <p:txBody>
+          <a:bodyPr wrap="square" lIns="0" tIns="0" rIns="0" bIns="0" rtlCol="0" anchor="ctr"/>
+          <a:lstStyle/>
+          <a:p>
+            <a:pPr indent="0" marL="0">
+              <a:lnSpc>
+                <a:spcPct val="105000"/>
+              </a:lnSpc>
+              <a:buNone/>
+            </a:pPr>
+            <a:r>
+              <a:rPr lang="en-US" sz="1050" dirty="0">
+                <a:solidFill>
+                  <a:srgbClr val="9FB0CC"/>
+                </a:solidFill>
+                <a:latin typeface="Calibri" pitchFamily="34" charset="0"/>
+                <a:ea typeface="Calibri" pitchFamily="34" charset="-122"/>
+                <a:cs typeface="Calibri" pitchFamily="34" charset="-120"/>
+              </a:rPr>
+              <a:t>It ranks which crack to look at first. It does not measure width in millimetres.</a:t>
+            </a:r>
+            <a:endParaRPr lang="en-US" sz="1050" dirty="0"/>
+          </a:p>
+        </p:txBody>
+      </p:sp>
+      <p:sp>
+        <p:nvSpPr>
           <p:cNvPr id="19" name="Shape 17"/>
           <p:cNvSpPr/>
           <p:nvPr/>
         </p:nvSpPr>
         <p:spPr>
           <a:xfrm>
-            <a:off x="960120" y="4608576"/>
-            <a:ext cx="128016" cy="128016"/>
-          </a:xfrm>
-          <a:prstGeom prst="ellipse">
-            <a:avLst/>
-          </a:prstGeom>
-          <a:solidFill>
-            <a:srgbClr val="10B981"/>
-          </a:solidFill>
-          <a:ln/>
-        </p:spPr>
-      </p:sp>
-      <p:sp>
-        <p:nvSpPr>
-          <p:cNvPr id="20" name="Text 18"/>
-          <p:cNvSpPr txBox="1"/>
-          <p:nvPr/>
-        </p:nvSpPr>
-        <p:spPr>
-          <a:xfrm>
-            <a:off x="1234440" y="4517136"/>
-            <a:ext cx="1463040" cy="310896"/>
-          </a:xfrm>
-          <a:prstGeom prst="rect">
-            <a:avLst/>
-          </a:prstGeom>
-          <a:noFill/>
-          <a:ln/>
-        </p:spPr>
-        <p:txBody>
-          <a:bodyPr wrap="square" lIns="0" tIns="0" rIns="0" bIns="0" rtlCol="0" anchor="ctr"/>
-          <a:lstStyle/>
-          <a:p>
-            <a:pPr indent="0" marL="0">
-              <a:buNone/>
-            </a:pPr>
-            <a:r>
-              <a:rPr lang="en-US" sz="1350" b="1" dirty="0">
-                <a:solidFill>
-                  <a:srgbClr val="E8EEF8"/>
-                </a:solidFill>
-                <a:latin typeface="Calibri" pitchFamily="34" charset="0"/>
-                <a:ea typeface="Calibri" pitchFamily="34" charset="-122"/>
-                <a:cs typeface="Calibri" pitchFamily="34" charset="-120"/>
-              </a:rPr>
-              <a:t>Data</a:t>
-            </a:r>
-            <a:endParaRPr lang="en-US" sz="1350" dirty="0"/>
-          </a:p>
-        </p:txBody>
-      </p:sp>
-      <p:sp>
-        <p:nvSpPr>
-          <p:cNvPr id="21" name="Text 19"/>
-          <p:cNvSpPr txBox="1"/>
-          <p:nvPr/>
-        </p:nvSpPr>
-        <p:spPr>
-          <a:xfrm>
-            <a:off x="2697480" y="4526280"/>
-            <a:ext cx="4297680" cy="310896"/>
-          </a:xfrm>
-          <a:prstGeom prst="rect">
-            <a:avLst/>
-          </a:prstGeom>
-          <a:noFill/>
-          <a:ln/>
-        </p:spPr>
-        <p:txBody>
-          <a:bodyPr wrap="square" lIns="0" tIns="0" rIns="0" bIns="0" rtlCol="0" anchor="ctr"/>
-          <a:lstStyle/>
-          <a:p>
-            <a:pPr indent="0" marL="0">
-              <a:buNone/>
-            </a:pPr>
-            <a:r>
-              <a:rPr lang="en-US" sz="1150" dirty="0">
-                <a:solidFill>
-                  <a:srgbClr val="9FB0CC"/>
-                </a:solidFill>
-                <a:latin typeface="Calibri" pitchFamily="34" charset="0"/>
-                <a:ea typeface="Calibri" pitchFamily="34" charset="-122"/>
-                <a:cs typeface="Calibri" pitchFamily="34" charset="-120"/>
-              </a:rPr>
-              <a:t>PostgreSQL 16 · MinIO (S3-compatible)</a:t>
-            </a:r>
-            <a:endParaRPr lang="en-US" sz="1150" dirty="0"/>
-          </a:p>
-        </p:txBody>
-      </p:sp>
-      <p:sp>
-        <p:nvSpPr>
-          <p:cNvPr id="22" name="Shape 20"/>
-          <p:cNvSpPr/>
-          <p:nvPr/>
-        </p:nvSpPr>
-        <p:spPr>
-          <a:xfrm>
-            <a:off x="685800" y="5093208"/>
-            <a:ext cx="6492240" cy="585216"/>
+            <a:off x="4370832" y="3675888"/>
+            <a:ext cx="3429000" cy="1143000"/>
           </a:xfrm>
           <a:prstGeom prst="roundRect">
             <a:avLst>
-              <a:gd name="adj" fmla="val 18750"/>
+              <a:gd name="adj" fmla="val 9600"/>
             </a:avLst>
           </a:prstGeom>
           <a:solidFill>
@@ -3846,116 +3906,99 @@
       </p:sp>
       <p:sp>
         <p:nvSpPr>
-          <p:cNvPr id="23" name="Shape 21"/>
+          <p:cNvPr id="20" name="Text 18"/>
+          <p:cNvSpPr txBox="1"/>
+          <p:nvPr/>
+        </p:nvSpPr>
+        <p:spPr>
+          <a:xfrm>
+            <a:off x="4608576" y="3794760"/>
+            <a:ext cx="2971800" cy="274320"/>
+          </a:xfrm>
+          <a:prstGeom prst="rect">
+            <a:avLst/>
+          </a:prstGeom>
+          <a:noFill/>
+          <a:ln/>
+        </p:spPr>
+        <p:txBody>
+          <a:bodyPr wrap="square" lIns="0" tIns="0" rIns="0" bIns="0" rtlCol="0" anchor="ctr"/>
+          <a:lstStyle/>
+          <a:p>
+            <a:pPr indent="0" marL="0">
+              <a:buNone/>
+            </a:pPr>
+            <a:r>
+              <a:rPr lang="en-US" sz="1300" b="1" dirty="0">
+                <a:solidFill>
+                  <a:srgbClr val="E8EEF8"/>
+                </a:solidFill>
+                <a:latin typeface="Calibri" pitchFamily="34" charset="0"/>
+                <a:ea typeface="Calibri" pitchFamily="34" charset="-122"/>
+                <a:cs typeface="Calibri" pitchFamily="34" charset="-120"/>
+              </a:rPr>
+              <a:t>The 3D view is illustrative</a:t>
+            </a:r>
+            <a:endParaRPr lang="en-US" sz="1300" dirty="0"/>
+          </a:p>
+        </p:txBody>
+      </p:sp>
+      <p:sp>
+        <p:nvSpPr>
+          <p:cNvPr id="21" name="Text 19"/>
+          <p:cNvSpPr txBox="1"/>
+          <p:nvPr/>
+        </p:nvSpPr>
+        <p:spPr>
+          <a:xfrm>
+            <a:off x="4608576" y="4087368"/>
+            <a:ext cx="3017520" cy="658368"/>
+          </a:xfrm>
+          <a:prstGeom prst="rect">
+            <a:avLst/>
+          </a:prstGeom>
+          <a:noFill/>
+          <a:ln/>
+        </p:spPr>
+        <p:txBody>
+          <a:bodyPr wrap="square" lIns="0" tIns="0" rIns="0" bIns="0" rtlCol="0" anchor="ctr"/>
+          <a:lstStyle/>
+          <a:p>
+            <a:pPr indent="0" marL="0">
+              <a:lnSpc>
+                <a:spcPct val="105000"/>
+              </a:lnSpc>
+              <a:buNone/>
+            </a:pPr>
+            <a:r>
+              <a:rPr lang="en-US" sz="1050" dirty="0">
+                <a:solidFill>
+                  <a:srgbClr val="9FB0CC"/>
+                </a:solidFill>
+                <a:latin typeface="Calibri" pitchFamily="34" charset="0"/>
+                <a:ea typeface="Calibri" pitchFamily="34" charset="-122"/>
+                <a:cs typeface="Calibri" pitchFamily="34" charset="-120"/>
+              </a:rPr>
+              <a:t>Marker positions come from capture order, not surveyed coordinates.</a:t>
+            </a:r>
+            <a:endParaRPr lang="en-US" sz="1050" dirty="0"/>
+          </a:p>
+        </p:txBody>
+      </p:sp>
+      <p:sp>
+        <p:nvSpPr>
+          <p:cNvPr id="22" name="Shape 20"/>
           <p:cNvSpPr/>
           <p:nvPr/>
         </p:nvSpPr>
         <p:spPr>
           <a:xfrm>
-            <a:off x="960120" y="5321808"/>
-            <a:ext cx="128016" cy="128016"/>
-          </a:xfrm>
-          <a:prstGeom prst="ellipse">
-            <a:avLst/>
-          </a:prstGeom>
-          <a:solidFill>
-            <a:srgbClr val="F59E0B"/>
-          </a:solidFill>
-          <a:ln/>
-        </p:spPr>
-      </p:sp>
-      <p:sp>
-        <p:nvSpPr>
-          <p:cNvPr id="24" name="Text 22"/>
-          <p:cNvSpPr txBox="1"/>
-          <p:nvPr/>
-        </p:nvSpPr>
-        <p:spPr>
-          <a:xfrm>
-            <a:off x="1234440" y="5230368"/>
-            <a:ext cx="1463040" cy="310896"/>
-          </a:xfrm>
-          <a:prstGeom prst="rect">
-            <a:avLst/>
-          </a:prstGeom>
-          <a:noFill/>
-          <a:ln/>
-        </p:spPr>
-        <p:txBody>
-          <a:bodyPr wrap="square" lIns="0" tIns="0" rIns="0" bIns="0" rtlCol="0" anchor="ctr"/>
-          <a:lstStyle/>
-          <a:p>
-            <a:pPr indent="0" marL="0">
-              <a:buNone/>
-            </a:pPr>
-            <a:r>
-              <a:rPr lang="en-US" sz="1350" b="1" dirty="0">
-                <a:solidFill>
-                  <a:srgbClr val="E8EEF8"/>
-                </a:solidFill>
-                <a:latin typeface="Calibri" pitchFamily="34" charset="0"/>
-                <a:ea typeface="Calibri" pitchFamily="34" charset="-122"/>
-                <a:cs typeface="Calibri" pitchFamily="34" charset="-120"/>
-              </a:rPr>
-              <a:t>Ship</a:t>
-            </a:r>
-            <a:endParaRPr lang="en-US" sz="1350" dirty="0"/>
-          </a:p>
-        </p:txBody>
-      </p:sp>
-      <p:sp>
-        <p:nvSpPr>
-          <p:cNvPr id="25" name="Text 23"/>
-          <p:cNvSpPr txBox="1"/>
-          <p:nvPr/>
-        </p:nvSpPr>
-        <p:spPr>
-          <a:xfrm>
-            <a:off x="2697480" y="5239512"/>
-            <a:ext cx="4297680" cy="310896"/>
-          </a:xfrm>
-          <a:prstGeom prst="rect">
-            <a:avLst/>
-          </a:prstGeom>
-          <a:noFill/>
-          <a:ln/>
-        </p:spPr>
-        <p:txBody>
-          <a:bodyPr wrap="square" lIns="0" tIns="0" rIns="0" bIns="0" rtlCol="0" anchor="ctr"/>
-          <a:lstStyle/>
-          <a:p>
-            <a:pPr indent="0" marL="0">
-              <a:buNone/>
-            </a:pPr>
-            <a:r>
-              <a:rPr lang="en-US" sz="1150" dirty="0">
-                <a:solidFill>
-                  <a:srgbClr val="9FB0CC"/>
-                </a:solidFill>
-                <a:latin typeface="Calibri" pitchFamily="34" charset="0"/>
-                <a:ea typeface="Calibri" pitchFamily="34" charset="-122"/>
-                <a:cs typeface="Calibri" pitchFamily="34" charset="-120"/>
-              </a:rPr>
-              <a:t>Docker Compose · GitHub Actions CI · JWT + RBAC</a:t>
-            </a:r>
-            <a:endParaRPr lang="en-US" sz="1150" dirty="0"/>
-          </a:p>
-        </p:txBody>
-      </p:sp>
-      <p:sp>
-        <p:nvSpPr>
-          <p:cNvPr id="26" name="Shape 24"/>
-          <p:cNvSpPr/>
-          <p:nvPr/>
-        </p:nvSpPr>
-        <p:spPr>
-          <a:xfrm>
-            <a:off x="7589520" y="2240280"/>
-            <a:ext cx="3886200" cy="3630168"/>
+            <a:off x="8055864" y="3675888"/>
+            <a:ext cx="3429000" cy="1143000"/>
           </a:xfrm>
           <a:prstGeom prst="roundRect">
             <a:avLst>
-              <a:gd name="adj" fmla="val 3023"/>
+              <a:gd name="adj" fmla="val 9600"/>
             </a:avLst>
           </a:prstGeom>
           <a:solidFill>
@@ -3980,40 +4023,199 @@
       </p:sp>
       <p:sp>
         <p:nvSpPr>
+          <p:cNvPr id="23" name="Text 21"/>
+          <p:cNvSpPr txBox="1"/>
+          <p:nvPr/>
+        </p:nvSpPr>
+        <p:spPr>
+          <a:xfrm>
+            <a:off x="8293608" y="3794760"/>
+            <a:ext cx="2971800" cy="274320"/>
+          </a:xfrm>
+          <a:prstGeom prst="rect">
+            <a:avLst/>
+          </a:prstGeom>
+          <a:noFill/>
+          <a:ln/>
+        </p:spPr>
+        <p:txBody>
+          <a:bodyPr wrap="square" lIns="0" tIns="0" rIns="0" bIns="0" rtlCol="0" anchor="ctr"/>
+          <a:lstStyle/>
+          <a:p>
+            <a:pPr indent="0" marL="0">
+              <a:buNone/>
+            </a:pPr>
+            <a:r>
+              <a:rPr lang="en-US" sz="1300" b="1" dirty="0">
+                <a:solidFill>
+                  <a:srgbClr val="E8EEF8"/>
+                </a:solidFill>
+                <a:latin typeface="Calibri" pitchFamily="34" charset="0"/>
+                <a:ea typeface="Calibri" pitchFamily="34" charset="-122"/>
+                <a:cs typeface="Calibri" pitchFamily="34" charset="-120"/>
+              </a:rPr>
+              <a:t>Video counts are inflated</a:t>
+            </a:r>
+            <a:endParaRPr lang="en-US" sz="1300" dirty="0"/>
+          </a:p>
+        </p:txBody>
+      </p:sp>
+      <p:sp>
+        <p:nvSpPr>
+          <p:cNvPr id="24" name="Text 22"/>
+          <p:cNvSpPr txBox="1"/>
+          <p:nvPr/>
+        </p:nvSpPr>
+        <p:spPr>
+          <a:xfrm>
+            <a:off x="8293608" y="4087368"/>
+            <a:ext cx="3017520" cy="658368"/>
+          </a:xfrm>
+          <a:prstGeom prst="rect">
+            <a:avLst/>
+          </a:prstGeom>
+          <a:noFill/>
+          <a:ln/>
+        </p:spPr>
+        <p:txBody>
+          <a:bodyPr wrap="square" lIns="0" tIns="0" rIns="0" bIns="0" rtlCol="0" anchor="ctr"/>
+          <a:lstStyle/>
+          <a:p>
+            <a:pPr indent="0" marL="0">
+              <a:lnSpc>
+                <a:spcPct val="105000"/>
+              </a:lnSpc>
+              <a:buNone/>
+            </a:pPr>
+            <a:r>
+              <a:rPr lang="en-US" sz="1050" dirty="0">
+                <a:solidFill>
+                  <a:srgbClr val="9FB0CC"/>
+                </a:solidFill>
+                <a:latin typeface="Calibri" pitchFamily="34" charset="0"/>
+                <a:ea typeface="Calibri" pitchFamily="34" charset="-122"/>
+                <a:cs typeface="Calibri" pitchFamily="34" charset="-120"/>
+              </a:rPr>
+              <a:t>Frames are analysed independently, so one crack can be counted many times.</a:t>
+            </a:r>
+            <a:endParaRPr lang="en-US" sz="1050" dirty="0"/>
+          </a:p>
+        </p:txBody>
+      </p:sp>
+      <p:sp>
+        <p:nvSpPr>
+          <p:cNvPr id="25" name="Shape 23"/>
+          <p:cNvSpPr/>
+          <p:nvPr/>
+        </p:nvSpPr>
+        <p:spPr>
+          <a:xfrm>
+            <a:off x="685800" y="4956048"/>
+            <a:ext cx="3429000" cy="1143000"/>
+          </a:xfrm>
+          <a:prstGeom prst="roundRect">
+            <a:avLst>
+              <a:gd name="adj" fmla="val 9600"/>
+            </a:avLst>
+          </a:prstGeom>
+          <a:solidFill>
+            <a:srgbClr val="111A2E">
+              <a:alpha val="82000"/>
+            </a:srgbClr>
+          </a:solidFill>
+          <a:ln w="12700">
+            <a:solidFill>
+              <a:srgbClr val="1E2B44"/>
+            </a:solidFill>
+            <a:prstDash val="solid"/>
+          </a:ln>
+          <a:effectLst>
+            <a:outerShdw sx="100000" sy="100000" kx="0" ky="0" algn="bl" rotWithShape="0" blurRad="177800" dist="38100" dir="5400000">
+              <a:srgbClr val="000000">
+                <a:alpha val="35000"/>
+              </a:srgbClr>
+            </a:outerShdw>
+          </a:effectLst>
+        </p:spPr>
+      </p:sp>
+      <p:sp>
+        <p:nvSpPr>
+          <p:cNvPr id="26" name="Text 24"/>
+          <p:cNvSpPr txBox="1"/>
+          <p:nvPr/>
+        </p:nvSpPr>
+        <p:spPr>
+          <a:xfrm>
+            <a:off x="923544" y="5074920"/>
+            <a:ext cx="2971800" cy="274320"/>
+          </a:xfrm>
+          <a:prstGeom prst="rect">
+            <a:avLst/>
+          </a:prstGeom>
+          <a:noFill/>
+          <a:ln/>
+        </p:spPr>
+        <p:txBody>
+          <a:bodyPr wrap="square" lIns="0" tIns="0" rIns="0" bIns="0" rtlCol="0" anchor="ctr"/>
+          <a:lstStyle/>
+          <a:p>
+            <a:pPr indent="0" marL="0">
+              <a:buNone/>
+            </a:pPr>
+            <a:r>
+              <a:rPr lang="en-US" sz="1300" b="1" dirty="0">
+                <a:solidFill>
+                  <a:srgbClr val="E8EEF8"/>
+                </a:solidFill>
+                <a:latin typeface="Calibri" pitchFamily="34" charset="0"/>
+                <a:ea typeface="Calibri" pitchFamily="34" charset="-122"/>
+                <a:cs typeface="Calibri" pitchFamily="34" charset="-120"/>
+              </a:rPr>
+              <a:t>Not an engineering assessment</a:t>
+            </a:r>
+            <a:endParaRPr lang="en-US" sz="1300" dirty="0"/>
+          </a:p>
+        </p:txBody>
+      </p:sp>
+      <p:sp>
+        <p:nvSpPr>
           <p:cNvPr id="27" name="Text 25"/>
           <p:cNvSpPr txBox="1"/>
           <p:nvPr/>
         </p:nvSpPr>
         <p:spPr>
           <a:xfrm>
-            <a:off x="7909560" y="2450592"/>
-            <a:ext cx="3291840" cy="292608"/>
-          </a:xfrm>
-          <a:prstGeom prst="rect">
-            <a:avLst/>
-          </a:prstGeom>
-          <a:noFill/>
-          <a:ln/>
-        </p:spPr>
-        <p:txBody>
-          <a:bodyPr wrap="square" lIns="0" tIns="0" rIns="0" bIns="0" rtlCol="0" anchor="ctr"/>
-          <a:lstStyle/>
-          <a:p>
-            <a:pPr indent="0" marL="0">
-              <a:buNone/>
-            </a:pPr>
-            <a:r>
-              <a:rPr lang="en-US" sz="1450" b="1" dirty="0">
-                <a:solidFill>
-                  <a:srgbClr val="E8EEF8"/>
-                </a:solidFill>
-                <a:latin typeface="Calibri" pitchFamily="34" charset="0"/>
-                <a:ea typeface="Calibri" pitchFamily="34" charset="-122"/>
-                <a:cs typeface="Calibri" pitchFamily="34" charset="-120"/>
-              </a:rPr>
-              <a:t>Decisions on record</a:t>
-            </a:r>
-            <a:endParaRPr lang="en-US" sz="1450" dirty="0"/>
+            <a:off x="923544" y="5367528"/>
+            <a:ext cx="3017520" cy="658368"/>
+          </a:xfrm>
+          <a:prstGeom prst="rect">
+            <a:avLst/>
+          </a:prstGeom>
+          <a:noFill/>
+          <a:ln/>
+        </p:spPr>
+        <p:txBody>
+          <a:bodyPr wrap="square" lIns="0" tIns="0" rIns="0" bIns="0" rtlCol="0" anchor="ctr"/>
+          <a:lstStyle/>
+          <a:p>
+            <a:pPr indent="0" marL="0">
+              <a:lnSpc>
+                <a:spcPct val="105000"/>
+              </a:lnSpc>
+              <a:buNone/>
+            </a:pPr>
+            <a:r>
+              <a:rPr lang="en-US" sz="1050" dirty="0">
+                <a:solidFill>
+                  <a:srgbClr val="9FB0CC"/>
+                </a:solidFill>
+                <a:latin typeface="Calibri" pitchFamily="34" charset="0"/>
+                <a:ea typeface="Calibri" pitchFamily="34" charset="-122"/>
+                <a:cs typeface="Calibri" pitchFamily="34" charset="-120"/>
+              </a:rPr>
+              <a:t>It is a screening pass. A qualified engineer still signs off.</a:t>
+            </a:r>
+            <a:endParaRPr lang="en-US" sz="1050" dirty="0"/>
           </a:p>
         </p:txBody>
       </p:sp>
@@ -4025,95 +4227,34 @@
         </p:nvSpPr>
         <p:spPr>
           <a:xfrm>
-            <a:off x="7909560" y="2834640"/>
-            <a:ext cx="3291840" cy="2834640"/>
-          </a:xfrm>
-          <a:prstGeom prst="rect">
-            <a:avLst/>
-          </a:prstGeom>
-          <a:noFill/>
-          <a:ln/>
-        </p:spPr>
-        <p:txBody>
-          <a:bodyPr wrap="square" lIns="0" tIns="0" rIns="0" bIns="0" rtlCol="0" anchor="ctr"/>
-          <a:lstStyle/>
-          <a:p>
-            <a:pPr indent="0" marL="0">
-              <a:lnSpc>
-                <a:spcPct val="112000"/>
-              </a:lnSpc>
-              <a:buNone/>
-            </a:pPr>
-            <a:r>
-              <a:rPr lang="en-US" sz="1200" dirty="0">
-                <a:solidFill>
-                  <a:srgbClr val="9FB0CC"/>
-                </a:solidFill>
-                <a:latin typeface="Calibri" pitchFamily="34" charset="0"/>
-                <a:ea typeface="Calibri" pitchFamily="34" charset="-122"/>
-                <a:cs typeface="Calibri" pitchFamily="34" charset="-120"/>
-              </a:rPr>
-              <a:t>20 architectural decisions are written down with their reasoning — including the ones we got wrong, and one we had to publicly reverse after re-checking it.</a:t>
-            </a:r>
-            <a:endParaRPr lang="en-US" sz="1200" dirty="0"/>
-          </a:p>
-          <a:p>
-            <a:pPr indent="0" marL="0">
-              <a:lnSpc>
-                <a:spcPct val="112000"/>
-              </a:lnSpc>
-              <a:buNone/>
-            </a:pPr>
-            <a:endParaRPr lang="en-US" sz="1200" dirty="0"/>
-          </a:p>
-          <a:p>
-            <a:pPr indent="0" marL="0">
-              <a:lnSpc>
-                <a:spcPct val="112000"/>
-              </a:lnSpc>
-              <a:buNone/>
-            </a:pPr>
-            <a:r>
-              <a:rPr lang="en-US" sz="1200" dirty="0">
-                <a:solidFill>
-                  <a:srgbClr val="9FB0CC"/>
-                </a:solidFill>
-                <a:latin typeface="Calibri" pitchFamily="34" charset="0"/>
-                <a:ea typeface="Calibri" pitchFamily="34" charset="-122"/>
-                <a:cs typeface="Calibri" pitchFamily="34" charset="-120"/>
-              </a:rPr>
-              <a:t>A dataset that looked ideal and turned out unusable. A merge that made the model worse. A metric that hid a failure for an hour.</a:t>
-            </a:r>
-            <a:endParaRPr lang="en-US" sz="1200" dirty="0"/>
-          </a:p>
-          <a:p>
-            <a:pPr indent="0" marL="0">
-              <a:lnSpc>
-                <a:spcPct val="112000"/>
-              </a:lnSpc>
-              <a:buNone/>
-            </a:pPr>
-            <a:endParaRPr lang="en-US" sz="1200" dirty="0"/>
-          </a:p>
-          <a:p>
-            <a:pPr indent="0" marL="0">
-              <a:lnSpc>
-                <a:spcPct val="112000"/>
-              </a:lnSpc>
-              <a:buNone/>
-            </a:pPr>
-            <a:r>
-              <a:rPr lang="en-US" sz="1200" dirty="0">
-                <a:solidFill>
-                  <a:srgbClr val="9FB0CC"/>
-                </a:solidFill>
-                <a:latin typeface="Calibri" pitchFamily="34" charset="0"/>
-                <a:ea typeface="Calibri" pitchFamily="34" charset="-122"/>
-                <a:cs typeface="Calibri" pitchFamily="34" charset="-120"/>
-              </a:rPr>
-              <a:t>All of it is in the repository.</a:t>
-            </a:r>
-            <a:endParaRPr lang="en-US" sz="1200" dirty="0"/>
+            <a:off x="685800" y="6263640"/>
+            <a:ext cx="10789920" cy="320040"/>
+          </a:xfrm>
+          <a:prstGeom prst="rect">
+            <a:avLst/>
+          </a:prstGeom>
+          <a:noFill/>
+          <a:ln/>
+        </p:spPr>
+        <p:txBody>
+          <a:bodyPr wrap="square" lIns="0" tIns="0" rIns="0" bIns="0" rtlCol="0" anchor="ctr"/>
+          <a:lstStyle/>
+          <a:p>
+            <a:pPr algn="ctr" indent="0" marL="0">
+              <a:buNone/>
+            </a:pPr>
+            <a:r>
+              <a:rPr lang="en-US" sz="1400" i="1" dirty="0">
+                <a:solidFill>
+                  <a:srgbClr val="22D3EE"/>
+                </a:solidFill>
+                <a:latin typeface="Calibri" pitchFamily="34" charset="0"/>
+                <a:ea typeface="Calibri" pitchFamily="34" charset="-122"/>
+                <a:cs typeface="Calibri" pitchFamily="34" charset="-120"/>
+              </a:rPr>
+              <a:t>Naming a weakness costs far less than being caught by it.</a:t>
+            </a:r>
+            <a:endParaRPr lang="en-US" sz="1400" dirty="0"/>
           </a:p>
         </p:txBody>
       </p:sp>
@@ -4226,7 +4367,7 @@
                 <a:ea typeface="Calibri" pitchFamily="34" charset="-122"/>
                 <a:cs typeface="Calibri" pitchFamily="34" charset="-120"/>
               </a:rPr>
-              <a:t>THE TEAM</a:t>
+              <a:t>UNDER THE HOOD</a:t>
             </a:r>
             <a:endParaRPr lang="en-US" sz="1100" dirty="0"/>
           </a:p>
@@ -4265,7 +4406,7 @@
                 <a:ea typeface="Calibri" pitchFamily="34" charset="-122"/>
                 <a:cs typeface="Calibri" pitchFamily="34" charset="-120"/>
               </a:rPr>
-              <a:t>Three people, one build.</a:t>
+              <a:t>Boring technology, deliberately.</a:t>
             </a:r>
             <a:endParaRPr lang="en-US" sz="3800" dirty="0"/>
           </a:p>
@@ -4279,12 +4420,12 @@
         </p:nvSpPr>
         <p:spPr>
           <a:xfrm>
-            <a:off x="685800" y="2286000"/>
-            <a:ext cx="3337560" cy="3246120"/>
+            <a:off x="685800" y="2240280"/>
+            <a:ext cx="6492240" cy="585216"/>
           </a:xfrm>
           <a:prstGeom prst="roundRect">
             <a:avLst>
-              <a:gd name="adj" fmla="val 3380"/>
+              <a:gd name="adj" fmla="val 18750"/>
             </a:avLst>
           </a:prstGeom>
           <a:solidFill>
@@ -4315,23 +4456,16 @@
         </p:nvSpPr>
         <p:spPr>
           <a:xfrm>
-            <a:off x="1764792" y="2578608"/>
-            <a:ext cx="1188720" cy="1188720"/>
+            <a:off x="960120" y="2468880"/>
+            <a:ext cx="128016" cy="128016"/>
           </a:xfrm>
           <a:prstGeom prst="ellipse">
             <a:avLst/>
           </a:prstGeom>
           <a:solidFill>
-            <a:srgbClr val="22D3EE">
-              <a:alpha val="18000"/>
-            </a:srgbClr>
+            <a:srgbClr val="22D3EE"/>
           </a:solidFill>
-          <a:ln w="19050">
-            <a:solidFill>
-              <a:srgbClr val="22D3EE"/>
-            </a:solidFill>
-            <a:prstDash val="solid"/>
-          </a:ln>
+          <a:ln/>
         </p:spPr>
       </p:sp>
       <p:sp>
@@ -4342,34 +4476,34 @@
         </p:nvSpPr>
         <p:spPr>
           <a:xfrm>
-            <a:off x="1764792" y="3054096"/>
-            <a:ext cx="1188720" cy="256032"/>
-          </a:xfrm>
-          <a:prstGeom prst="rect">
-            <a:avLst/>
-          </a:prstGeom>
-          <a:noFill/>
-          <a:ln/>
-        </p:spPr>
-        <p:txBody>
-          <a:bodyPr wrap="square" lIns="0" tIns="0" rIns="0" bIns="0" rtlCol="0" anchor="ctr"/>
-          <a:lstStyle/>
-          <a:p>
-            <a:pPr algn="ctr" indent="0" marL="0">
-              <a:buNone/>
-            </a:pPr>
-            <a:r>
-              <a:rPr lang="en-US" sz="950" spc="140" kern="0" dirty="0">
-                <a:solidFill>
-                  <a:srgbClr val="22D3EE"/>
-                </a:solidFill>
-                <a:latin typeface="Calibri" pitchFamily="34" charset="0"/>
-                <a:ea typeface="Calibri" pitchFamily="34" charset="-122"/>
-                <a:cs typeface="Calibri" pitchFamily="34" charset="-120"/>
-              </a:rPr>
-              <a:t>PHOTO</a:t>
-            </a:r>
-            <a:endParaRPr lang="en-US" sz="950" dirty="0"/>
+            <a:off x="1234440" y="2377440"/>
+            <a:ext cx="1463040" cy="310896"/>
+          </a:xfrm>
+          <a:prstGeom prst="rect">
+            <a:avLst/>
+          </a:prstGeom>
+          <a:noFill/>
+          <a:ln/>
+        </p:spPr>
+        <p:txBody>
+          <a:bodyPr wrap="square" lIns="0" tIns="0" rIns="0" bIns="0" rtlCol="0" anchor="ctr"/>
+          <a:lstStyle/>
+          <a:p>
+            <a:pPr indent="0" marL="0">
+              <a:buNone/>
+            </a:pPr>
+            <a:r>
+              <a:rPr lang="en-US" sz="1350" b="1" dirty="0">
+                <a:solidFill>
+                  <a:srgbClr val="E8EEF8"/>
+                </a:solidFill>
+                <a:latin typeface="Calibri" pitchFamily="34" charset="0"/>
+                <a:ea typeface="Calibri" pitchFamily="34" charset="-122"/>
+                <a:cs typeface="Calibri" pitchFamily="34" charset="-120"/>
+              </a:rPr>
+              <a:t>Frontend</a:t>
+            </a:r>
+            <a:endParaRPr lang="en-US" sz="1350" dirty="0"/>
           </a:p>
         </p:txBody>
       </p:sp>
@@ -4381,98 +4515,20 @@
         </p:nvSpPr>
         <p:spPr>
           <a:xfrm>
-            <a:off x="914400" y="3950208"/>
-            <a:ext cx="2880360" cy="329184"/>
-          </a:xfrm>
-          <a:prstGeom prst="rect">
-            <a:avLst/>
-          </a:prstGeom>
-          <a:noFill/>
-          <a:ln/>
-        </p:spPr>
-        <p:txBody>
-          <a:bodyPr wrap="square" lIns="0" tIns="0" rIns="0" bIns="0" rtlCol="0" anchor="ctr"/>
-          <a:lstStyle/>
-          <a:p>
-            <a:pPr algn="ctr" indent="0" marL="0">
-              <a:buNone/>
-            </a:pPr>
-            <a:r>
-              <a:rPr lang="en-US" sz="1600" b="1" dirty="0">
-                <a:solidFill>
-                  <a:srgbClr val="E8EEF8"/>
-                </a:solidFill>
-                <a:latin typeface="Calibri" pitchFamily="34" charset="0"/>
-                <a:ea typeface="Calibri" pitchFamily="34" charset="-122"/>
-                <a:cs typeface="Calibri" pitchFamily="34" charset="-120"/>
-              </a:rPr>
-              <a:t>Ayaan Aatif</a:t>
-            </a:r>
-            <a:endParaRPr lang="en-US" sz="1600" dirty="0"/>
-          </a:p>
-        </p:txBody>
-      </p:sp>
-      <p:sp>
-        <p:nvSpPr>
-          <p:cNvPr id="10" name="Text 8"/>
-          <p:cNvSpPr txBox="1"/>
-          <p:nvPr/>
-        </p:nvSpPr>
-        <p:spPr>
-          <a:xfrm>
-            <a:off x="914400" y="4297680"/>
-            <a:ext cx="2880360" cy="274320"/>
-          </a:xfrm>
-          <a:prstGeom prst="rect">
-            <a:avLst/>
-          </a:prstGeom>
-          <a:noFill/>
-          <a:ln/>
-        </p:spPr>
-        <p:txBody>
-          <a:bodyPr wrap="square" lIns="0" tIns="0" rIns="0" bIns="0" rtlCol="0" anchor="ctr"/>
-          <a:lstStyle/>
-          <a:p>
-            <a:pPr algn="ctr" indent="0" marL="0">
-              <a:buNone/>
-            </a:pPr>
-            <a:r>
-              <a:rPr lang="en-US" sz="1200" dirty="0">
-                <a:solidFill>
-                  <a:srgbClr val="22D3EE"/>
-                </a:solidFill>
-                <a:latin typeface="Calibri" pitchFamily="34" charset="0"/>
-                <a:ea typeface="Calibri" pitchFamily="34" charset="-122"/>
-                <a:cs typeface="Calibri" pitchFamily="34" charset="-120"/>
-              </a:rPr>
-              <a:t>Team Lead</a:t>
-            </a:r>
-            <a:endParaRPr lang="en-US" sz="1200" dirty="0"/>
-          </a:p>
-        </p:txBody>
-      </p:sp>
-      <p:sp>
-        <p:nvSpPr>
-          <p:cNvPr id="11" name="Text 9"/>
-          <p:cNvSpPr txBox="1"/>
-          <p:nvPr/>
-        </p:nvSpPr>
-        <p:spPr>
-          <a:xfrm>
-            <a:off x="914400" y="4626864"/>
-            <a:ext cx="2880360" cy="640080"/>
-          </a:xfrm>
-          <a:prstGeom prst="rect">
-            <a:avLst/>
-          </a:prstGeom>
-          <a:noFill/>
-          <a:ln/>
-        </p:spPr>
-        <p:txBody>
-          <a:bodyPr wrap="square" lIns="0" tIns="0" rIns="0" bIns="0" rtlCol="0" anchor="ctr"/>
-          <a:lstStyle/>
-          <a:p>
-            <a:pPr algn="ctr" indent="0" marL="0">
+            <a:off x="2697480" y="2386584"/>
+            <a:ext cx="4297680" cy="310896"/>
+          </a:xfrm>
+          <a:prstGeom prst="rect">
+            <a:avLst/>
+          </a:prstGeom>
+          <a:noFill/>
+          <a:ln/>
+        </p:spPr>
+        <p:txBody>
+          <a:bodyPr wrap="square" lIns="0" tIns="0" rIns="0" bIns="0" rtlCol="0" anchor="ctr"/>
+          <a:lstStyle/>
+          <a:p>
+            <a:pPr indent="0" marL="0">
               <a:buNone/>
             </a:pPr>
             <a:r>
@@ -4484,7 +4540,7 @@
                 <a:ea typeface="Calibri" pitchFamily="34" charset="-122"/>
                 <a:cs typeface="Calibri" pitchFamily="34" charset="-120"/>
               </a:rPr>
-              <a:t>Architecture, ML pipeline, demo delivery</a:t>
+              <a:t>Next.js 16 · React 19 · Three.js · Tailwind</a:t>
             </a:r>
             <a:endParaRPr lang="en-US" sz="1150" dirty="0"/>
           </a:p>
@@ -4492,18 +4548,18 @@
       </p:sp>
       <p:sp>
         <p:nvSpPr>
-          <p:cNvPr id="12" name="Shape 10"/>
+          <p:cNvPr id="10" name="Shape 8"/>
           <p:cNvSpPr/>
           <p:nvPr/>
         </p:nvSpPr>
         <p:spPr>
           <a:xfrm>
-            <a:off x="4343400" y="2286000"/>
-            <a:ext cx="3337560" cy="3246120"/>
+            <a:off x="685800" y="2953512"/>
+            <a:ext cx="6492240" cy="585216"/>
           </a:xfrm>
           <a:prstGeom prst="roundRect">
             <a:avLst>
-              <a:gd name="adj" fmla="val 3380"/>
+              <a:gd name="adj" fmla="val 18750"/>
             </a:avLst>
           </a:prstGeom>
           <a:solidFill>
@@ -4528,96 +4584,50 @@
       </p:sp>
       <p:sp>
         <p:nvSpPr>
-          <p:cNvPr id="13" name="Shape 11"/>
+          <p:cNvPr id="11" name="Shape 9"/>
           <p:cNvSpPr/>
           <p:nvPr/>
         </p:nvSpPr>
         <p:spPr>
           <a:xfrm>
-            <a:off x="5422392" y="2578608"/>
-            <a:ext cx="1188720" cy="1188720"/>
+            <a:off x="960120" y="3182112"/>
+            <a:ext cx="128016" cy="128016"/>
           </a:xfrm>
           <a:prstGeom prst="ellipse">
             <a:avLst/>
           </a:prstGeom>
           <a:solidFill>
-            <a:srgbClr val="6366F1">
-              <a:alpha val="18000"/>
-            </a:srgbClr>
+            <a:srgbClr val="6366F1"/>
           </a:solidFill>
-          <a:ln w="19050">
-            <a:solidFill>
-              <a:srgbClr val="6366F1"/>
-            </a:solidFill>
-            <a:prstDash val="solid"/>
-          </a:ln>
-        </p:spPr>
-      </p:sp>
-      <p:sp>
-        <p:nvSpPr>
-          <p:cNvPr id="14" name="Text 12"/>
-          <p:cNvSpPr txBox="1"/>
-          <p:nvPr/>
-        </p:nvSpPr>
-        <p:spPr>
-          <a:xfrm>
-            <a:off x="5422392" y="3054096"/>
-            <a:ext cx="1188720" cy="256032"/>
-          </a:xfrm>
-          <a:prstGeom prst="rect">
-            <a:avLst/>
-          </a:prstGeom>
-          <a:noFill/>
-          <a:ln/>
-        </p:spPr>
-        <p:txBody>
-          <a:bodyPr wrap="square" lIns="0" tIns="0" rIns="0" bIns="0" rtlCol="0" anchor="ctr"/>
-          <a:lstStyle/>
-          <a:p>
-            <a:pPr algn="ctr" indent="0" marL="0">
-              <a:buNone/>
-            </a:pPr>
-            <a:r>
-              <a:rPr lang="en-US" sz="950" spc="140" kern="0" dirty="0">
-                <a:solidFill>
-                  <a:srgbClr val="6366F1"/>
-                </a:solidFill>
-                <a:latin typeface="Calibri" pitchFamily="34" charset="0"/>
-                <a:ea typeface="Calibri" pitchFamily="34" charset="-122"/>
-                <a:cs typeface="Calibri" pitchFamily="34" charset="-120"/>
-              </a:rPr>
-              <a:t>PHOTO</a:t>
-            </a:r>
-            <a:endParaRPr lang="en-US" sz="950" dirty="0"/>
-          </a:p>
-        </p:txBody>
-      </p:sp>
-      <p:sp>
-        <p:nvSpPr>
-          <p:cNvPr id="15" name="Text 13"/>
-          <p:cNvSpPr txBox="1"/>
-          <p:nvPr/>
-        </p:nvSpPr>
-        <p:spPr>
-          <a:xfrm>
-            <a:off x="4572000" y="3950208"/>
-            <a:ext cx="2880360" cy="329184"/>
-          </a:xfrm>
-          <a:prstGeom prst="rect">
-            <a:avLst/>
-          </a:prstGeom>
-          <a:noFill/>
-          <a:ln/>
-        </p:spPr>
-        <p:txBody>
-          <a:bodyPr wrap="square" lIns="0" tIns="0" rIns="0" bIns="0" rtlCol="0" anchor="ctr"/>
-          <a:lstStyle/>
-          <a:p>
-            <a:pPr algn="ctr" indent="0" marL="0">
-              <a:buNone/>
-            </a:pPr>
-            <a:r>
-              <a:rPr lang="en-US" sz="1600" b="1" dirty="0">
+          <a:ln/>
+        </p:spPr>
+      </p:sp>
+      <p:sp>
+        <p:nvSpPr>
+          <p:cNvPr id="12" name="Text 10"/>
+          <p:cNvSpPr txBox="1"/>
+          <p:nvPr/>
+        </p:nvSpPr>
+        <p:spPr>
+          <a:xfrm>
+            <a:off x="1234440" y="3090672"/>
+            <a:ext cx="1463040" cy="310896"/>
+          </a:xfrm>
+          <a:prstGeom prst="rect">
+            <a:avLst/>
+          </a:prstGeom>
+          <a:noFill/>
+          <a:ln/>
+        </p:spPr>
+        <p:txBody>
+          <a:bodyPr wrap="square" lIns="0" tIns="0" rIns="0" bIns="0" rtlCol="0" anchor="ctr"/>
+          <a:lstStyle/>
+          <a:p>
+            <a:pPr indent="0" marL="0">
+              <a:buNone/>
+            </a:pPr>
+            <a:r>
+              <a:rPr lang="en-US" sz="1350" b="1" dirty="0">
                 <a:solidFill>
                   <a:srgbClr val="E8EEF8"/>
                 </a:solidFill>
@@ -4625,73 +4635,34 @@
                 <a:ea typeface="Calibri" pitchFamily="34" charset="-122"/>
                 <a:cs typeface="Calibri" pitchFamily="34" charset="-120"/>
               </a:rPr>
-              <a:t>Muhammad Muneeb</a:t>
-            </a:r>
-            <a:endParaRPr lang="en-US" sz="1600" dirty="0"/>
-          </a:p>
-        </p:txBody>
-      </p:sp>
-      <p:sp>
-        <p:nvSpPr>
-          <p:cNvPr id="16" name="Text 14"/>
-          <p:cNvSpPr txBox="1"/>
-          <p:nvPr/>
-        </p:nvSpPr>
-        <p:spPr>
-          <a:xfrm>
-            <a:off x="4572000" y="4297680"/>
-            <a:ext cx="2880360" cy="274320"/>
-          </a:xfrm>
-          <a:prstGeom prst="rect">
-            <a:avLst/>
-          </a:prstGeom>
-          <a:noFill/>
-          <a:ln/>
-        </p:spPr>
-        <p:txBody>
-          <a:bodyPr wrap="square" lIns="0" tIns="0" rIns="0" bIns="0" rtlCol="0" anchor="ctr"/>
-          <a:lstStyle/>
-          <a:p>
-            <a:pPr algn="ctr" indent="0" marL="0">
-              <a:buNone/>
-            </a:pPr>
-            <a:r>
-              <a:rPr lang="en-US" sz="1200" dirty="0">
-                <a:solidFill>
-                  <a:srgbClr val="6366F1"/>
-                </a:solidFill>
-                <a:latin typeface="Calibri" pitchFamily="34" charset="0"/>
-                <a:ea typeface="Calibri" pitchFamily="34" charset="-122"/>
-                <a:cs typeface="Calibri" pitchFamily="34" charset="-120"/>
-              </a:rPr>
-              <a:t>Backend, Data &amp; API</a:t>
-            </a:r>
-            <a:endParaRPr lang="en-US" sz="1200" dirty="0"/>
-          </a:p>
-        </p:txBody>
-      </p:sp>
-      <p:sp>
-        <p:nvSpPr>
-          <p:cNvPr id="17" name="Text 15"/>
-          <p:cNvSpPr txBox="1"/>
-          <p:nvPr/>
-        </p:nvSpPr>
-        <p:spPr>
-          <a:xfrm>
-            <a:off x="4572000" y="4626864"/>
-            <a:ext cx="2880360" cy="640080"/>
-          </a:xfrm>
-          <a:prstGeom prst="rect">
-            <a:avLst/>
-          </a:prstGeom>
-          <a:noFill/>
-          <a:ln/>
-        </p:spPr>
-        <p:txBody>
-          <a:bodyPr wrap="square" lIns="0" tIns="0" rIns="0" bIns="0" rtlCol="0" anchor="ctr"/>
-          <a:lstStyle/>
-          <a:p>
-            <a:pPr algn="ctr" indent="0" marL="0">
+              <a:t>API</a:t>
+            </a:r>
+            <a:endParaRPr lang="en-US" sz="1350" dirty="0"/>
+          </a:p>
+        </p:txBody>
+      </p:sp>
+      <p:sp>
+        <p:nvSpPr>
+          <p:cNvPr id="13" name="Text 11"/>
+          <p:cNvSpPr txBox="1"/>
+          <p:nvPr/>
+        </p:nvSpPr>
+        <p:spPr>
+          <a:xfrm>
+            <a:off x="2697480" y="3099816"/>
+            <a:ext cx="4297680" cy="310896"/>
+          </a:xfrm>
+          <a:prstGeom prst="rect">
+            <a:avLst/>
+          </a:prstGeom>
+          <a:noFill/>
+          <a:ln/>
+        </p:spPr>
+        <p:txBody>
+          <a:bodyPr wrap="square" lIns="0" tIns="0" rIns="0" bIns="0" rtlCol="0" anchor="ctr"/>
+          <a:lstStyle/>
+          <a:p>
+            <a:pPr indent="0" marL="0">
               <a:buNone/>
             </a:pPr>
             <a:r>
@@ -4703,7 +4674,7 @@
                 <a:ea typeface="Calibri" pitchFamily="34" charset="-122"/>
                 <a:cs typeface="Calibri" pitchFamily="34" charset="-120"/>
               </a:rPr>
-              <a:t>Services, database and the upload pipeline</a:t>
+              <a:t>FastAPI · Python 3.12 · SQLAlchemy · Alembic</a:t>
             </a:r>
             <a:endParaRPr lang="en-US" sz="1150" dirty="0"/>
           </a:p>
@@ -4711,18 +4682,18 @@
       </p:sp>
       <p:sp>
         <p:nvSpPr>
-          <p:cNvPr id="18" name="Shape 16"/>
+          <p:cNvPr id="14" name="Shape 12"/>
           <p:cNvSpPr/>
           <p:nvPr/>
         </p:nvSpPr>
         <p:spPr>
           <a:xfrm>
-            <a:off x="8001000" y="2286000"/>
-            <a:ext cx="3337560" cy="3246120"/>
+            <a:off x="685800" y="3666744"/>
+            <a:ext cx="6492240" cy="585216"/>
           </a:xfrm>
           <a:prstGeom prst="roundRect">
             <a:avLst>
-              <a:gd name="adj" fmla="val 3380"/>
+              <a:gd name="adj" fmla="val 18750"/>
             </a:avLst>
           </a:prstGeom>
           <a:solidFill>
@@ -4747,29 +4718,156 @@
       </p:sp>
       <p:sp>
         <p:nvSpPr>
-          <p:cNvPr id="19" name="Shape 17"/>
+          <p:cNvPr id="15" name="Shape 13"/>
           <p:cNvSpPr/>
           <p:nvPr/>
         </p:nvSpPr>
         <p:spPr>
           <a:xfrm>
-            <a:off x="9079992" y="2578608"/>
-            <a:ext cx="1188720" cy="1188720"/>
+            <a:off x="960120" y="3895344"/>
+            <a:ext cx="128016" cy="128016"/>
           </a:xfrm>
           <a:prstGeom prst="ellipse">
             <a:avLst/>
           </a:prstGeom>
           <a:solidFill>
-            <a:srgbClr val="A78BFA">
-              <a:alpha val="18000"/>
+            <a:srgbClr val="A78BFA"/>
+          </a:solidFill>
+          <a:ln/>
+        </p:spPr>
+      </p:sp>
+      <p:sp>
+        <p:nvSpPr>
+          <p:cNvPr id="16" name="Text 14"/>
+          <p:cNvSpPr txBox="1"/>
+          <p:nvPr/>
+        </p:nvSpPr>
+        <p:spPr>
+          <a:xfrm>
+            <a:off x="1234440" y="3803904"/>
+            <a:ext cx="1463040" cy="310896"/>
+          </a:xfrm>
+          <a:prstGeom prst="rect">
+            <a:avLst/>
+          </a:prstGeom>
+          <a:noFill/>
+          <a:ln/>
+        </p:spPr>
+        <p:txBody>
+          <a:bodyPr wrap="square" lIns="0" tIns="0" rIns="0" bIns="0" rtlCol="0" anchor="ctr"/>
+          <a:lstStyle/>
+          <a:p>
+            <a:pPr indent="0" marL="0">
+              <a:buNone/>
+            </a:pPr>
+            <a:r>
+              <a:rPr lang="en-US" sz="1350" b="1" dirty="0">
+                <a:solidFill>
+                  <a:srgbClr val="E8EEF8"/>
+                </a:solidFill>
+                <a:latin typeface="Calibri" pitchFamily="34" charset="0"/>
+                <a:ea typeface="Calibri" pitchFamily="34" charset="-122"/>
+                <a:cs typeface="Calibri" pitchFamily="34" charset="-120"/>
+              </a:rPr>
+              <a:t>Model</a:t>
+            </a:r>
+            <a:endParaRPr lang="en-US" sz="1350" dirty="0"/>
+          </a:p>
+        </p:txBody>
+      </p:sp>
+      <p:sp>
+        <p:nvSpPr>
+          <p:cNvPr id="17" name="Text 15"/>
+          <p:cNvSpPr txBox="1"/>
+          <p:nvPr/>
+        </p:nvSpPr>
+        <p:spPr>
+          <a:xfrm>
+            <a:off x="2697480" y="3813048"/>
+            <a:ext cx="4297680" cy="310896"/>
+          </a:xfrm>
+          <a:prstGeom prst="rect">
+            <a:avLst/>
+          </a:prstGeom>
+          <a:noFill/>
+          <a:ln/>
+        </p:spPr>
+        <p:txBody>
+          <a:bodyPr wrap="square" lIns="0" tIns="0" rIns="0" bIns="0" rtlCol="0" anchor="ctr"/>
+          <a:lstStyle/>
+          <a:p>
+            <a:pPr indent="0" marL="0">
+              <a:buNone/>
+            </a:pPr>
+            <a:r>
+              <a:rPr lang="en-US" sz="1150" dirty="0">
+                <a:solidFill>
+                  <a:srgbClr val="9FB0CC"/>
+                </a:solidFill>
+                <a:latin typeface="Calibri" pitchFamily="34" charset="0"/>
+                <a:ea typeface="Calibri" pitchFamily="34" charset="-122"/>
+                <a:cs typeface="Calibri" pitchFamily="34" charset="-120"/>
+              </a:rPr>
+              <a:t>YOLOv11n fine-tuned · PyTorch 2.13 · CUDA 13</a:t>
+            </a:r>
+            <a:endParaRPr lang="en-US" sz="1150" dirty="0"/>
+          </a:p>
+        </p:txBody>
+      </p:sp>
+      <p:sp>
+        <p:nvSpPr>
+          <p:cNvPr id="18" name="Shape 16"/>
+          <p:cNvSpPr/>
+          <p:nvPr/>
+        </p:nvSpPr>
+        <p:spPr>
+          <a:xfrm>
+            <a:off x="685800" y="4379976"/>
+            <a:ext cx="6492240" cy="585216"/>
+          </a:xfrm>
+          <a:prstGeom prst="roundRect">
+            <a:avLst>
+              <a:gd name="adj" fmla="val 18750"/>
+            </a:avLst>
+          </a:prstGeom>
+          <a:solidFill>
+            <a:srgbClr val="111A2E">
+              <a:alpha val="82000"/>
             </a:srgbClr>
           </a:solidFill>
-          <a:ln w="19050">
+          <a:ln w="12700">
             <a:solidFill>
-              <a:srgbClr val="A78BFA"/>
+              <a:srgbClr val="1E2B44"/>
             </a:solidFill>
             <a:prstDash val="solid"/>
           </a:ln>
+          <a:effectLst>
+            <a:outerShdw sx="100000" sy="100000" kx="0" ky="0" algn="bl" rotWithShape="0" blurRad="177800" dist="38100" dir="5400000">
+              <a:srgbClr val="000000">
+                <a:alpha val="35000"/>
+              </a:srgbClr>
+            </a:outerShdw>
+          </a:effectLst>
+        </p:spPr>
+      </p:sp>
+      <p:sp>
+        <p:nvSpPr>
+          <p:cNvPr id="19" name="Shape 17"/>
+          <p:cNvSpPr/>
+          <p:nvPr/>
+        </p:nvSpPr>
+        <p:spPr>
+          <a:xfrm>
+            <a:off x="960120" y="4608576"/>
+            <a:ext cx="128016" cy="128016"/>
+          </a:xfrm>
+          <a:prstGeom prst="ellipse">
+            <a:avLst/>
+          </a:prstGeom>
+          <a:solidFill>
+            <a:srgbClr val="10B981"/>
+          </a:solidFill>
+          <a:ln/>
         </p:spPr>
       </p:sp>
       <p:sp>
@@ -4780,34 +4878,34 @@
         </p:nvSpPr>
         <p:spPr>
           <a:xfrm>
-            <a:off x="9079992" y="3054096"/>
-            <a:ext cx="1188720" cy="256032"/>
-          </a:xfrm>
-          <a:prstGeom prst="rect">
-            <a:avLst/>
-          </a:prstGeom>
-          <a:noFill/>
-          <a:ln/>
-        </p:spPr>
-        <p:txBody>
-          <a:bodyPr wrap="square" lIns="0" tIns="0" rIns="0" bIns="0" rtlCol="0" anchor="ctr"/>
-          <a:lstStyle/>
-          <a:p>
-            <a:pPr algn="ctr" indent="0" marL="0">
-              <a:buNone/>
-            </a:pPr>
-            <a:r>
-              <a:rPr lang="en-US" sz="950" spc="140" kern="0" dirty="0">
-                <a:solidFill>
-                  <a:srgbClr val="A78BFA"/>
-                </a:solidFill>
-                <a:latin typeface="Calibri" pitchFamily="34" charset="0"/>
-                <a:ea typeface="Calibri" pitchFamily="34" charset="-122"/>
-                <a:cs typeface="Calibri" pitchFamily="34" charset="-120"/>
-              </a:rPr>
-              <a:t>PHOTO</a:t>
-            </a:r>
-            <a:endParaRPr lang="en-US" sz="950" dirty="0"/>
+            <a:off x="1234440" y="4517136"/>
+            <a:ext cx="1463040" cy="310896"/>
+          </a:xfrm>
+          <a:prstGeom prst="rect">
+            <a:avLst/>
+          </a:prstGeom>
+          <a:noFill/>
+          <a:ln/>
+        </p:spPr>
+        <p:txBody>
+          <a:bodyPr wrap="square" lIns="0" tIns="0" rIns="0" bIns="0" rtlCol="0" anchor="ctr"/>
+          <a:lstStyle/>
+          <a:p>
+            <a:pPr indent="0" marL="0">
+              <a:buNone/>
+            </a:pPr>
+            <a:r>
+              <a:rPr lang="en-US" sz="1350" b="1" dirty="0">
+                <a:solidFill>
+                  <a:srgbClr val="E8EEF8"/>
+                </a:solidFill>
+                <a:latin typeface="Calibri" pitchFamily="34" charset="0"/>
+                <a:ea typeface="Calibri" pitchFamily="34" charset="-122"/>
+                <a:cs typeface="Calibri" pitchFamily="34" charset="-120"/>
+              </a:rPr>
+              <a:t>Data</a:t>
+            </a:r>
+            <a:endParaRPr lang="en-US" sz="1350" dirty="0"/>
           </a:p>
         </p:txBody>
       </p:sp>
@@ -4819,24 +4917,119 @@
         </p:nvSpPr>
         <p:spPr>
           <a:xfrm>
-            <a:off x="8229600" y="3950208"/>
-            <a:ext cx="2880360" cy="329184"/>
-          </a:xfrm>
-          <a:prstGeom prst="rect">
-            <a:avLst/>
-          </a:prstGeom>
-          <a:noFill/>
-          <a:ln/>
-        </p:spPr>
-        <p:txBody>
-          <a:bodyPr wrap="square" lIns="0" tIns="0" rIns="0" bIns="0" rtlCol="0" anchor="ctr"/>
-          <a:lstStyle/>
-          <a:p>
-            <a:pPr algn="ctr" indent="0" marL="0">
-              <a:buNone/>
-            </a:pPr>
-            <a:r>
-              <a:rPr lang="en-US" sz="1600" b="1" dirty="0">
+            <a:off x="2697480" y="4526280"/>
+            <a:ext cx="4297680" cy="310896"/>
+          </a:xfrm>
+          <a:prstGeom prst="rect">
+            <a:avLst/>
+          </a:prstGeom>
+          <a:noFill/>
+          <a:ln/>
+        </p:spPr>
+        <p:txBody>
+          <a:bodyPr wrap="square" lIns="0" tIns="0" rIns="0" bIns="0" rtlCol="0" anchor="ctr"/>
+          <a:lstStyle/>
+          <a:p>
+            <a:pPr indent="0" marL="0">
+              <a:buNone/>
+            </a:pPr>
+            <a:r>
+              <a:rPr lang="en-US" sz="1150" dirty="0">
+                <a:solidFill>
+                  <a:srgbClr val="9FB0CC"/>
+                </a:solidFill>
+                <a:latin typeface="Calibri" pitchFamily="34" charset="0"/>
+                <a:ea typeface="Calibri" pitchFamily="34" charset="-122"/>
+                <a:cs typeface="Calibri" pitchFamily="34" charset="-120"/>
+              </a:rPr>
+              <a:t>PostgreSQL 16 · MinIO (S3-compatible)</a:t>
+            </a:r>
+            <a:endParaRPr lang="en-US" sz="1150" dirty="0"/>
+          </a:p>
+        </p:txBody>
+      </p:sp>
+      <p:sp>
+        <p:nvSpPr>
+          <p:cNvPr id="22" name="Shape 20"/>
+          <p:cNvSpPr/>
+          <p:nvPr/>
+        </p:nvSpPr>
+        <p:spPr>
+          <a:xfrm>
+            <a:off x="685800" y="5093208"/>
+            <a:ext cx="6492240" cy="585216"/>
+          </a:xfrm>
+          <a:prstGeom prst="roundRect">
+            <a:avLst>
+              <a:gd name="adj" fmla="val 18750"/>
+            </a:avLst>
+          </a:prstGeom>
+          <a:solidFill>
+            <a:srgbClr val="111A2E">
+              <a:alpha val="82000"/>
+            </a:srgbClr>
+          </a:solidFill>
+          <a:ln w="12700">
+            <a:solidFill>
+              <a:srgbClr val="1E2B44"/>
+            </a:solidFill>
+            <a:prstDash val="solid"/>
+          </a:ln>
+          <a:effectLst>
+            <a:outerShdw sx="100000" sy="100000" kx="0" ky="0" algn="bl" rotWithShape="0" blurRad="177800" dist="38100" dir="5400000">
+              <a:srgbClr val="000000">
+                <a:alpha val="35000"/>
+              </a:srgbClr>
+            </a:outerShdw>
+          </a:effectLst>
+        </p:spPr>
+      </p:sp>
+      <p:sp>
+        <p:nvSpPr>
+          <p:cNvPr id="23" name="Shape 21"/>
+          <p:cNvSpPr/>
+          <p:nvPr/>
+        </p:nvSpPr>
+        <p:spPr>
+          <a:xfrm>
+            <a:off x="960120" y="5321808"/>
+            <a:ext cx="128016" cy="128016"/>
+          </a:xfrm>
+          <a:prstGeom prst="ellipse">
+            <a:avLst/>
+          </a:prstGeom>
+          <a:solidFill>
+            <a:srgbClr val="F59E0B"/>
+          </a:solidFill>
+          <a:ln/>
+        </p:spPr>
+      </p:sp>
+      <p:sp>
+        <p:nvSpPr>
+          <p:cNvPr id="24" name="Text 22"/>
+          <p:cNvSpPr txBox="1"/>
+          <p:nvPr/>
+        </p:nvSpPr>
+        <p:spPr>
+          <a:xfrm>
+            <a:off x="1234440" y="5230368"/>
+            <a:ext cx="1463040" cy="310896"/>
+          </a:xfrm>
+          <a:prstGeom prst="rect">
+            <a:avLst/>
+          </a:prstGeom>
+          <a:noFill/>
+          <a:ln/>
+        </p:spPr>
+        <p:txBody>
+          <a:bodyPr wrap="square" lIns="0" tIns="0" rIns="0" bIns="0" rtlCol="0" anchor="ctr"/>
+          <a:lstStyle/>
+          <a:p>
+            <a:pPr indent="0" marL="0">
+              <a:buNone/>
+            </a:pPr>
+            <a:r>
+              <a:rPr lang="en-US" sz="1350" b="1" dirty="0">
                 <a:solidFill>
                   <a:srgbClr val="E8EEF8"/>
                 </a:solidFill>
@@ -4844,77 +5037,184 @@
                 <a:ea typeface="Calibri" pitchFamily="34" charset="-122"/>
                 <a:cs typeface="Calibri" pitchFamily="34" charset="-120"/>
               </a:rPr>
-              <a:t>Inshrah Mehmood</a:t>
-            </a:r>
-            <a:endParaRPr lang="en-US" sz="1600" dirty="0"/>
-          </a:p>
-        </p:txBody>
-      </p:sp>
-      <p:sp>
-        <p:nvSpPr>
-          <p:cNvPr id="22" name="Text 20"/>
-          <p:cNvSpPr txBox="1"/>
-          <p:nvPr/>
-        </p:nvSpPr>
-        <p:spPr>
-          <a:xfrm>
-            <a:off x="8229600" y="4297680"/>
-            <a:ext cx="2880360" cy="274320"/>
-          </a:xfrm>
-          <a:prstGeom prst="rect">
-            <a:avLst/>
-          </a:prstGeom>
-          <a:noFill/>
-          <a:ln/>
-        </p:spPr>
-        <p:txBody>
-          <a:bodyPr wrap="square" lIns="0" tIns="0" rIns="0" bIns="0" rtlCol="0" anchor="ctr"/>
-          <a:lstStyle/>
-          <a:p>
-            <a:pPr algn="ctr" indent="0" marL="0">
+              <a:t>Ship</a:t>
+            </a:r>
+            <a:endParaRPr lang="en-US" sz="1350" dirty="0"/>
+          </a:p>
+        </p:txBody>
+      </p:sp>
+      <p:sp>
+        <p:nvSpPr>
+          <p:cNvPr id="25" name="Text 23"/>
+          <p:cNvSpPr txBox="1"/>
+          <p:nvPr/>
+        </p:nvSpPr>
+        <p:spPr>
+          <a:xfrm>
+            <a:off x="2697480" y="5239512"/>
+            <a:ext cx="4297680" cy="310896"/>
+          </a:xfrm>
+          <a:prstGeom prst="rect">
+            <a:avLst/>
+          </a:prstGeom>
+          <a:noFill/>
+          <a:ln/>
+        </p:spPr>
+        <p:txBody>
+          <a:bodyPr wrap="square" lIns="0" tIns="0" rIns="0" bIns="0" rtlCol="0" anchor="ctr"/>
+          <a:lstStyle/>
+          <a:p>
+            <a:pPr indent="0" marL="0">
+              <a:buNone/>
+            </a:pPr>
+            <a:r>
+              <a:rPr lang="en-US" sz="1150" dirty="0">
+                <a:solidFill>
+                  <a:srgbClr val="9FB0CC"/>
+                </a:solidFill>
+                <a:latin typeface="Calibri" pitchFamily="34" charset="0"/>
+                <a:ea typeface="Calibri" pitchFamily="34" charset="-122"/>
+                <a:cs typeface="Calibri" pitchFamily="34" charset="-120"/>
+              </a:rPr>
+              <a:t>Docker Compose · GitHub Actions CI · JWT + RBAC</a:t>
+            </a:r>
+            <a:endParaRPr lang="en-US" sz="1150" dirty="0"/>
+          </a:p>
+        </p:txBody>
+      </p:sp>
+      <p:sp>
+        <p:nvSpPr>
+          <p:cNvPr id="26" name="Shape 24"/>
+          <p:cNvSpPr/>
+          <p:nvPr/>
+        </p:nvSpPr>
+        <p:spPr>
+          <a:xfrm>
+            <a:off x="7589520" y="2240280"/>
+            <a:ext cx="3886200" cy="3630168"/>
+          </a:xfrm>
+          <a:prstGeom prst="roundRect">
+            <a:avLst>
+              <a:gd name="adj" fmla="val 3023"/>
+            </a:avLst>
+          </a:prstGeom>
+          <a:solidFill>
+            <a:srgbClr val="111A2E">
+              <a:alpha val="82000"/>
+            </a:srgbClr>
+          </a:solidFill>
+          <a:ln w="12700">
+            <a:solidFill>
+              <a:srgbClr val="1E2B44"/>
+            </a:solidFill>
+            <a:prstDash val="solid"/>
+          </a:ln>
+          <a:effectLst>
+            <a:outerShdw sx="100000" sy="100000" kx="0" ky="0" algn="bl" rotWithShape="0" blurRad="177800" dist="38100" dir="5400000">
+              <a:srgbClr val="000000">
+                <a:alpha val="35000"/>
+              </a:srgbClr>
+            </a:outerShdw>
+          </a:effectLst>
+        </p:spPr>
+      </p:sp>
+      <p:sp>
+        <p:nvSpPr>
+          <p:cNvPr id="27" name="Text 25"/>
+          <p:cNvSpPr txBox="1"/>
+          <p:nvPr/>
+        </p:nvSpPr>
+        <p:spPr>
+          <a:xfrm>
+            <a:off x="7909560" y="2450592"/>
+            <a:ext cx="3291840" cy="292608"/>
+          </a:xfrm>
+          <a:prstGeom prst="rect">
+            <a:avLst/>
+          </a:prstGeom>
+          <a:noFill/>
+          <a:ln/>
+        </p:spPr>
+        <p:txBody>
+          <a:bodyPr wrap="square" lIns="0" tIns="0" rIns="0" bIns="0" rtlCol="0" anchor="ctr"/>
+          <a:lstStyle/>
+          <a:p>
+            <a:pPr indent="0" marL="0">
+              <a:buNone/>
+            </a:pPr>
+            <a:r>
+              <a:rPr lang="en-US" sz="1450" b="1" dirty="0">
+                <a:solidFill>
+                  <a:srgbClr val="E8EEF8"/>
+                </a:solidFill>
+                <a:latin typeface="Calibri" pitchFamily="34" charset="0"/>
+                <a:ea typeface="Calibri" pitchFamily="34" charset="-122"/>
+                <a:cs typeface="Calibri" pitchFamily="34" charset="-120"/>
+              </a:rPr>
+              <a:t>Decisions on record</a:t>
+            </a:r>
+            <a:endParaRPr lang="en-US" sz="1450" dirty="0"/>
+          </a:p>
+        </p:txBody>
+      </p:sp>
+      <p:sp>
+        <p:nvSpPr>
+          <p:cNvPr id="28" name="Text 26"/>
+          <p:cNvSpPr txBox="1"/>
+          <p:nvPr/>
+        </p:nvSpPr>
+        <p:spPr>
+          <a:xfrm>
+            <a:off x="7909560" y="2834640"/>
+            <a:ext cx="3291840" cy="2834640"/>
+          </a:xfrm>
+          <a:prstGeom prst="rect">
+            <a:avLst/>
+          </a:prstGeom>
+          <a:noFill/>
+          <a:ln/>
+        </p:spPr>
+        <p:txBody>
+          <a:bodyPr wrap="square" lIns="0" tIns="0" rIns="0" bIns="0" rtlCol="0" anchor="ctr"/>
+          <a:lstStyle/>
+          <a:p>
+            <a:pPr indent="0" marL="0">
+              <a:lnSpc>
+                <a:spcPct val="112000"/>
+              </a:lnSpc>
               <a:buNone/>
             </a:pPr>
             <a:r>
               <a:rPr lang="en-US" sz="1200" dirty="0">
                 <a:solidFill>
-                  <a:srgbClr val="A78BFA"/>
-                </a:solidFill>
-                <a:latin typeface="Calibri" pitchFamily="34" charset="0"/>
-                <a:ea typeface="Calibri" pitchFamily="34" charset="-122"/>
-                <a:cs typeface="Calibri" pitchFamily="34" charset="-120"/>
-              </a:rPr>
-              <a:t>Marketing &amp; Outreach</a:t>
+                  <a:srgbClr val="9FB0CC"/>
+                </a:solidFill>
+                <a:latin typeface="Calibri" pitchFamily="34" charset="0"/>
+                <a:ea typeface="Calibri" pitchFamily="34" charset="-122"/>
+                <a:cs typeface="Calibri" pitchFamily="34" charset="-120"/>
+              </a:rPr>
+              <a:t>21 architectural decisions are written down with their reasoning — including the ones we got wrong, and one we had to publicly reverse after re-checking it.</a:t>
             </a:r>
             <a:endParaRPr lang="en-US" sz="1200" dirty="0"/>
           </a:p>
-        </p:txBody>
-      </p:sp>
-      <p:sp>
-        <p:nvSpPr>
-          <p:cNvPr id="23" name="Text 21"/>
-          <p:cNvSpPr txBox="1"/>
-          <p:nvPr/>
-        </p:nvSpPr>
-        <p:spPr>
-          <a:xfrm>
-            <a:off x="8229600" y="4626864"/>
-            <a:ext cx="2880360" cy="640080"/>
-          </a:xfrm>
-          <a:prstGeom prst="rect">
-            <a:avLst/>
-          </a:prstGeom>
-          <a:noFill/>
-          <a:ln/>
-        </p:spPr>
-        <p:txBody>
-          <a:bodyPr wrap="square" lIns="0" tIns="0" rIns="0" bIns="0" rtlCol="0" anchor="ctr"/>
-          <a:lstStyle/>
-          <a:p>
-            <a:pPr algn="ctr" indent="0" marL="0">
-              <a:buNone/>
-            </a:pPr>
-            <a:r>
-              <a:rPr lang="en-US" sz="1150" dirty="0">
+          <a:p>
+            <a:pPr indent="0" marL="0">
+              <a:lnSpc>
+                <a:spcPct val="112000"/>
+              </a:lnSpc>
+              <a:buNone/>
+            </a:pPr>
+            <a:endParaRPr lang="en-US" sz="1200" dirty="0"/>
+          </a:p>
+          <a:p>
+            <a:pPr indent="0" marL="0">
+              <a:lnSpc>
+                <a:spcPct val="112000"/>
+              </a:lnSpc>
+              <a:buNone/>
+            </a:pPr>
+            <a:r>
+              <a:rPr lang="en-US" sz="1200" dirty="0">
                 <a:solidFill>
                   <a:srgbClr val="9FB0CC"/>
                 </a:solidFill>
@@ -4922,48 +5222,38 @@
                 <a:ea typeface="Calibri" pitchFamily="34" charset="-122"/>
                 <a:cs typeface="Calibri" pitchFamily="34" charset="-120"/>
               </a:rPr>
-              <a:t>Positioning, launch material and the pitch</a:t>
-            </a:r>
-            <a:endParaRPr lang="en-US" sz="1150" dirty="0"/>
-          </a:p>
-        </p:txBody>
-      </p:sp>
-      <p:sp>
-        <p:nvSpPr>
-          <p:cNvPr id="24" name="Text 22"/>
-          <p:cNvSpPr txBox="1"/>
-          <p:nvPr/>
-        </p:nvSpPr>
-        <p:spPr>
-          <a:xfrm>
-            <a:off x="685800" y="5806440"/>
-            <a:ext cx="10789920" cy="292608"/>
-          </a:xfrm>
-          <a:prstGeom prst="rect">
-            <a:avLst/>
-          </a:prstGeom>
-          <a:noFill/>
-          <a:ln/>
-        </p:spPr>
-        <p:txBody>
-          <a:bodyPr wrap="square" lIns="0" tIns="0" rIns="0" bIns="0" rtlCol="0" anchor="ctr"/>
-          <a:lstStyle/>
-          <a:p>
-            <a:pPr algn="ctr" indent="0" marL="0">
-              <a:buNone/>
-            </a:pPr>
-            <a:r>
-              <a:rPr lang="en-US" sz="1150" i="1" dirty="0">
-                <a:solidFill>
-                  <a:srgbClr val="64748B"/>
-                </a:solidFill>
-                <a:latin typeface="Calibri" pitchFamily="34" charset="0"/>
-                <a:ea typeface="Calibri" pitchFamily="34" charset="-122"/>
-                <a:cs typeface="Calibri" pitchFamily="34" charset="-120"/>
-              </a:rPr>
-              <a:t>[ Add contact email · GitHub · LinkedIn ]</a:t>
-            </a:r>
-            <a:endParaRPr lang="en-US" sz="1150" dirty="0"/>
+              <a:t>A dataset that looked ideal and turned out unusable. A merge that made the model worse. A metric that hid a failure for an hour.</a:t>
+            </a:r>
+            <a:endParaRPr lang="en-US" sz="1200" dirty="0"/>
+          </a:p>
+          <a:p>
+            <a:pPr indent="0" marL="0">
+              <a:lnSpc>
+                <a:spcPct val="112000"/>
+              </a:lnSpc>
+              <a:buNone/>
+            </a:pPr>
+            <a:endParaRPr lang="en-US" sz="1200" dirty="0"/>
+          </a:p>
+          <a:p>
+            <a:pPr indent="0" marL="0">
+              <a:lnSpc>
+                <a:spcPct val="112000"/>
+              </a:lnSpc>
+              <a:buNone/>
+            </a:pPr>
+            <a:r>
+              <a:rPr lang="en-US" sz="1200" dirty="0">
+                <a:solidFill>
+                  <a:srgbClr val="9FB0CC"/>
+                </a:solidFill>
+                <a:latin typeface="Calibri" pitchFamily="34" charset="0"/>
+                <a:ea typeface="Calibri" pitchFamily="34" charset="-122"/>
+                <a:cs typeface="Calibri" pitchFamily="34" charset="-120"/>
+              </a:rPr>
+              <a:t>All of it is in the repository.</a:t>
+            </a:r>
+            <a:endParaRPr lang="en-US" sz="1200" dirty="0"/>
           </a:p>
         </p:txBody>
       </p:sp>
@@ -5076,7 +5366,7 @@
                 <a:ea typeface="Calibri" pitchFamily="34" charset="-122"/>
                 <a:cs typeface="Calibri" pitchFamily="34" charset="-120"/>
               </a:rPr>
-              <a:t>WHAT COMES NEXT</a:t>
+              <a:t>THE TEAM</a:t>
             </a:r>
             <a:endParaRPr lang="en-US" sz="1100" dirty="0"/>
           </a:p>
@@ -5115,7 +5405,7 @@
                 <a:ea typeface="Calibri" pitchFamily="34" charset="-122"/>
                 <a:cs typeface="Calibri" pitchFamily="34" charset="-120"/>
               </a:rPr>
-              <a:t>The honest roadmap.</a:t>
+              <a:t>Three people, one build.</a:t>
             </a:r>
             <a:endParaRPr lang="en-US" sz="3800" dirty="0"/>
           </a:p>
@@ -5130,11 +5420,11 @@
         <p:spPr>
           <a:xfrm>
             <a:off x="685800" y="2286000"/>
-            <a:ext cx="3337560" cy="2926080"/>
+            <a:ext cx="3337560" cy="3246120"/>
           </a:xfrm>
           <a:prstGeom prst="roundRect">
             <a:avLst>
-              <a:gd name="adj" fmla="val 3750"/>
+              <a:gd name="adj" fmla="val 3380"/>
             </a:avLst>
           </a:prstGeom>
           <a:solidFill>
@@ -5159,158 +5449,184 @@
       </p:sp>
       <p:sp>
         <p:nvSpPr>
-          <p:cNvPr id="7" name="Text 5"/>
-          <p:cNvSpPr txBox="1"/>
-          <p:nvPr/>
-        </p:nvSpPr>
-        <p:spPr>
-          <a:xfrm>
-            <a:off x="960120" y="2505456"/>
-            <a:ext cx="2743200" cy="274320"/>
-          </a:xfrm>
-          <a:prstGeom prst="rect">
-            <a:avLst/>
-          </a:prstGeom>
-          <a:noFill/>
-          <a:ln/>
-        </p:spPr>
-        <p:txBody>
-          <a:bodyPr wrap="square" lIns="0" tIns="0" rIns="0" bIns="0" rtlCol="0" anchor="ctr"/>
-          <a:lstStyle/>
-          <a:p>
-            <a:pPr indent="0" marL="0">
-              <a:buNone/>
-            </a:pPr>
-            <a:r>
-              <a:rPr lang="en-US" sz="1150" b="1" spc="200" kern="0" dirty="0">
-                <a:solidFill>
-                  <a:srgbClr val="10B981"/>
-                </a:solidFill>
-                <a:latin typeface="Calibri" pitchFamily="34" charset="0"/>
-                <a:ea typeface="Calibri" pitchFamily="34" charset="-122"/>
-                <a:cs typeface="Calibri" pitchFamily="34" charset="-120"/>
-              </a:rPr>
-              <a:t>SHIPPED</a:t>
+          <p:cNvPr id="7" name="Shape 5"/>
+          <p:cNvSpPr/>
+          <p:nvPr/>
+        </p:nvSpPr>
+        <p:spPr>
+          <a:xfrm>
+            <a:off x="1764792" y="2578608"/>
+            <a:ext cx="1188720" cy="1188720"/>
+          </a:xfrm>
+          <a:prstGeom prst="ellipse">
+            <a:avLst/>
+          </a:prstGeom>
+          <a:solidFill>
+            <a:srgbClr val="22D3EE">
+              <a:alpha val="18000"/>
+            </a:srgbClr>
+          </a:solidFill>
+          <a:ln w="19050">
+            <a:solidFill>
+              <a:srgbClr val="22D3EE"/>
+            </a:solidFill>
+            <a:prstDash val="solid"/>
+          </a:ln>
+        </p:spPr>
+      </p:sp>
+      <p:sp>
+        <p:nvSpPr>
+          <p:cNvPr id="8" name="Text 6"/>
+          <p:cNvSpPr txBox="1"/>
+          <p:nvPr/>
+        </p:nvSpPr>
+        <p:spPr>
+          <a:xfrm>
+            <a:off x="1764792" y="3054096"/>
+            <a:ext cx="1188720" cy="256032"/>
+          </a:xfrm>
+          <a:prstGeom prst="rect">
+            <a:avLst/>
+          </a:prstGeom>
+          <a:noFill/>
+          <a:ln/>
+        </p:spPr>
+        <p:txBody>
+          <a:bodyPr wrap="square" lIns="0" tIns="0" rIns="0" bIns="0" rtlCol="0" anchor="ctr"/>
+          <a:lstStyle/>
+          <a:p>
+            <a:pPr algn="ctr" indent="0" marL="0">
+              <a:buNone/>
+            </a:pPr>
+            <a:r>
+              <a:rPr lang="en-US" sz="950" spc="140" kern="0" dirty="0">
+                <a:solidFill>
+                  <a:srgbClr val="22D3EE"/>
+                </a:solidFill>
+                <a:latin typeface="Calibri" pitchFamily="34" charset="0"/>
+                <a:ea typeface="Calibri" pitchFamily="34" charset="-122"/>
+                <a:cs typeface="Calibri" pitchFamily="34" charset="-120"/>
+              </a:rPr>
+              <a:t>PHOTO</a:t>
+            </a:r>
+            <a:endParaRPr lang="en-US" sz="950" dirty="0"/>
+          </a:p>
+        </p:txBody>
+      </p:sp>
+      <p:sp>
+        <p:nvSpPr>
+          <p:cNvPr id="9" name="Text 7"/>
+          <p:cNvSpPr txBox="1"/>
+          <p:nvPr/>
+        </p:nvSpPr>
+        <p:spPr>
+          <a:xfrm>
+            <a:off x="914400" y="3950208"/>
+            <a:ext cx="2880360" cy="329184"/>
+          </a:xfrm>
+          <a:prstGeom prst="rect">
+            <a:avLst/>
+          </a:prstGeom>
+          <a:noFill/>
+          <a:ln/>
+        </p:spPr>
+        <p:txBody>
+          <a:bodyPr wrap="square" lIns="0" tIns="0" rIns="0" bIns="0" rtlCol="0" anchor="ctr"/>
+          <a:lstStyle/>
+          <a:p>
+            <a:pPr algn="ctr" indent="0" marL="0">
+              <a:buNone/>
+            </a:pPr>
+            <a:r>
+              <a:rPr lang="en-US" sz="1600" b="1" dirty="0">
+                <a:solidFill>
+                  <a:srgbClr val="E8EEF8"/>
+                </a:solidFill>
+                <a:latin typeface="Calibri" pitchFamily="34" charset="0"/>
+                <a:ea typeface="Calibri" pitchFamily="34" charset="-122"/>
+                <a:cs typeface="Calibri" pitchFamily="34" charset="-120"/>
+              </a:rPr>
+              <a:t>Ayaan Aatif</a:t>
+            </a:r>
+            <a:endParaRPr lang="en-US" sz="1600" dirty="0"/>
+          </a:p>
+        </p:txBody>
+      </p:sp>
+      <p:sp>
+        <p:nvSpPr>
+          <p:cNvPr id="10" name="Text 8"/>
+          <p:cNvSpPr txBox="1"/>
+          <p:nvPr/>
+        </p:nvSpPr>
+        <p:spPr>
+          <a:xfrm>
+            <a:off x="914400" y="4297680"/>
+            <a:ext cx="2880360" cy="274320"/>
+          </a:xfrm>
+          <a:prstGeom prst="rect">
+            <a:avLst/>
+          </a:prstGeom>
+          <a:noFill/>
+          <a:ln/>
+        </p:spPr>
+        <p:txBody>
+          <a:bodyPr wrap="square" lIns="0" tIns="0" rIns="0" bIns="0" rtlCol="0" anchor="ctr"/>
+          <a:lstStyle/>
+          <a:p>
+            <a:pPr algn="ctr" indent="0" marL="0">
+              <a:buNone/>
+            </a:pPr>
+            <a:r>
+              <a:rPr lang="en-US" sz="1200" dirty="0">
+                <a:solidFill>
+                  <a:srgbClr val="22D3EE"/>
+                </a:solidFill>
+                <a:latin typeface="Calibri" pitchFamily="34" charset="0"/>
+                <a:ea typeface="Calibri" pitchFamily="34" charset="-122"/>
+                <a:cs typeface="Calibri" pitchFamily="34" charset="-120"/>
+              </a:rPr>
+              <a:t>Team Lead</a:t>
+            </a:r>
+            <a:endParaRPr lang="en-US" sz="1200" dirty="0"/>
+          </a:p>
+        </p:txBody>
+      </p:sp>
+      <p:sp>
+        <p:nvSpPr>
+          <p:cNvPr id="11" name="Text 9"/>
+          <p:cNvSpPr txBox="1"/>
+          <p:nvPr/>
+        </p:nvSpPr>
+        <p:spPr>
+          <a:xfrm>
+            <a:off x="914400" y="4626864"/>
+            <a:ext cx="2880360" cy="640080"/>
+          </a:xfrm>
+          <a:prstGeom prst="rect">
+            <a:avLst/>
+          </a:prstGeom>
+          <a:noFill/>
+          <a:ln/>
+        </p:spPr>
+        <p:txBody>
+          <a:bodyPr wrap="square" lIns="0" tIns="0" rIns="0" bIns="0" rtlCol="0" anchor="ctr"/>
+          <a:lstStyle/>
+          <a:p>
+            <a:pPr algn="ctr" indent="0" marL="0">
+              <a:buNone/>
+            </a:pPr>
+            <a:r>
+              <a:rPr lang="en-US" sz="1150" dirty="0">
+                <a:solidFill>
+                  <a:srgbClr val="9FB0CC"/>
+                </a:solidFill>
+                <a:latin typeface="Calibri" pitchFamily="34" charset="0"/>
+                <a:ea typeface="Calibri" pitchFamily="34" charset="-122"/>
+                <a:cs typeface="Calibri" pitchFamily="34" charset="-120"/>
+              </a:rPr>
+              <a:t>Architecture, ML pipeline, demo delivery</a:t>
             </a:r>
             <a:endParaRPr lang="en-US" sz="1150" dirty="0"/>
-          </a:p>
-        </p:txBody>
-      </p:sp>
-      <p:sp>
-        <p:nvSpPr>
-          <p:cNvPr id="8" name="Shape 6"/>
-          <p:cNvSpPr/>
-          <p:nvPr/>
-        </p:nvSpPr>
-        <p:spPr>
-          <a:xfrm>
-            <a:off x="960120" y="2999232"/>
-            <a:ext cx="91440" cy="91440"/>
-          </a:xfrm>
-          <a:prstGeom prst="ellipse">
-            <a:avLst/>
-          </a:prstGeom>
-          <a:solidFill>
-            <a:srgbClr val="10B981"/>
-          </a:solidFill>
-          <a:ln/>
-        </p:spPr>
-      </p:sp>
-      <p:sp>
-        <p:nvSpPr>
-          <p:cNvPr id="9" name="Text 7"/>
-          <p:cNvSpPr txBox="1"/>
-          <p:nvPr/>
-        </p:nvSpPr>
-        <p:spPr>
-          <a:xfrm>
-            <a:off x="1179576" y="2926080"/>
-            <a:ext cx="2651760" cy="621792"/>
-          </a:xfrm>
-          <a:prstGeom prst="rect">
-            <a:avLst/>
-          </a:prstGeom>
-          <a:noFill/>
-          <a:ln/>
-        </p:spPr>
-        <p:txBody>
-          <a:bodyPr wrap="square" lIns="0" tIns="0" rIns="0" bIns="0" rtlCol="0" anchor="ctr"/>
-          <a:lstStyle/>
-          <a:p>
-            <a:pPr indent="0" marL="0">
-              <a:buNone/>
-            </a:pPr>
-            <a:r>
-              <a:rPr lang="en-US" sz="1200" dirty="0">
-                <a:solidFill>
-                  <a:srgbClr val="9FB0CC"/>
-                </a:solidFill>
-                <a:latin typeface="Calibri" pitchFamily="34" charset="0"/>
-                <a:ea typeface="Calibri" pitchFamily="34" charset="-122"/>
-                <a:cs typeface="Calibri" pitchFamily="34" charset="-120"/>
-              </a:rPr>
-              <a:t>Crack detection, measured on unseen data</a:t>
-            </a:r>
-            <a:endParaRPr lang="en-US" sz="1200" dirty="0"/>
-          </a:p>
-        </p:txBody>
-      </p:sp>
-      <p:sp>
-        <p:nvSpPr>
-          <p:cNvPr id="10" name="Shape 8"/>
-          <p:cNvSpPr/>
-          <p:nvPr/>
-        </p:nvSpPr>
-        <p:spPr>
-          <a:xfrm>
-            <a:off x="960120" y="3712464"/>
-            <a:ext cx="91440" cy="91440"/>
-          </a:xfrm>
-          <a:prstGeom prst="ellipse">
-            <a:avLst/>
-          </a:prstGeom>
-          <a:solidFill>
-            <a:srgbClr val="10B981"/>
-          </a:solidFill>
-          <a:ln/>
-        </p:spPr>
-      </p:sp>
-      <p:sp>
-        <p:nvSpPr>
-          <p:cNvPr id="11" name="Text 9"/>
-          <p:cNvSpPr txBox="1"/>
-          <p:nvPr/>
-        </p:nvSpPr>
-        <p:spPr>
-          <a:xfrm>
-            <a:off x="1179576" y="3639312"/>
-            <a:ext cx="2651760" cy="621792"/>
-          </a:xfrm>
-          <a:prstGeom prst="rect">
-            <a:avLst/>
-          </a:prstGeom>
-          <a:noFill/>
-          <a:ln/>
-        </p:spPr>
-        <p:txBody>
-          <a:bodyPr wrap="square" lIns="0" tIns="0" rIns="0" bIns="0" rtlCol="0" anchor="ctr"/>
-          <a:lstStyle/>
-          <a:p>
-            <a:pPr indent="0" marL="0">
-              <a:buNone/>
-            </a:pPr>
-            <a:r>
-              <a:rPr lang="en-US" sz="1200" dirty="0">
-                <a:solidFill>
-                  <a:srgbClr val="9FB0CC"/>
-                </a:solidFill>
-                <a:latin typeface="Calibri" pitchFamily="34" charset="0"/>
-                <a:ea typeface="Calibri" pitchFamily="34" charset="-122"/>
-                <a:cs typeface="Calibri" pitchFamily="34" charset="-120"/>
-              </a:rPr>
-              <a:t>Severity scoring and PDF reports</a:t>
-            </a:r>
-            <a:endParaRPr lang="en-US" sz="1200" dirty="0"/>
           </a:p>
         </p:txBody>
       </p:sp>
@@ -5322,71 +5638,12 @@
         </p:nvSpPr>
         <p:spPr>
           <a:xfrm>
-            <a:off x="960120" y="4425696"/>
-            <a:ext cx="91440" cy="91440"/>
-          </a:xfrm>
-          <a:prstGeom prst="ellipse">
-            <a:avLst/>
-          </a:prstGeom>
-          <a:solidFill>
-            <a:srgbClr val="10B981"/>
-          </a:solidFill>
-          <a:ln/>
-        </p:spPr>
-      </p:sp>
-      <p:sp>
-        <p:nvSpPr>
-          <p:cNvPr id="13" name="Text 11"/>
-          <p:cNvSpPr txBox="1"/>
-          <p:nvPr/>
-        </p:nvSpPr>
-        <p:spPr>
-          <a:xfrm>
-            <a:off x="1179576" y="4352544"/>
-            <a:ext cx="2651760" cy="621792"/>
-          </a:xfrm>
-          <a:prstGeom prst="rect">
-            <a:avLst/>
-          </a:prstGeom>
-          <a:noFill/>
-          <a:ln/>
-        </p:spPr>
-        <p:txBody>
-          <a:bodyPr wrap="square" lIns="0" tIns="0" rIns="0" bIns="0" rtlCol="0" anchor="ctr"/>
-          <a:lstStyle/>
-          <a:p>
-            <a:pPr indent="0" marL="0">
-              <a:buNone/>
-            </a:pPr>
-            <a:r>
-              <a:rPr lang="en-US" sz="1200" dirty="0">
-                <a:solidFill>
-                  <a:srgbClr val="9FB0CC"/>
-                </a:solidFill>
-                <a:latin typeface="Calibri" pitchFamily="34" charset="0"/>
-                <a:ea typeface="Calibri" pitchFamily="34" charset="-122"/>
-                <a:cs typeface="Calibri" pitchFamily="34" charset="-120"/>
-              </a:rPr>
-              <a:t>Dashboard, 3D viewer, auth, Docker</a:t>
-            </a:r>
-            <a:endParaRPr lang="en-US" sz="1200" dirty="0"/>
-          </a:p>
-        </p:txBody>
-      </p:sp>
-      <p:sp>
-        <p:nvSpPr>
-          <p:cNvPr id="14" name="Shape 12"/>
-          <p:cNvSpPr/>
-          <p:nvPr/>
-        </p:nvSpPr>
-        <p:spPr>
-          <a:xfrm>
             <a:off x="4343400" y="2286000"/>
-            <a:ext cx="3337560" cy="2926080"/>
+            <a:ext cx="3337560" cy="3246120"/>
           </a:xfrm>
           <a:prstGeom prst="roundRect">
             <a:avLst>
-              <a:gd name="adj" fmla="val 3750"/>
+              <a:gd name="adj" fmla="val 3380"/>
             </a:avLst>
           </a:prstGeom>
           <a:solidFill>
@@ -5411,99 +5668,184 @@
       </p:sp>
       <p:sp>
         <p:nvSpPr>
+          <p:cNvPr id="13" name="Shape 11"/>
+          <p:cNvSpPr/>
+          <p:nvPr/>
+        </p:nvSpPr>
+        <p:spPr>
+          <a:xfrm>
+            <a:off x="5422392" y="2578608"/>
+            <a:ext cx="1188720" cy="1188720"/>
+          </a:xfrm>
+          <a:prstGeom prst="ellipse">
+            <a:avLst/>
+          </a:prstGeom>
+          <a:solidFill>
+            <a:srgbClr val="6366F1">
+              <a:alpha val="18000"/>
+            </a:srgbClr>
+          </a:solidFill>
+          <a:ln w="19050">
+            <a:solidFill>
+              <a:srgbClr val="6366F1"/>
+            </a:solidFill>
+            <a:prstDash val="solid"/>
+          </a:ln>
+        </p:spPr>
+      </p:sp>
+      <p:sp>
+        <p:nvSpPr>
+          <p:cNvPr id="14" name="Text 12"/>
+          <p:cNvSpPr txBox="1"/>
+          <p:nvPr/>
+        </p:nvSpPr>
+        <p:spPr>
+          <a:xfrm>
+            <a:off x="5422392" y="3054096"/>
+            <a:ext cx="1188720" cy="256032"/>
+          </a:xfrm>
+          <a:prstGeom prst="rect">
+            <a:avLst/>
+          </a:prstGeom>
+          <a:noFill/>
+          <a:ln/>
+        </p:spPr>
+        <p:txBody>
+          <a:bodyPr wrap="square" lIns="0" tIns="0" rIns="0" bIns="0" rtlCol="0" anchor="ctr"/>
+          <a:lstStyle/>
+          <a:p>
+            <a:pPr algn="ctr" indent="0" marL="0">
+              <a:buNone/>
+            </a:pPr>
+            <a:r>
+              <a:rPr lang="en-US" sz="950" spc="140" kern="0" dirty="0">
+                <a:solidFill>
+                  <a:srgbClr val="6366F1"/>
+                </a:solidFill>
+                <a:latin typeface="Calibri" pitchFamily="34" charset="0"/>
+                <a:ea typeface="Calibri" pitchFamily="34" charset="-122"/>
+                <a:cs typeface="Calibri" pitchFamily="34" charset="-120"/>
+              </a:rPr>
+              <a:t>PHOTO</a:t>
+            </a:r>
+            <a:endParaRPr lang="en-US" sz="950" dirty="0"/>
+          </a:p>
+        </p:txBody>
+      </p:sp>
+      <p:sp>
+        <p:nvSpPr>
           <p:cNvPr id="15" name="Text 13"/>
           <p:cNvSpPr txBox="1"/>
           <p:nvPr/>
         </p:nvSpPr>
         <p:spPr>
           <a:xfrm>
-            <a:off x="4617720" y="2505456"/>
-            <a:ext cx="2743200" cy="274320"/>
-          </a:xfrm>
-          <a:prstGeom prst="rect">
-            <a:avLst/>
-          </a:prstGeom>
-          <a:noFill/>
-          <a:ln/>
-        </p:spPr>
-        <p:txBody>
-          <a:bodyPr wrap="square" lIns="0" tIns="0" rIns="0" bIns="0" rtlCol="0" anchor="ctr"/>
-          <a:lstStyle/>
-          <a:p>
-            <a:pPr indent="0" marL="0">
-              <a:buNone/>
-            </a:pPr>
-            <a:r>
-              <a:rPr lang="en-US" sz="1150" b="1" spc="200" kern="0" dirty="0">
-                <a:solidFill>
-                  <a:srgbClr val="22D3EE"/>
-                </a:solidFill>
-                <a:latin typeface="Calibri" pitchFamily="34" charset="0"/>
-                <a:ea typeface="Calibri" pitchFamily="34" charset="-122"/>
-                <a:cs typeface="Calibri" pitchFamily="34" charset="-120"/>
-              </a:rPr>
-              <a:t>NEXT</a:t>
+            <a:off x="4572000" y="3950208"/>
+            <a:ext cx="2880360" cy="329184"/>
+          </a:xfrm>
+          <a:prstGeom prst="rect">
+            <a:avLst/>
+          </a:prstGeom>
+          <a:noFill/>
+          <a:ln/>
+        </p:spPr>
+        <p:txBody>
+          <a:bodyPr wrap="square" lIns="0" tIns="0" rIns="0" bIns="0" rtlCol="0" anchor="ctr"/>
+          <a:lstStyle/>
+          <a:p>
+            <a:pPr algn="ctr" indent="0" marL="0">
+              <a:buNone/>
+            </a:pPr>
+            <a:r>
+              <a:rPr lang="en-US" sz="1600" b="1" dirty="0">
+                <a:solidFill>
+                  <a:srgbClr val="E8EEF8"/>
+                </a:solidFill>
+                <a:latin typeface="Calibri" pitchFamily="34" charset="0"/>
+                <a:ea typeface="Calibri" pitchFamily="34" charset="-122"/>
+                <a:cs typeface="Calibri" pitchFamily="34" charset="-120"/>
+              </a:rPr>
+              <a:t>Muhammad Muneeb</a:t>
+            </a:r>
+            <a:endParaRPr lang="en-US" sz="1600" dirty="0"/>
+          </a:p>
+        </p:txBody>
+      </p:sp>
+      <p:sp>
+        <p:nvSpPr>
+          <p:cNvPr id="16" name="Text 14"/>
+          <p:cNvSpPr txBox="1"/>
+          <p:nvPr/>
+        </p:nvSpPr>
+        <p:spPr>
+          <a:xfrm>
+            <a:off x="4572000" y="4297680"/>
+            <a:ext cx="2880360" cy="274320"/>
+          </a:xfrm>
+          <a:prstGeom prst="rect">
+            <a:avLst/>
+          </a:prstGeom>
+          <a:noFill/>
+          <a:ln/>
+        </p:spPr>
+        <p:txBody>
+          <a:bodyPr wrap="square" lIns="0" tIns="0" rIns="0" bIns="0" rtlCol="0" anchor="ctr"/>
+          <a:lstStyle/>
+          <a:p>
+            <a:pPr algn="ctr" indent="0" marL="0">
+              <a:buNone/>
+            </a:pPr>
+            <a:r>
+              <a:rPr lang="en-US" sz="1200" dirty="0">
+                <a:solidFill>
+                  <a:srgbClr val="6366F1"/>
+                </a:solidFill>
+                <a:latin typeface="Calibri" pitchFamily="34" charset="0"/>
+                <a:ea typeface="Calibri" pitchFamily="34" charset="-122"/>
+                <a:cs typeface="Calibri" pitchFamily="34" charset="-120"/>
+              </a:rPr>
+              <a:t>Backend, Data &amp; API</a:t>
+            </a:r>
+            <a:endParaRPr lang="en-US" sz="1200" dirty="0"/>
+          </a:p>
+        </p:txBody>
+      </p:sp>
+      <p:sp>
+        <p:nvSpPr>
+          <p:cNvPr id="17" name="Text 15"/>
+          <p:cNvSpPr txBox="1"/>
+          <p:nvPr/>
+        </p:nvSpPr>
+        <p:spPr>
+          <a:xfrm>
+            <a:off x="4572000" y="4626864"/>
+            <a:ext cx="2880360" cy="640080"/>
+          </a:xfrm>
+          <a:prstGeom prst="rect">
+            <a:avLst/>
+          </a:prstGeom>
+          <a:noFill/>
+          <a:ln/>
+        </p:spPr>
+        <p:txBody>
+          <a:bodyPr wrap="square" lIns="0" tIns="0" rIns="0" bIns="0" rtlCol="0" anchor="ctr"/>
+          <a:lstStyle/>
+          <a:p>
+            <a:pPr algn="ctr" indent="0" marL="0">
+              <a:buNone/>
+            </a:pPr>
+            <a:r>
+              <a:rPr lang="en-US" sz="1150" dirty="0">
+                <a:solidFill>
+                  <a:srgbClr val="9FB0CC"/>
+                </a:solidFill>
+                <a:latin typeface="Calibri" pitchFamily="34" charset="0"/>
+                <a:ea typeface="Calibri" pitchFamily="34" charset="-122"/>
+                <a:cs typeface="Calibri" pitchFamily="34" charset="-120"/>
+              </a:rPr>
+              <a:t>Services, database and the upload pipeline</a:t>
             </a:r>
             <a:endParaRPr lang="en-US" sz="1150" dirty="0"/>
-          </a:p>
-        </p:txBody>
-      </p:sp>
-      <p:sp>
-        <p:nvSpPr>
-          <p:cNvPr id="16" name="Shape 14"/>
-          <p:cNvSpPr/>
-          <p:nvPr/>
-        </p:nvSpPr>
-        <p:spPr>
-          <a:xfrm>
-            <a:off x="4617720" y="2999232"/>
-            <a:ext cx="91440" cy="91440"/>
-          </a:xfrm>
-          <a:prstGeom prst="ellipse">
-            <a:avLst/>
-          </a:prstGeom>
-          <a:solidFill>
-            <a:srgbClr val="22D3EE"/>
-          </a:solidFill>
-          <a:ln/>
-        </p:spPr>
-      </p:sp>
-      <p:sp>
-        <p:nvSpPr>
-          <p:cNvPr id="17" name="Text 15"/>
-          <p:cNvSpPr txBox="1"/>
-          <p:nvPr/>
-        </p:nvSpPr>
-        <p:spPr>
-          <a:xfrm>
-            <a:off x="4837176" y="2926080"/>
-            <a:ext cx="2651760" cy="621792"/>
-          </a:xfrm>
-          <a:prstGeom prst="rect">
-            <a:avLst/>
-          </a:prstGeom>
-          <a:noFill/>
-          <a:ln/>
-        </p:spPr>
-        <p:txBody>
-          <a:bodyPr wrap="square" lIns="0" tIns="0" rIns="0" bIns="0" rtlCol="0" anchor="ctr"/>
-          <a:lstStyle/>
-          <a:p>
-            <a:pPr indent="0" marL="0">
-              <a:buNone/>
-            </a:pPr>
-            <a:r>
-              <a:rPr lang="en-US" sz="1200" dirty="0">
-                <a:solidFill>
-                  <a:srgbClr val="9FB0CC"/>
-                </a:solidFill>
-                <a:latin typeface="Calibri" pitchFamily="34" charset="0"/>
-                <a:ea typeface="Calibri" pitchFamily="34" charset="-122"/>
-                <a:cs typeface="Calibri" pitchFamily="34" charset="-120"/>
-              </a:rPr>
-              <a:t>Varied training data to close the 63/81 gap</a:t>
-            </a:r>
-            <a:endParaRPr lang="en-US" sz="1200" dirty="0"/>
           </a:p>
         </p:txBody>
       </p:sp>
@@ -5515,130 +5857,12 @@
         </p:nvSpPr>
         <p:spPr>
           <a:xfrm>
-            <a:off x="4617720" y="3712464"/>
-            <a:ext cx="91440" cy="91440"/>
-          </a:xfrm>
-          <a:prstGeom prst="ellipse">
-            <a:avLst/>
-          </a:prstGeom>
-          <a:solidFill>
-            <a:srgbClr val="22D3EE"/>
-          </a:solidFill>
-          <a:ln/>
-        </p:spPr>
-      </p:sp>
-      <p:sp>
-        <p:nvSpPr>
-          <p:cNvPr id="19" name="Text 17"/>
-          <p:cNvSpPr txBox="1"/>
-          <p:nvPr/>
-        </p:nvSpPr>
-        <p:spPr>
-          <a:xfrm>
-            <a:off x="4837176" y="3639312"/>
-            <a:ext cx="2651760" cy="621792"/>
-          </a:xfrm>
-          <a:prstGeom prst="rect">
-            <a:avLst/>
-          </a:prstGeom>
-          <a:noFill/>
-          <a:ln/>
-        </p:spPr>
-        <p:txBody>
-          <a:bodyPr wrap="square" lIns="0" tIns="0" rIns="0" bIns="0" rtlCol="0" anchor="ctr"/>
-          <a:lstStyle/>
-          <a:p>
-            <a:pPr indent="0" marL="0">
-              <a:buNone/>
-            </a:pPr>
-            <a:r>
-              <a:rPr lang="en-US" sz="1200" dirty="0">
-                <a:solidFill>
-                  <a:srgbClr val="9FB0CC"/>
-                </a:solidFill>
-                <a:latin typeface="Calibri" pitchFamily="34" charset="0"/>
-                <a:ea typeface="Calibri" pitchFamily="34" charset="-122"/>
-                <a:cs typeface="Calibri" pitchFamily="34" charset="-120"/>
-              </a:rPr>
-              <a:t>More defect classes — corrosion, spalling</a:t>
-            </a:r>
-            <a:endParaRPr lang="en-US" sz="1200" dirty="0"/>
-          </a:p>
-        </p:txBody>
-      </p:sp>
-      <p:sp>
-        <p:nvSpPr>
-          <p:cNvPr id="20" name="Shape 18"/>
-          <p:cNvSpPr/>
-          <p:nvPr/>
-        </p:nvSpPr>
-        <p:spPr>
-          <a:xfrm>
-            <a:off x="4617720" y="4425696"/>
-            <a:ext cx="91440" cy="91440"/>
-          </a:xfrm>
-          <a:prstGeom prst="ellipse">
-            <a:avLst/>
-          </a:prstGeom>
-          <a:solidFill>
-            <a:srgbClr val="22D3EE"/>
-          </a:solidFill>
-          <a:ln/>
-        </p:spPr>
-      </p:sp>
-      <p:sp>
-        <p:nvSpPr>
-          <p:cNvPr id="21" name="Text 19"/>
-          <p:cNvSpPr txBox="1"/>
-          <p:nvPr/>
-        </p:nvSpPr>
-        <p:spPr>
-          <a:xfrm>
-            <a:off x="4837176" y="4352544"/>
-            <a:ext cx="2651760" cy="621792"/>
-          </a:xfrm>
-          <a:prstGeom prst="rect">
-            <a:avLst/>
-          </a:prstGeom>
-          <a:noFill/>
-          <a:ln/>
-        </p:spPr>
-        <p:txBody>
-          <a:bodyPr wrap="square" lIns="0" tIns="0" rIns="0" bIns="0" rtlCol="0" anchor="ctr"/>
-          <a:lstStyle/>
-          <a:p>
-            <a:pPr indent="0" marL="0">
-              <a:buNone/>
-            </a:pPr>
-            <a:r>
-              <a:rPr lang="en-US" sz="1200" dirty="0">
-                <a:solidFill>
-                  <a:srgbClr val="9FB0CC"/>
-                </a:solidFill>
-                <a:latin typeface="Calibri" pitchFamily="34" charset="0"/>
-                <a:ea typeface="Calibri" pitchFamily="34" charset="-122"/>
-                <a:cs typeface="Calibri" pitchFamily="34" charset="-120"/>
-              </a:rPr>
-              <a:t>Cross-frame tracking so video counts are real</a:t>
-            </a:r>
-            <a:endParaRPr lang="en-US" sz="1200" dirty="0"/>
-          </a:p>
-        </p:txBody>
-      </p:sp>
-      <p:sp>
-        <p:nvSpPr>
-          <p:cNvPr id="22" name="Shape 20"/>
-          <p:cNvSpPr/>
-          <p:nvPr/>
-        </p:nvSpPr>
-        <p:spPr>
-          <a:xfrm>
             <a:off x="8001000" y="2286000"/>
-            <a:ext cx="3337560" cy="2926080"/>
+            <a:ext cx="3337560" cy="3246120"/>
           </a:xfrm>
           <a:prstGeom prst="roundRect">
             <a:avLst>
-              <a:gd name="adj" fmla="val 3750"/>
+              <a:gd name="adj" fmla="val 3380"/>
             </a:avLst>
           </a:prstGeom>
           <a:solidFill>
@@ -5663,30 +5887,213 @@
       </p:sp>
       <p:sp>
         <p:nvSpPr>
+          <p:cNvPr id="19" name="Shape 17"/>
+          <p:cNvSpPr/>
+          <p:nvPr/>
+        </p:nvSpPr>
+        <p:spPr>
+          <a:xfrm>
+            <a:off x="9079992" y="2578608"/>
+            <a:ext cx="1188720" cy="1188720"/>
+          </a:xfrm>
+          <a:prstGeom prst="ellipse">
+            <a:avLst/>
+          </a:prstGeom>
+          <a:solidFill>
+            <a:srgbClr val="A78BFA">
+              <a:alpha val="18000"/>
+            </a:srgbClr>
+          </a:solidFill>
+          <a:ln w="19050">
+            <a:solidFill>
+              <a:srgbClr val="A78BFA"/>
+            </a:solidFill>
+            <a:prstDash val="solid"/>
+          </a:ln>
+        </p:spPr>
+      </p:sp>
+      <p:sp>
+        <p:nvSpPr>
+          <p:cNvPr id="20" name="Text 18"/>
+          <p:cNvSpPr txBox="1"/>
+          <p:nvPr/>
+        </p:nvSpPr>
+        <p:spPr>
+          <a:xfrm>
+            <a:off x="9079992" y="3054096"/>
+            <a:ext cx="1188720" cy="256032"/>
+          </a:xfrm>
+          <a:prstGeom prst="rect">
+            <a:avLst/>
+          </a:prstGeom>
+          <a:noFill/>
+          <a:ln/>
+        </p:spPr>
+        <p:txBody>
+          <a:bodyPr wrap="square" lIns="0" tIns="0" rIns="0" bIns="0" rtlCol="0" anchor="ctr"/>
+          <a:lstStyle/>
+          <a:p>
+            <a:pPr algn="ctr" indent="0" marL="0">
+              <a:buNone/>
+            </a:pPr>
+            <a:r>
+              <a:rPr lang="en-US" sz="950" spc="140" kern="0" dirty="0">
+                <a:solidFill>
+                  <a:srgbClr val="A78BFA"/>
+                </a:solidFill>
+                <a:latin typeface="Calibri" pitchFamily="34" charset="0"/>
+                <a:ea typeface="Calibri" pitchFamily="34" charset="-122"/>
+                <a:cs typeface="Calibri" pitchFamily="34" charset="-120"/>
+              </a:rPr>
+              <a:t>PHOTO</a:t>
+            </a:r>
+            <a:endParaRPr lang="en-US" sz="950" dirty="0"/>
+          </a:p>
+        </p:txBody>
+      </p:sp>
+      <p:sp>
+        <p:nvSpPr>
+          <p:cNvPr id="21" name="Text 19"/>
+          <p:cNvSpPr txBox="1"/>
+          <p:nvPr/>
+        </p:nvSpPr>
+        <p:spPr>
+          <a:xfrm>
+            <a:off x="8229600" y="3950208"/>
+            <a:ext cx="2880360" cy="329184"/>
+          </a:xfrm>
+          <a:prstGeom prst="rect">
+            <a:avLst/>
+          </a:prstGeom>
+          <a:noFill/>
+          <a:ln/>
+        </p:spPr>
+        <p:txBody>
+          <a:bodyPr wrap="square" lIns="0" tIns="0" rIns="0" bIns="0" rtlCol="0" anchor="ctr"/>
+          <a:lstStyle/>
+          <a:p>
+            <a:pPr algn="ctr" indent="0" marL="0">
+              <a:buNone/>
+            </a:pPr>
+            <a:r>
+              <a:rPr lang="en-US" sz="1600" b="1" dirty="0">
+                <a:solidFill>
+                  <a:srgbClr val="E8EEF8"/>
+                </a:solidFill>
+                <a:latin typeface="Calibri" pitchFamily="34" charset="0"/>
+                <a:ea typeface="Calibri" pitchFamily="34" charset="-122"/>
+                <a:cs typeface="Calibri" pitchFamily="34" charset="-120"/>
+              </a:rPr>
+              <a:t>Inshrah Mehmood</a:t>
+            </a:r>
+            <a:endParaRPr lang="en-US" sz="1600" dirty="0"/>
+          </a:p>
+        </p:txBody>
+      </p:sp>
+      <p:sp>
+        <p:nvSpPr>
+          <p:cNvPr id="22" name="Text 20"/>
+          <p:cNvSpPr txBox="1"/>
+          <p:nvPr/>
+        </p:nvSpPr>
+        <p:spPr>
+          <a:xfrm>
+            <a:off x="8229600" y="4297680"/>
+            <a:ext cx="2880360" cy="274320"/>
+          </a:xfrm>
+          <a:prstGeom prst="rect">
+            <a:avLst/>
+          </a:prstGeom>
+          <a:noFill/>
+          <a:ln/>
+        </p:spPr>
+        <p:txBody>
+          <a:bodyPr wrap="square" lIns="0" tIns="0" rIns="0" bIns="0" rtlCol="0" anchor="ctr"/>
+          <a:lstStyle/>
+          <a:p>
+            <a:pPr algn="ctr" indent="0" marL="0">
+              <a:buNone/>
+            </a:pPr>
+            <a:r>
+              <a:rPr lang="en-US" sz="1200" dirty="0">
+                <a:solidFill>
+                  <a:srgbClr val="A78BFA"/>
+                </a:solidFill>
+                <a:latin typeface="Calibri" pitchFamily="34" charset="0"/>
+                <a:ea typeface="Calibri" pitchFamily="34" charset="-122"/>
+                <a:cs typeface="Calibri" pitchFamily="34" charset="-120"/>
+              </a:rPr>
+              <a:t>Marketing &amp; Outreach</a:t>
+            </a:r>
+            <a:endParaRPr lang="en-US" sz="1200" dirty="0"/>
+          </a:p>
+        </p:txBody>
+      </p:sp>
+      <p:sp>
+        <p:nvSpPr>
           <p:cNvPr id="23" name="Text 21"/>
           <p:cNvSpPr txBox="1"/>
           <p:nvPr/>
         </p:nvSpPr>
         <p:spPr>
           <a:xfrm>
-            <a:off x="8275320" y="2505456"/>
-            <a:ext cx="2743200" cy="274320"/>
-          </a:xfrm>
-          <a:prstGeom prst="rect">
-            <a:avLst/>
-          </a:prstGeom>
-          <a:noFill/>
-          <a:ln/>
-        </p:spPr>
-        <p:txBody>
-          <a:bodyPr wrap="square" lIns="0" tIns="0" rIns="0" bIns="0" rtlCol="0" anchor="ctr"/>
-          <a:lstStyle/>
-          <a:p>
-            <a:pPr indent="0" marL="0">
-              <a:buNone/>
-            </a:pPr>
-            <a:r>
-              <a:rPr lang="en-US" sz="1150" b="1" spc="200" kern="0" dirty="0">
+            <a:off x="8229600" y="4626864"/>
+            <a:ext cx="2880360" cy="640080"/>
+          </a:xfrm>
+          <a:prstGeom prst="rect">
+            <a:avLst/>
+          </a:prstGeom>
+          <a:noFill/>
+          <a:ln/>
+        </p:spPr>
+        <p:txBody>
+          <a:bodyPr wrap="square" lIns="0" tIns="0" rIns="0" bIns="0" rtlCol="0" anchor="ctr"/>
+          <a:lstStyle/>
+          <a:p>
+            <a:pPr algn="ctr" indent="0" marL="0">
+              <a:buNone/>
+            </a:pPr>
+            <a:r>
+              <a:rPr lang="en-US" sz="1150" dirty="0">
+                <a:solidFill>
+                  <a:srgbClr val="9FB0CC"/>
+                </a:solidFill>
+                <a:latin typeface="Calibri" pitchFamily="34" charset="0"/>
+                <a:ea typeface="Calibri" pitchFamily="34" charset="-122"/>
+                <a:cs typeface="Calibri" pitchFamily="34" charset="-120"/>
+              </a:rPr>
+              <a:t>Positioning, launch material and the pitch</a:t>
+            </a:r>
+            <a:endParaRPr lang="en-US" sz="1150" dirty="0"/>
+          </a:p>
+        </p:txBody>
+      </p:sp>
+      <p:sp>
+        <p:nvSpPr>
+          <p:cNvPr id="24" name="Text 22"/>
+          <p:cNvSpPr txBox="1"/>
+          <p:nvPr/>
+        </p:nvSpPr>
+        <p:spPr>
+          <a:xfrm>
+            <a:off x="685800" y="5806440"/>
+            <a:ext cx="10789920" cy="292608"/>
+          </a:xfrm>
+          <a:prstGeom prst="rect">
+            <a:avLst/>
+          </a:prstGeom>
+          <a:noFill/>
+          <a:ln/>
+        </p:spPr>
+        <p:txBody>
+          <a:bodyPr wrap="square" lIns="0" tIns="0" rIns="0" bIns="0" rtlCol="0" anchor="ctr"/>
+          <a:lstStyle/>
+          <a:p>
+            <a:pPr algn="ctr" indent="0" marL="0">
+              <a:buNone/>
+            </a:pPr>
+            <a:r>
+              <a:rPr lang="en-US" sz="1150" i="1" dirty="0">
                 <a:solidFill>
                   <a:srgbClr val="64748B"/>
                 </a:solidFill>
@@ -5694,225 +6101,9 @@
                 <a:ea typeface="Calibri" pitchFamily="34" charset="-122"/>
                 <a:cs typeface="Calibri" pitchFamily="34" charset="-120"/>
               </a:rPr>
-              <a:t>LATER</a:t>
+              <a:t>[ Add contact email · GitHub · LinkedIn ]</a:t>
             </a:r>
             <a:endParaRPr lang="en-US" sz="1150" dirty="0"/>
-          </a:p>
-        </p:txBody>
-      </p:sp>
-      <p:sp>
-        <p:nvSpPr>
-          <p:cNvPr id="24" name="Shape 22"/>
-          <p:cNvSpPr/>
-          <p:nvPr/>
-        </p:nvSpPr>
-        <p:spPr>
-          <a:xfrm>
-            <a:off x="8275320" y="2999232"/>
-            <a:ext cx="91440" cy="91440"/>
-          </a:xfrm>
-          <a:prstGeom prst="ellipse">
-            <a:avLst/>
-          </a:prstGeom>
-          <a:solidFill>
-            <a:srgbClr val="64748B"/>
-          </a:solidFill>
-          <a:ln/>
-        </p:spPr>
-      </p:sp>
-      <p:sp>
-        <p:nvSpPr>
-          <p:cNvPr id="25" name="Text 23"/>
-          <p:cNvSpPr txBox="1"/>
-          <p:nvPr/>
-        </p:nvSpPr>
-        <p:spPr>
-          <a:xfrm>
-            <a:off x="8494776" y="2926080"/>
-            <a:ext cx="2651760" cy="621792"/>
-          </a:xfrm>
-          <a:prstGeom prst="rect">
-            <a:avLst/>
-          </a:prstGeom>
-          <a:noFill/>
-          <a:ln/>
-        </p:spPr>
-        <p:txBody>
-          <a:bodyPr wrap="square" lIns="0" tIns="0" rIns="0" bIns="0" rtlCol="0" anchor="ctr"/>
-          <a:lstStyle/>
-          <a:p>
-            <a:pPr indent="0" marL="0">
-              <a:buNone/>
-            </a:pPr>
-            <a:r>
-              <a:rPr lang="en-US" sz="1200" dirty="0">
-                <a:solidFill>
-                  <a:srgbClr val="9FB0CC"/>
-                </a:solidFill>
-                <a:latin typeface="Calibri" pitchFamily="34" charset="0"/>
-                <a:ea typeface="Calibri" pitchFamily="34" charset="-122"/>
-                <a:cs typeface="Calibri" pitchFamily="34" charset="-120"/>
-              </a:rPr>
-              <a:t>Photogrammetric twin from the imagery itself</a:t>
-            </a:r>
-            <a:endParaRPr lang="en-US" sz="1200" dirty="0"/>
-          </a:p>
-        </p:txBody>
-      </p:sp>
-      <p:sp>
-        <p:nvSpPr>
-          <p:cNvPr id="26" name="Shape 24"/>
-          <p:cNvSpPr/>
-          <p:nvPr/>
-        </p:nvSpPr>
-        <p:spPr>
-          <a:xfrm>
-            <a:off x="8275320" y="3712464"/>
-            <a:ext cx="91440" cy="91440"/>
-          </a:xfrm>
-          <a:prstGeom prst="ellipse">
-            <a:avLst/>
-          </a:prstGeom>
-          <a:solidFill>
-            <a:srgbClr val="64748B"/>
-          </a:solidFill>
-          <a:ln/>
-        </p:spPr>
-      </p:sp>
-      <p:sp>
-        <p:nvSpPr>
-          <p:cNvPr id="27" name="Text 25"/>
-          <p:cNvSpPr txBox="1"/>
-          <p:nvPr/>
-        </p:nvSpPr>
-        <p:spPr>
-          <a:xfrm>
-            <a:off x="8494776" y="3639312"/>
-            <a:ext cx="2651760" cy="621792"/>
-          </a:xfrm>
-          <a:prstGeom prst="rect">
-            <a:avLst/>
-          </a:prstGeom>
-          <a:noFill/>
-          <a:ln/>
-        </p:spPr>
-        <p:txBody>
-          <a:bodyPr wrap="square" lIns="0" tIns="0" rIns="0" bIns="0" rtlCol="0" anchor="ctr"/>
-          <a:lstStyle/>
-          <a:p>
-            <a:pPr indent="0" marL="0">
-              <a:buNone/>
-            </a:pPr>
-            <a:r>
-              <a:rPr lang="en-US" sz="1200" dirty="0">
-                <a:solidFill>
-                  <a:srgbClr val="9FB0CC"/>
-                </a:solidFill>
-                <a:latin typeface="Calibri" pitchFamily="34" charset="0"/>
-                <a:ea typeface="Calibri" pitchFamily="34" charset="-122"/>
-                <a:cs typeface="Calibri" pitchFamily="34" charset="-120"/>
-              </a:rPr>
-              <a:t>Predictive maintenance once trend data exists</a:t>
-            </a:r>
-            <a:endParaRPr lang="en-US" sz="1200" dirty="0"/>
-          </a:p>
-        </p:txBody>
-      </p:sp>
-      <p:sp>
-        <p:nvSpPr>
-          <p:cNvPr id="28" name="Shape 26"/>
-          <p:cNvSpPr/>
-          <p:nvPr/>
-        </p:nvSpPr>
-        <p:spPr>
-          <a:xfrm>
-            <a:off x="8275320" y="4425696"/>
-            <a:ext cx="91440" cy="91440"/>
-          </a:xfrm>
-          <a:prstGeom prst="ellipse">
-            <a:avLst/>
-          </a:prstGeom>
-          <a:solidFill>
-            <a:srgbClr val="64748B"/>
-          </a:solidFill>
-          <a:ln/>
-        </p:spPr>
-      </p:sp>
-      <p:sp>
-        <p:nvSpPr>
-          <p:cNvPr id="29" name="Text 27"/>
-          <p:cNvSpPr txBox="1"/>
-          <p:nvPr/>
-        </p:nvSpPr>
-        <p:spPr>
-          <a:xfrm>
-            <a:off x="8494776" y="4352544"/>
-            <a:ext cx="2651760" cy="621792"/>
-          </a:xfrm>
-          <a:prstGeom prst="rect">
-            <a:avLst/>
-          </a:prstGeom>
-          <a:noFill/>
-          <a:ln/>
-        </p:spPr>
-        <p:txBody>
-          <a:bodyPr wrap="square" lIns="0" tIns="0" rIns="0" bIns="0" rtlCol="0" anchor="ctr"/>
-          <a:lstStyle/>
-          <a:p>
-            <a:pPr indent="0" marL="0">
-              <a:buNone/>
-            </a:pPr>
-            <a:r>
-              <a:rPr lang="en-US" sz="1200" dirty="0">
-                <a:solidFill>
-                  <a:srgbClr val="9FB0CC"/>
-                </a:solidFill>
-                <a:latin typeface="Calibri" pitchFamily="34" charset="0"/>
-                <a:ea typeface="Calibri" pitchFamily="34" charset="-122"/>
-                <a:cs typeface="Calibri" pitchFamily="34" charset="-120"/>
-              </a:rPr>
-              <a:t>Live drone and robot integration</a:t>
-            </a:r>
-            <a:endParaRPr lang="en-US" sz="1200" dirty="0"/>
-          </a:p>
-        </p:txBody>
-      </p:sp>
-      <p:sp>
-        <p:nvSpPr>
-          <p:cNvPr id="30" name="Text 28"/>
-          <p:cNvSpPr txBox="1"/>
-          <p:nvPr/>
-        </p:nvSpPr>
-        <p:spPr>
-          <a:xfrm>
-            <a:off x="685800" y="5486400"/>
-            <a:ext cx="10789920" cy="365760"/>
-          </a:xfrm>
-          <a:prstGeom prst="rect">
-            <a:avLst/>
-          </a:prstGeom>
-          <a:noFill/>
-          <a:ln/>
-        </p:spPr>
-        <p:txBody>
-          <a:bodyPr wrap="square" lIns="0" tIns="0" rIns="0" bIns="0" rtlCol="0" anchor="ctr"/>
-          <a:lstStyle/>
-          <a:p>
-            <a:pPr algn="ctr" indent="0" marL="0">
-              <a:buNone/>
-            </a:pPr>
-            <a:r>
-              <a:rPr lang="en-US" sz="1300" i="1" dirty="0">
-                <a:solidFill>
-                  <a:srgbClr val="9FB0CC"/>
-                </a:solidFill>
-                <a:latin typeface="Calibri" pitchFamily="34" charset="0"/>
-                <a:ea typeface="Calibri" pitchFamily="34" charset="-122"/>
-                <a:cs typeface="Calibri" pitchFamily="34" charset="-120"/>
-              </a:rPr>
-              <a:t>Predictive maintenance needs longitudinal data that does not exist yet. We are not going to pretend otherwise.</a:t>
-            </a:r>
-            <a:endParaRPr lang="en-US" sz="1300" dirty="0"/>
           </a:p>
         </p:txBody>
       </p:sp>
@@ -5927,6 +6118,955 @@
 <file path=ppt/slides/slide13.xml><?xml version="1.0" encoding="utf-8"?>
 <p:sld xmlns:a="http://schemas.openxmlformats.org/drawingml/2006/main" xmlns:r="http://schemas.openxmlformats.org/officeDocument/2006/relationships" xmlns:p="http://schemas.openxmlformats.org/presentationml/2006/main">
   <p:cSld name="Slide 13">
+    <p:bg>
+      <p:bgPr>
+        <a:solidFill>
+          <a:srgbClr val="070B14"/>
+        </a:solidFill>
+      </p:bgPr>
+    </p:bg>
+    <p:spTree>
+      <p:nvGrpSpPr>
+        <p:cNvPr id="1" name=""/>
+        <p:cNvGrpSpPr/>
+        <p:nvPr/>
+      </p:nvGrpSpPr>
+      <p:grpSpPr>
+        <a:xfrm>
+          <a:off x="0" y="0"/>
+          <a:ext cx="0" cy="0"/>
+          <a:chOff x="0" y="0"/>
+          <a:chExt cx="0" cy="0"/>
+        </a:xfrm>
+      </p:grpSpPr>
+      <p:sp>
+        <p:nvSpPr>
+          <p:cNvPr id="2" name="Shape 0"/>
+          <p:cNvSpPr/>
+          <p:nvPr/>
+        </p:nvSpPr>
+        <p:spPr>
+          <a:xfrm>
+            <a:off x="-2011680" y="-2377440"/>
+            <a:ext cx="6858000" cy="6858000"/>
+          </a:xfrm>
+          <a:prstGeom prst="ellipse">
+            <a:avLst/>
+          </a:prstGeom>
+          <a:solidFill>
+            <a:srgbClr val="6366F1">
+              <a:alpha val="12000"/>
+            </a:srgbClr>
+          </a:solidFill>
+          <a:ln/>
+        </p:spPr>
+      </p:sp>
+      <p:sp>
+        <p:nvSpPr>
+          <p:cNvPr id="3" name="Shape 1"/>
+          <p:cNvSpPr/>
+          <p:nvPr/>
+        </p:nvSpPr>
+        <p:spPr>
+          <a:xfrm>
+            <a:off x="7955280" y="3017520"/>
+            <a:ext cx="6400800" cy="6400800"/>
+          </a:xfrm>
+          <a:prstGeom prst="ellipse">
+            <a:avLst/>
+          </a:prstGeom>
+          <a:solidFill>
+            <a:srgbClr val="22D3EE">
+              <a:alpha val="9000"/>
+            </a:srgbClr>
+          </a:solidFill>
+          <a:ln/>
+        </p:spPr>
+      </p:sp>
+      <p:sp>
+        <p:nvSpPr>
+          <p:cNvPr id="4" name="Text 2"/>
+          <p:cNvSpPr txBox="1"/>
+          <p:nvPr/>
+        </p:nvSpPr>
+        <p:spPr>
+          <a:xfrm>
+            <a:off x="685800" y="566928"/>
+            <a:ext cx="8229600" cy="274320"/>
+          </a:xfrm>
+          <a:prstGeom prst="rect">
+            <a:avLst/>
+          </a:prstGeom>
+          <a:noFill/>
+          <a:ln/>
+        </p:spPr>
+        <p:txBody>
+          <a:bodyPr wrap="square" lIns="0" tIns="0" rIns="0" bIns="0" rtlCol="0" anchor="ctr"/>
+          <a:lstStyle/>
+          <a:p>
+            <a:pPr indent="0" marL="0">
+              <a:buNone/>
+            </a:pPr>
+            <a:r>
+              <a:rPr lang="en-US" sz="1100" b="1" spc="240" kern="0" dirty="0">
+                <a:solidFill>
+                  <a:srgbClr val="22D3EE"/>
+                </a:solidFill>
+                <a:latin typeface="Calibri" pitchFamily="34" charset="0"/>
+                <a:ea typeface="Calibri" pitchFamily="34" charset="-122"/>
+                <a:cs typeface="Calibri" pitchFamily="34" charset="-120"/>
+              </a:rPr>
+              <a:t>WHAT COMES NEXT</a:t>
+            </a:r>
+            <a:endParaRPr lang="en-US" sz="1100" dirty="0"/>
+          </a:p>
+        </p:txBody>
+      </p:sp>
+      <p:sp>
+        <p:nvSpPr>
+          <p:cNvPr id="5" name="Text 3"/>
+          <p:cNvSpPr txBox="1"/>
+          <p:nvPr/>
+        </p:nvSpPr>
+        <p:spPr>
+          <a:xfrm>
+            <a:off x="685800" y="896112"/>
+            <a:ext cx="10789920" cy="868680"/>
+          </a:xfrm>
+          <a:prstGeom prst="rect">
+            <a:avLst/>
+          </a:prstGeom>
+          <a:noFill/>
+          <a:ln/>
+        </p:spPr>
+        <p:txBody>
+          <a:bodyPr wrap="square" lIns="0" tIns="0" rIns="0" bIns="0" rtlCol="0" anchor="ctr"/>
+          <a:lstStyle/>
+          <a:p>
+            <a:pPr indent="0" marL="0">
+              <a:buNone/>
+            </a:pPr>
+            <a:r>
+              <a:rPr lang="en-US" sz="3800" b="1" dirty="0">
+                <a:solidFill>
+                  <a:srgbClr val="E8EEF8"/>
+                </a:solidFill>
+                <a:latin typeface="Calibri" pitchFamily="34" charset="0"/>
+                <a:ea typeface="Calibri" pitchFamily="34" charset="-122"/>
+                <a:cs typeface="Calibri" pitchFamily="34" charset="-120"/>
+              </a:rPr>
+              <a:t>The honest roadmap.</a:t>
+            </a:r>
+            <a:endParaRPr lang="en-US" sz="3800" dirty="0"/>
+          </a:p>
+        </p:txBody>
+      </p:sp>
+      <p:sp>
+        <p:nvSpPr>
+          <p:cNvPr id="6" name="Shape 4"/>
+          <p:cNvSpPr/>
+          <p:nvPr/>
+        </p:nvSpPr>
+        <p:spPr>
+          <a:xfrm>
+            <a:off x="685800" y="2286000"/>
+            <a:ext cx="3337560" cy="2926080"/>
+          </a:xfrm>
+          <a:prstGeom prst="roundRect">
+            <a:avLst>
+              <a:gd name="adj" fmla="val 3750"/>
+            </a:avLst>
+          </a:prstGeom>
+          <a:solidFill>
+            <a:srgbClr val="111A2E">
+              <a:alpha val="82000"/>
+            </a:srgbClr>
+          </a:solidFill>
+          <a:ln w="12700">
+            <a:solidFill>
+              <a:srgbClr val="1E2B44"/>
+            </a:solidFill>
+            <a:prstDash val="solid"/>
+          </a:ln>
+          <a:effectLst>
+            <a:outerShdw sx="100000" sy="100000" kx="0" ky="0" algn="bl" rotWithShape="0" blurRad="177800" dist="38100" dir="5400000">
+              <a:srgbClr val="000000">
+                <a:alpha val="35000"/>
+              </a:srgbClr>
+            </a:outerShdw>
+          </a:effectLst>
+        </p:spPr>
+      </p:sp>
+      <p:sp>
+        <p:nvSpPr>
+          <p:cNvPr id="7" name="Text 5"/>
+          <p:cNvSpPr txBox="1"/>
+          <p:nvPr/>
+        </p:nvSpPr>
+        <p:spPr>
+          <a:xfrm>
+            <a:off x="960120" y="2505456"/>
+            <a:ext cx="2743200" cy="274320"/>
+          </a:xfrm>
+          <a:prstGeom prst="rect">
+            <a:avLst/>
+          </a:prstGeom>
+          <a:noFill/>
+          <a:ln/>
+        </p:spPr>
+        <p:txBody>
+          <a:bodyPr wrap="square" lIns="0" tIns="0" rIns="0" bIns="0" rtlCol="0" anchor="ctr"/>
+          <a:lstStyle/>
+          <a:p>
+            <a:pPr indent="0" marL="0">
+              <a:buNone/>
+            </a:pPr>
+            <a:r>
+              <a:rPr lang="en-US" sz="1150" b="1" spc="200" kern="0" dirty="0">
+                <a:solidFill>
+                  <a:srgbClr val="10B981"/>
+                </a:solidFill>
+                <a:latin typeface="Calibri" pitchFamily="34" charset="0"/>
+                <a:ea typeface="Calibri" pitchFamily="34" charset="-122"/>
+                <a:cs typeface="Calibri" pitchFamily="34" charset="-120"/>
+              </a:rPr>
+              <a:t>SHIPPED</a:t>
+            </a:r>
+            <a:endParaRPr lang="en-US" sz="1150" dirty="0"/>
+          </a:p>
+        </p:txBody>
+      </p:sp>
+      <p:sp>
+        <p:nvSpPr>
+          <p:cNvPr id="8" name="Shape 6"/>
+          <p:cNvSpPr/>
+          <p:nvPr/>
+        </p:nvSpPr>
+        <p:spPr>
+          <a:xfrm>
+            <a:off x="960120" y="2999232"/>
+            <a:ext cx="91440" cy="91440"/>
+          </a:xfrm>
+          <a:prstGeom prst="ellipse">
+            <a:avLst/>
+          </a:prstGeom>
+          <a:solidFill>
+            <a:srgbClr val="10B981"/>
+          </a:solidFill>
+          <a:ln/>
+        </p:spPr>
+      </p:sp>
+      <p:sp>
+        <p:nvSpPr>
+          <p:cNvPr id="9" name="Text 7"/>
+          <p:cNvSpPr txBox="1"/>
+          <p:nvPr/>
+        </p:nvSpPr>
+        <p:spPr>
+          <a:xfrm>
+            <a:off x="1179576" y="2926080"/>
+            <a:ext cx="2651760" cy="621792"/>
+          </a:xfrm>
+          <a:prstGeom prst="rect">
+            <a:avLst/>
+          </a:prstGeom>
+          <a:noFill/>
+          <a:ln/>
+        </p:spPr>
+        <p:txBody>
+          <a:bodyPr wrap="square" lIns="0" tIns="0" rIns="0" bIns="0" rtlCol="0" anchor="ctr"/>
+          <a:lstStyle/>
+          <a:p>
+            <a:pPr indent="0" marL="0">
+              <a:buNone/>
+            </a:pPr>
+            <a:r>
+              <a:rPr lang="en-US" sz="1200" dirty="0">
+                <a:solidFill>
+                  <a:srgbClr val="9FB0CC"/>
+                </a:solidFill>
+                <a:latin typeface="Calibri" pitchFamily="34" charset="0"/>
+                <a:ea typeface="Calibri" pitchFamily="34" charset="-122"/>
+                <a:cs typeface="Calibri" pitchFamily="34" charset="-120"/>
+              </a:rPr>
+              <a:t>Crack detection, measured on unseen data</a:t>
+            </a:r>
+            <a:endParaRPr lang="en-US" sz="1200" dirty="0"/>
+          </a:p>
+        </p:txBody>
+      </p:sp>
+      <p:sp>
+        <p:nvSpPr>
+          <p:cNvPr id="10" name="Shape 8"/>
+          <p:cNvSpPr/>
+          <p:nvPr/>
+        </p:nvSpPr>
+        <p:spPr>
+          <a:xfrm>
+            <a:off x="960120" y="3712464"/>
+            <a:ext cx="91440" cy="91440"/>
+          </a:xfrm>
+          <a:prstGeom prst="ellipse">
+            <a:avLst/>
+          </a:prstGeom>
+          <a:solidFill>
+            <a:srgbClr val="10B981"/>
+          </a:solidFill>
+          <a:ln/>
+        </p:spPr>
+      </p:sp>
+      <p:sp>
+        <p:nvSpPr>
+          <p:cNvPr id="11" name="Text 9"/>
+          <p:cNvSpPr txBox="1"/>
+          <p:nvPr/>
+        </p:nvSpPr>
+        <p:spPr>
+          <a:xfrm>
+            <a:off x="1179576" y="3639312"/>
+            <a:ext cx="2651760" cy="621792"/>
+          </a:xfrm>
+          <a:prstGeom prst="rect">
+            <a:avLst/>
+          </a:prstGeom>
+          <a:noFill/>
+          <a:ln/>
+        </p:spPr>
+        <p:txBody>
+          <a:bodyPr wrap="square" lIns="0" tIns="0" rIns="0" bIns="0" rtlCol="0" anchor="ctr"/>
+          <a:lstStyle/>
+          <a:p>
+            <a:pPr indent="0" marL="0">
+              <a:buNone/>
+            </a:pPr>
+            <a:r>
+              <a:rPr lang="en-US" sz="1200" dirty="0">
+                <a:solidFill>
+                  <a:srgbClr val="9FB0CC"/>
+                </a:solidFill>
+                <a:latin typeface="Calibri" pitchFamily="34" charset="0"/>
+                <a:ea typeface="Calibri" pitchFamily="34" charset="-122"/>
+                <a:cs typeface="Calibri" pitchFamily="34" charset="-120"/>
+              </a:rPr>
+              <a:t>Severity scoring and PDF reports</a:t>
+            </a:r>
+            <a:endParaRPr lang="en-US" sz="1200" dirty="0"/>
+          </a:p>
+        </p:txBody>
+      </p:sp>
+      <p:sp>
+        <p:nvSpPr>
+          <p:cNvPr id="12" name="Shape 10"/>
+          <p:cNvSpPr/>
+          <p:nvPr/>
+        </p:nvSpPr>
+        <p:spPr>
+          <a:xfrm>
+            <a:off x="960120" y="4425696"/>
+            <a:ext cx="91440" cy="91440"/>
+          </a:xfrm>
+          <a:prstGeom prst="ellipse">
+            <a:avLst/>
+          </a:prstGeom>
+          <a:solidFill>
+            <a:srgbClr val="10B981"/>
+          </a:solidFill>
+          <a:ln/>
+        </p:spPr>
+      </p:sp>
+      <p:sp>
+        <p:nvSpPr>
+          <p:cNvPr id="13" name="Text 11"/>
+          <p:cNvSpPr txBox="1"/>
+          <p:nvPr/>
+        </p:nvSpPr>
+        <p:spPr>
+          <a:xfrm>
+            <a:off x="1179576" y="4352544"/>
+            <a:ext cx="2651760" cy="621792"/>
+          </a:xfrm>
+          <a:prstGeom prst="rect">
+            <a:avLst/>
+          </a:prstGeom>
+          <a:noFill/>
+          <a:ln/>
+        </p:spPr>
+        <p:txBody>
+          <a:bodyPr wrap="square" lIns="0" tIns="0" rIns="0" bIns="0" rtlCol="0" anchor="ctr"/>
+          <a:lstStyle/>
+          <a:p>
+            <a:pPr indent="0" marL="0">
+              <a:buNone/>
+            </a:pPr>
+            <a:r>
+              <a:rPr lang="en-US" sz="1200" dirty="0">
+                <a:solidFill>
+                  <a:srgbClr val="9FB0CC"/>
+                </a:solidFill>
+                <a:latin typeface="Calibri" pitchFamily="34" charset="0"/>
+                <a:ea typeface="Calibri" pitchFamily="34" charset="-122"/>
+                <a:cs typeface="Calibri" pitchFamily="34" charset="-120"/>
+              </a:rPr>
+              <a:t>Simulated survey validated on known ground truth</a:t>
+            </a:r>
+            <a:endParaRPr lang="en-US" sz="1200" dirty="0"/>
+          </a:p>
+        </p:txBody>
+      </p:sp>
+      <p:sp>
+        <p:nvSpPr>
+          <p:cNvPr id="14" name="Shape 12"/>
+          <p:cNvSpPr/>
+          <p:nvPr/>
+        </p:nvSpPr>
+        <p:spPr>
+          <a:xfrm>
+            <a:off x="4343400" y="2286000"/>
+            <a:ext cx="3337560" cy="2926080"/>
+          </a:xfrm>
+          <a:prstGeom prst="roundRect">
+            <a:avLst>
+              <a:gd name="adj" fmla="val 3750"/>
+            </a:avLst>
+          </a:prstGeom>
+          <a:solidFill>
+            <a:srgbClr val="111A2E">
+              <a:alpha val="82000"/>
+            </a:srgbClr>
+          </a:solidFill>
+          <a:ln w="12700">
+            <a:solidFill>
+              <a:srgbClr val="1E2B44"/>
+            </a:solidFill>
+            <a:prstDash val="solid"/>
+          </a:ln>
+          <a:effectLst>
+            <a:outerShdw sx="100000" sy="100000" kx="0" ky="0" algn="bl" rotWithShape="0" blurRad="177800" dist="38100" dir="5400000">
+              <a:srgbClr val="000000">
+                <a:alpha val="35000"/>
+              </a:srgbClr>
+            </a:outerShdw>
+          </a:effectLst>
+        </p:spPr>
+      </p:sp>
+      <p:sp>
+        <p:nvSpPr>
+          <p:cNvPr id="15" name="Text 13"/>
+          <p:cNvSpPr txBox="1"/>
+          <p:nvPr/>
+        </p:nvSpPr>
+        <p:spPr>
+          <a:xfrm>
+            <a:off x="4617720" y="2505456"/>
+            <a:ext cx="2743200" cy="274320"/>
+          </a:xfrm>
+          <a:prstGeom prst="rect">
+            <a:avLst/>
+          </a:prstGeom>
+          <a:noFill/>
+          <a:ln/>
+        </p:spPr>
+        <p:txBody>
+          <a:bodyPr wrap="square" lIns="0" tIns="0" rIns="0" bIns="0" rtlCol="0" anchor="ctr"/>
+          <a:lstStyle/>
+          <a:p>
+            <a:pPr indent="0" marL="0">
+              <a:buNone/>
+            </a:pPr>
+            <a:r>
+              <a:rPr lang="en-US" sz="1150" b="1" spc="200" kern="0" dirty="0">
+                <a:solidFill>
+                  <a:srgbClr val="22D3EE"/>
+                </a:solidFill>
+                <a:latin typeface="Calibri" pitchFamily="34" charset="0"/>
+                <a:ea typeface="Calibri" pitchFamily="34" charset="-122"/>
+                <a:cs typeface="Calibri" pitchFamily="34" charset="-120"/>
+              </a:rPr>
+              <a:t>NEXT</a:t>
+            </a:r>
+            <a:endParaRPr lang="en-US" sz="1150" dirty="0"/>
+          </a:p>
+        </p:txBody>
+      </p:sp>
+      <p:sp>
+        <p:nvSpPr>
+          <p:cNvPr id="16" name="Shape 14"/>
+          <p:cNvSpPr/>
+          <p:nvPr/>
+        </p:nvSpPr>
+        <p:spPr>
+          <a:xfrm>
+            <a:off x="4617720" y="2999232"/>
+            <a:ext cx="91440" cy="91440"/>
+          </a:xfrm>
+          <a:prstGeom prst="ellipse">
+            <a:avLst/>
+          </a:prstGeom>
+          <a:solidFill>
+            <a:srgbClr val="22D3EE"/>
+          </a:solidFill>
+          <a:ln/>
+        </p:spPr>
+      </p:sp>
+      <p:sp>
+        <p:nvSpPr>
+          <p:cNvPr id="17" name="Text 15"/>
+          <p:cNvSpPr txBox="1"/>
+          <p:nvPr/>
+        </p:nvSpPr>
+        <p:spPr>
+          <a:xfrm>
+            <a:off x="4837176" y="2926080"/>
+            <a:ext cx="2651760" cy="621792"/>
+          </a:xfrm>
+          <a:prstGeom prst="rect">
+            <a:avLst/>
+          </a:prstGeom>
+          <a:noFill/>
+          <a:ln/>
+        </p:spPr>
+        <p:txBody>
+          <a:bodyPr wrap="square" lIns="0" tIns="0" rIns="0" bIns="0" rtlCol="0" anchor="ctr"/>
+          <a:lstStyle/>
+          <a:p>
+            <a:pPr indent="0" marL="0">
+              <a:buNone/>
+            </a:pPr>
+            <a:r>
+              <a:rPr lang="en-US" sz="1200" dirty="0">
+                <a:solidFill>
+                  <a:srgbClr val="9FB0CC"/>
+                </a:solidFill>
+                <a:latin typeface="Calibri" pitchFamily="34" charset="0"/>
+                <a:ea typeface="Calibri" pitchFamily="34" charset="-122"/>
+                <a:cs typeface="Calibri" pitchFamily="34" charset="-120"/>
+              </a:rPr>
+              <a:t>Varied training data to close the 63/81 gap</a:t>
+            </a:r>
+            <a:endParaRPr lang="en-US" sz="1200" dirty="0"/>
+          </a:p>
+        </p:txBody>
+      </p:sp>
+      <p:sp>
+        <p:nvSpPr>
+          <p:cNvPr id="18" name="Shape 16"/>
+          <p:cNvSpPr/>
+          <p:nvPr/>
+        </p:nvSpPr>
+        <p:spPr>
+          <a:xfrm>
+            <a:off x="4617720" y="3712464"/>
+            <a:ext cx="91440" cy="91440"/>
+          </a:xfrm>
+          <a:prstGeom prst="ellipse">
+            <a:avLst/>
+          </a:prstGeom>
+          <a:solidFill>
+            <a:srgbClr val="22D3EE"/>
+          </a:solidFill>
+          <a:ln/>
+        </p:spPr>
+      </p:sp>
+      <p:sp>
+        <p:nvSpPr>
+          <p:cNvPr id="19" name="Text 17"/>
+          <p:cNvSpPr txBox="1"/>
+          <p:nvPr/>
+        </p:nvSpPr>
+        <p:spPr>
+          <a:xfrm>
+            <a:off x="4837176" y="3639312"/>
+            <a:ext cx="2651760" cy="621792"/>
+          </a:xfrm>
+          <a:prstGeom prst="rect">
+            <a:avLst/>
+          </a:prstGeom>
+          <a:noFill/>
+          <a:ln/>
+        </p:spPr>
+        <p:txBody>
+          <a:bodyPr wrap="square" lIns="0" tIns="0" rIns="0" bIns="0" rtlCol="0" anchor="ctr"/>
+          <a:lstStyle/>
+          <a:p>
+            <a:pPr indent="0" marL="0">
+              <a:buNone/>
+            </a:pPr>
+            <a:r>
+              <a:rPr lang="en-US" sz="1200" dirty="0">
+                <a:solidFill>
+                  <a:srgbClr val="9FB0CC"/>
+                </a:solidFill>
+                <a:latin typeface="Calibri" pitchFamily="34" charset="0"/>
+                <a:ea typeface="Calibri" pitchFamily="34" charset="-122"/>
+                <a:cs typeface="Calibri" pitchFamily="34" charset="-120"/>
+              </a:rPr>
+              <a:t>More defect classes — corrosion, spalling</a:t>
+            </a:r>
+            <a:endParaRPr lang="en-US" sz="1200" dirty="0"/>
+          </a:p>
+        </p:txBody>
+      </p:sp>
+      <p:sp>
+        <p:nvSpPr>
+          <p:cNvPr id="20" name="Shape 18"/>
+          <p:cNvSpPr/>
+          <p:nvPr/>
+        </p:nvSpPr>
+        <p:spPr>
+          <a:xfrm>
+            <a:off x="4617720" y="4425696"/>
+            <a:ext cx="91440" cy="91440"/>
+          </a:xfrm>
+          <a:prstGeom prst="ellipse">
+            <a:avLst/>
+          </a:prstGeom>
+          <a:solidFill>
+            <a:srgbClr val="22D3EE"/>
+          </a:solidFill>
+          <a:ln/>
+        </p:spPr>
+      </p:sp>
+      <p:sp>
+        <p:nvSpPr>
+          <p:cNvPr id="21" name="Text 19"/>
+          <p:cNvSpPr txBox="1"/>
+          <p:nvPr/>
+        </p:nvSpPr>
+        <p:spPr>
+          <a:xfrm>
+            <a:off x="4837176" y="4352544"/>
+            <a:ext cx="2651760" cy="621792"/>
+          </a:xfrm>
+          <a:prstGeom prst="rect">
+            <a:avLst/>
+          </a:prstGeom>
+          <a:noFill/>
+          <a:ln/>
+        </p:spPr>
+        <p:txBody>
+          <a:bodyPr wrap="square" lIns="0" tIns="0" rIns="0" bIns="0" rtlCol="0" anchor="ctr"/>
+          <a:lstStyle/>
+          <a:p>
+            <a:pPr indent="0" marL="0">
+              <a:buNone/>
+            </a:pPr>
+            <a:r>
+              <a:rPr lang="en-US" sz="1200" dirty="0">
+                <a:solidFill>
+                  <a:srgbClr val="9FB0CC"/>
+                </a:solidFill>
+                <a:latin typeface="Calibri" pitchFamily="34" charset="0"/>
+                <a:ea typeface="Calibri" pitchFamily="34" charset="-122"/>
+                <a:cs typeface="Calibri" pitchFamily="34" charset="-120"/>
+              </a:rPr>
+              <a:t>Cross-frame tracking so video counts are real</a:t>
+            </a:r>
+            <a:endParaRPr lang="en-US" sz="1200" dirty="0"/>
+          </a:p>
+        </p:txBody>
+      </p:sp>
+      <p:sp>
+        <p:nvSpPr>
+          <p:cNvPr id="22" name="Shape 20"/>
+          <p:cNvSpPr/>
+          <p:nvPr/>
+        </p:nvSpPr>
+        <p:spPr>
+          <a:xfrm>
+            <a:off x="8001000" y="2286000"/>
+            <a:ext cx="3337560" cy="2926080"/>
+          </a:xfrm>
+          <a:prstGeom prst="roundRect">
+            <a:avLst>
+              <a:gd name="adj" fmla="val 3750"/>
+            </a:avLst>
+          </a:prstGeom>
+          <a:solidFill>
+            <a:srgbClr val="111A2E">
+              <a:alpha val="82000"/>
+            </a:srgbClr>
+          </a:solidFill>
+          <a:ln w="12700">
+            <a:solidFill>
+              <a:srgbClr val="1E2B44"/>
+            </a:solidFill>
+            <a:prstDash val="solid"/>
+          </a:ln>
+          <a:effectLst>
+            <a:outerShdw sx="100000" sy="100000" kx="0" ky="0" algn="bl" rotWithShape="0" blurRad="177800" dist="38100" dir="5400000">
+              <a:srgbClr val="000000">
+                <a:alpha val="35000"/>
+              </a:srgbClr>
+            </a:outerShdw>
+          </a:effectLst>
+        </p:spPr>
+      </p:sp>
+      <p:sp>
+        <p:nvSpPr>
+          <p:cNvPr id="23" name="Text 21"/>
+          <p:cNvSpPr txBox="1"/>
+          <p:nvPr/>
+        </p:nvSpPr>
+        <p:spPr>
+          <a:xfrm>
+            <a:off x="8275320" y="2505456"/>
+            <a:ext cx="2743200" cy="274320"/>
+          </a:xfrm>
+          <a:prstGeom prst="rect">
+            <a:avLst/>
+          </a:prstGeom>
+          <a:noFill/>
+          <a:ln/>
+        </p:spPr>
+        <p:txBody>
+          <a:bodyPr wrap="square" lIns="0" tIns="0" rIns="0" bIns="0" rtlCol="0" anchor="ctr"/>
+          <a:lstStyle/>
+          <a:p>
+            <a:pPr indent="0" marL="0">
+              <a:buNone/>
+            </a:pPr>
+            <a:r>
+              <a:rPr lang="en-US" sz="1150" b="1" spc="200" kern="0" dirty="0">
+                <a:solidFill>
+                  <a:srgbClr val="64748B"/>
+                </a:solidFill>
+                <a:latin typeface="Calibri" pitchFamily="34" charset="0"/>
+                <a:ea typeface="Calibri" pitchFamily="34" charset="-122"/>
+                <a:cs typeface="Calibri" pitchFamily="34" charset="-120"/>
+              </a:rPr>
+              <a:t>LATER</a:t>
+            </a:r>
+            <a:endParaRPr lang="en-US" sz="1150" dirty="0"/>
+          </a:p>
+        </p:txBody>
+      </p:sp>
+      <p:sp>
+        <p:nvSpPr>
+          <p:cNvPr id="24" name="Shape 22"/>
+          <p:cNvSpPr/>
+          <p:nvPr/>
+        </p:nvSpPr>
+        <p:spPr>
+          <a:xfrm>
+            <a:off x="8275320" y="2999232"/>
+            <a:ext cx="91440" cy="91440"/>
+          </a:xfrm>
+          <a:prstGeom prst="ellipse">
+            <a:avLst/>
+          </a:prstGeom>
+          <a:solidFill>
+            <a:srgbClr val="64748B"/>
+          </a:solidFill>
+          <a:ln/>
+        </p:spPr>
+      </p:sp>
+      <p:sp>
+        <p:nvSpPr>
+          <p:cNvPr id="25" name="Text 23"/>
+          <p:cNvSpPr txBox="1"/>
+          <p:nvPr/>
+        </p:nvSpPr>
+        <p:spPr>
+          <a:xfrm>
+            <a:off x="8494776" y="2926080"/>
+            <a:ext cx="2651760" cy="621792"/>
+          </a:xfrm>
+          <a:prstGeom prst="rect">
+            <a:avLst/>
+          </a:prstGeom>
+          <a:noFill/>
+          <a:ln/>
+        </p:spPr>
+        <p:txBody>
+          <a:bodyPr wrap="square" lIns="0" tIns="0" rIns="0" bIns="0" rtlCol="0" anchor="ctr"/>
+          <a:lstStyle/>
+          <a:p>
+            <a:pPr indent="0" marL="0">
+              <a:buNone/>
+            </a:pPr>
+            <a:r>
+              <a:rPr lang="en-US" sz="1200" dirty="0">
+                <a:solidFill>
+                  <a:srgbClr val="9FB0CC"/>
+                </a:solidFill>
+                <a:latin typeface="Calibri" pitchFamily="34" charset="0"/>
+                <a:ea typeface="Calibri" pitchFamily="34" charset="-122"/>
+                <a:cs typeface="Calibri" pitchFamily="34" charset="-120"/>
+              </a:rPr>
+              <a:t>Photogrammetric twin from the imagery itself</a:t>
+            </a:r>
+            <a:endParaRPr lang="en-US" sz="1200" dirty="0"/>
+          </a:p>
+        </p:txBody>
+      </p:sp>
+      <p:sp>
+        <p:nvSpPr>
+          <p:cNvPr id="26" name="Shape 24"/>
+          <p:cNvSpPr/>
+          <p:nvPr/>
+        </p:nvSpPr>
+        <p:spPr>
+          <a:xfrm>
+            <a:off x="8275320" y="3712464"/>
+            <a:ext cx="91440" cy="91440"/>
+          </a:xfrm>
+          <a:prstGeom prst="ellipse">
+            <a:avLst/>
+          </a:prstGeom>
+          <a:solidFill>
+            <a:srgbClr val="64748B"/>
+          </a:solidFill>
+          <a:ln/>
+        </p:spPr>
+      </p:sp>
+      <p:sp>
+        <p:nvSpPr>
+          <p:cNvPr id="27" name="Text 25"/>
+          <p:cNvSpPr txBox="1"/>
+          <p:nvPr/>
+        </p:nvSpPr>
+        <p:spPr>
+          <a:xfrm>
+            <a:off x="8494776" y="3639312"/>
+            <a:ext cx="2651760" cy="621792"/>
+          </a:xfrm>
+          <a:prstGeom prst="rect">
+            <a:avLst/>
+          </a:prstGeom>
+          <a:noFill/>
+          <a:ln/>
+        </p:spPr>
+        <p:txBody>
+          <a:bodyPr wrap="square" lIns="0" tIns="0" rIns="0" bIns="0" rtlCol="0" anchor="ctr"/>
+          <a:lstStyle/>
+          <a:p>
+            <a:pPr indent="0" marL="0">
+              <a:buNone/>
+            </a:pPr>
+            <a:r>
+              <a:rPr lang="en-US" sz="1200" dirty="0">
+                <a:solidFill>
+                  <a:srgbClr val="9FB0CC"/>
+                </a:solidFill>
+                <a:latin typeface="Calibri" pitchFamily="34" charset="0"/>
+                <a:ea typeface="Calibri" pitchFamily="34" charset="-122"/>
+                <a:cs typeface="Calibri" pitchFamily="34" charset="-120"/>
+              </a:rPr>
+              <a:t>Predictive maintenance once trend data exists</a:t>
+            </a:r>
+            <a:endParaRPr lang="en-US" sz="1200" dirty="0"/>
+          </a:p>
+        </p:txBody>
+      </p:sp>
+      <p:sp>
+        <p:nvSpPr>
+          <p:cNvPr id="28" name="Shape 26"/>
+          <p:cNvSpPr/>
+          <p:nvPr/>
+        </p:nvSpPr>
+        <p:spPr>
+          <a:xfrm>
+            <a:off x="8275320" y="4425696"/>
+            <a:ext cx="91440" cy="91440"/>
+          </a:xfrm>
+          <a:prstGeom prst="ellipse">
+            <a:avLst/>
+          </a:prstGeom>
+          <a:solidFill>
+            <a:srgbClr val="64748B"/>
+          </a:solidFill>
+          <a:ln/>
+        </p:spPr>
+      </p:sp>
+      <p:sp>
+        <p:nvSpPr>
+          <p:cNvPr id="29" name="Text 27"/>
+          <p:cNvSpPr txBox="1"/>
+          <p:nvPr/>
+        </p:nvSpPr>
+        <p:spPr>
+          <a:xfrm>
+            <a:off x="8494776" y="4352544"/>
+            <a:ext cx="2651760" cy="621792"/>
+          </a:xfrm>
+          <a:prstGeom prst="rect">
+            <a:avLst/>
+          </a:prstGeom>
+          <a:noFill/>
+          <a:ln/>
+        </p:spPr>
+        <p:txBody>
+          <a:bodyPr wrap="square" lIns="0" tIns="0" rIns="0" bIns="0" rtlCol="0" anchor="ctr"/>
+          <a:lstStyle/>
+          <a:p>
+            <a:pPr indent="0" marL="0">
+              <a:buNone/>
+            </a:pPr>
+            <a:r>
+              <a:rPr lang="en-US" sz="1200" dirty="0">
+                <a:solidFill>
+                  <a:srgbClr val="9FB0CC"/>
+                </a:solidFill>
+                <a:latin typeface="Calibri" pitchFamily="34" charset="0"/>
+                <a:ea typeface="Calibri" pitchFamily="34" charset="-122"/>
+                <a:cs typeface="Calibri" pitchFamily="34" charset="-120"/>
+              </a:rPr>
+              <a:t>Live drone and robot integration</a:t>
+            </a:r>
+            <a:endParaRPr lang="en-US" sz="1200" dirty="0"/>
+          </a:p>
+        </p:txBody>
+      </p:sp>
+      <p:sp>
+        <p:nvSpPr>
+          <p:cNvPr id="30" name="Text 28"/>
+          <p:cNvSpPr txBox="1"/>
+          <p:nvPr/>
+        </p:nvSpPr>
+        <p:spPr>
+          <a:xfrm>
+            <a:off x="685800" y="5486400"/>
+            <a:ext cx="10789920" cy="365760"/>
+          </a:xfrm>
+          <a:prstGeom prst="rect">
+            <a:avLst/>
+          </a:prstGeom>
+          <a:noFill/>
+          <a:ln/>
+        </p:spPr>
+        <p:txBody>
+          <a:bodyPr wrap="square" lIns="0" tIns="0" rIns="0" bIns="0" rtlCol="0" anchor="ctr"/>
+          <a:lstStyle/>
+          <a:p>
+            <a:pPr algn="ctr" indent="0" marL="0">
+              <a:buNone/>
+            </a:pPr>
+            <a:r>
+              <a:rPr lang="en-US" sz="1300" i="1" dirty="0">
+                <a:solidFill>
+                  <a:srgbClr val="9FB0CC"/>
+                </a:solidFill>
+                <a:latin typeface="Calibri" pitchFamily="34" charset="0"/>
+                <a:ea typeface="Calibri" pitchFamily="34" charset="-122"/>
+                <a:cs typeface="Calibri" pitchFamily="34" charset="-120"/>
+              </a:rPr>
+              <a:t>Predictive maintenance needs longitudinal data that does not exist yet. We are not going to pretend otherwise.</a:t>
+            </a:r>
+            <a:endParaRPr lang="en-US" sz="1300" dirty="0"/>
+          </a:p>
+        </p:txBody>
+      </p:sp>
+    </p:spTree>
+  </p:cSld>
+  <p:clrMapOvr>
+    <a:masterClrMapping/>
+  </p:clrMapOvr>
+</p:sld>
+</file>
+
+<file path=ppt/slides/slide14.xml><?xml version="1.0" encoding="utf-8"?>
+<p:sld xmlns:a="http://schemas.openxmlformats.org/drawingml/2006/main" xmlns:r="http://schemas.openxmlformats.org/officeDocument/2006/relationships" xmlns:p="http://schemas.openxmlformats.org/presentationml/2006/main">
+  <p:cSld name="Slide 14">
     <p:bg>
       <p:bgPr>
         <a:solidFill>
@@ -11383,7 +12523,7 @@
                 <a:ea typeface="Calibri" pitchFamily="34" charset="-122"/>
                 <a:cs typeface="Calibri" pitchFamily="34" charset="-120"/>
               </a:rPr>
-              <a:t>WHAT IT DOES NOT DO</a:t>
+              <a:t>VALIDATION NOBODY ELSE CAN RUN</a:t>
             </a:r>
             <a:endParaRPr lang="en-US" sz="1100" dirty="0"/>
           </a:p>
@@ -11398,23 +12538,23 @@
         <p:spPr>
           <a:xfrm>
             <a:off x="685800" y="896112"/>
-            <a:ext cx="10789920" cy="868680"/>
-          </a:xfrm>
-          <a:prstGeom prst="rect">
-            <a:avLst/>
-          </a:prstGeom>
-          <a:noFill/>
-          <a:ln/>
-        </p:spPr>
-        <p:txBody>
-          <a:bodyPr wrap="square" lIns="0" tIns="0" rIns="0" bIns="0" rtlCol="0" anchor="ctr"/>
-          <a:lstStyle/>
-          <a:p>
-            <a:pPr indent="0" marL="0">
-              <a:buNone/>
-            </a:pPr>
-            <a:r>
-              <a:rPr lang="en-US" sz="3800" b="1" dirty="0">
+            <a:ext cx="10789920" cy="1371600"/>
+          </a:xfrm>
+          <a:prstGeom prst="rect">
+            <a:avLst/>
+          </a:prstGeom>
+          <a:noFill/>
+          <a:ln/>
+        </p:spPr>
+        <p:txBody>
+          <a:bodyPr wrap="square" lIns="0" tIns="0" rIns="0" bIns="0" rtlCol="0" anchor="ctr"/>
+          <a:lstStyle/>
+          <a:p>
+            <a:pPr indent="0" marL="0">
+              <a:buNone/>
+            </a:pPr>
+            <a:r>
+              <a:rPr lang="en-US" sz="3100" b="1" dirty="0">
                 <a:solidFill>
                   <a:srgbClr val="E8EEF8"/>
                 </a:solidFill>
@@ -11422,9 +12562,26 @@
                 <a:ea typeface="Calibri" pitchFamily="34" charset="-122"/>
                 <a:cs typeface="Calibri" pitchFamily="34" charset="-120"/>
               </a:rPr>
-              <a:t>We measured the weaknesses too.</a:t>
-            </a:r>
-            <a:endParaRPr lang="en-US" sz="3800" dirty="0"/>
+              <a:t>We built a bridge where we already know</a:t>
+            </a:r>
+            <a:endParaRPr lang="en-US" sz="3100" dirty="0"/>
+          </a:p>
+          <a:p>
+            <a:pPr indent="0" marL="0">
+              <a:buNone/>
+            </a:pPr>
+            <a:r>
+              <a:rPr lang="en-US" sz="3100" b="1" dirty="0">
+                <a:solidFill>
+                  <a:srgbClr val="E8EEF8"/>
+                </a:solidFill>
+                <a:latin typeface="Calibri" pitchFamily="34" charset="0"/>
+                <a:ea typeface="Calibri" pitchFamily="34" charset="-122"/>
+                <a:cs typeface="Calibri" pitchFamily="34" charset="-120"/>
+              </a:rPr>
+              <a:t>where every crack is.</a:t>
+            </a:r>
+            <a:endParaRPr lang="en-US" sz="3100" dirty="0"/>
           </a:p>
         </p:txBody>
       </p:sp>
@@ -11436,32 +12593,35 @@
         </p:nvSpPr>
         <p:spPr>
           <a:xfrm>
-            <a:off x="685800" y="1783080"/>
-            <a:ext cx="10515600" cy="320040"/>
-          </a:xfrm>
-          <a:prstGeom prst="rect">
-            <a:avLst/>
-          </a:prstGeom>
-          <a:noFill/>
-          <a:ln/>
-        </p:spPr>
-        <p:txBody>
-          <a:bodyPr wrap="square" lIns="0" tIns="0" rIns="0" bIns="0" rtlCol="0" anchor="ctr"/>
-          <a:lstStyle/>
-          <a:p>
-            <a:pPr indent="0" marL="0">
+            <a:off x="685800" y="2139696"/>
+            <a:ext cx="10607040" cy="822960"/>
+          </a:xfrm>
+          <a:prstGeom prst="rect">
+            <a:avLst/>
+          </a:prstGeom>
+          <a:noFill/>
+          <a:ln/>
+        </p:spPr>
+        <p:txBody>
+          <a:bodyPr wrap="square" lIns="0" tIns="0" rIns="0" bIns="0" rtlCol="0" anchor="ctr"/>
+          <a:lstStyle/>
+          <a:p>
+            <a:pPr indent="0" marL="0">
+              <a:lnSpc>
+                <a:spcPct val="110000"/>
+              </a:lnSpc>
               <a:buNone/>
             </a:pPr>
             <a:r>
               <a:rPr lang="en-US" sz="1350" dirty="0">
                 <a:solidFill>
-                  <a:srgbClr val="22D3EE"/>
-                </a:solidFill>
-                <a:latin typeface="Calibri" pitchFamily="34" charset="0"/>
-                <a:ea typeface="Calibri" pitchFamily="34" charset="-122"/>
-                <a:cs typeface="Calibri" pitchFamily="34" charset="-120"/>
-              </a:rPr>
-              <a:t>Every one of these is stated in the product itself and on the last page of every report.</a:t>
+                  <a:srgbClr val="9FB0CC"/>
+                </a:solidFill>
+                <a:latin typeface="Calibri" pitchFamily="34" charset="0"/>
+                <a:ea typeface="Calibri" pitchFamily="34" charset="-122"/>
+                <a:cs typeface="Calibri" pitchFamily="34" charset="-120"/>
+              </a:rPr>
+              <a:t>A real crack photograph does not record how far away the camera was, or where the crack is in space. So we generated a bridge in Gazebo with cracks cut from real photographs and placed at known 3D positions, and flew a simulated drone over it — into the same upload endpoint a real drone would use.</a:t>
             </a:r>
             <a:endParaRPr lang="en-US" sz="1350" dirty="0"/>
           </a:p>
@@ -11475,12 +12635,12 @@
         </p:nvSpPr>
         <p:spPr>
           <a:xfrm>
-            <a:off x="685800" y="2395728"/>
-            <a:ext cx="3429000" cy="1143000"/>
+            <a:off x="685800" y="3127248"/>
+            <a:ext cx="3429000" cy="1965960"/>
           </a:xfrm>
           <a:prstGeom prst="roundRect">
             <a:avLst>
-              <a:gd name="adj" fmla="val 9600"/>
+              <a:gd name="adj" fmla="val 5581"/>
             </a:avLst>
           </a:prstGeom>
           <a:solidFill>
@@ -11511,24 +12671,63 @@
         </p:nvSpPr>
         <p:spPr>
           <a:xfrm>
-            <a:off x="923544" y="2514600"/>
-            <a:ext cx="2971800" cy="274320"/>
-          </a:xfrm>
-          <a:prstGeom prst="rect">
-            <a:avLst/>
-          </a:prstGeom>
-          <a:noFill/>
-          <a:ln/>
-        </p:spPr>
-        <p:txBody>
-          <a:bodyPr wrap="square" lIns="0" tIns="0" rIns="0" bIns="0" rtlCol="0" anchor="ctr"/>
-          <a:lstStyle/>
-          <a:p>
-            <a:pPr indent="0" marL="0">
-              <a:buNone/>
-            </a:pPr>
-            <a:r>
-              <a:rPr lang="en-US" sz="1300" b="1" dirty="0">
+            <a:off x="923544" y="3310128"/>
+            <a:ext cx="3017520" cy="502920"/>
+          </a:xfrm>
+          <a:prstGeom prst="rect">
+            <a:avLst/>
+          </a:prstGeom>
+          <a:noFill/>
+          <a:ln/>
+        </p:spPr>
+        <p:txBody>
+          <a:bodyPr wrap="square" lIns="0" tIns="0" rIns="0" bIns="0" rtlCol="0" anchor="ctr"/>
+          <a:lstStyle/>
+          <a:p>
+            <a:pPr indent="0" marL="0">
+              <a:buNone/>
+            </a:pPr>
+            <a:r>
+              <a:rPr lang="en-US" sz="2700" b="1" dirty="0">
+                <a:solidFill>
+                  <a:srgbClr val="22D3EE"/>
+                </a:solidFill>
+                <a:latin typeface="Calibri" pitchFamily="34" charset="0"/>
+                <a:ea typeface="Calibri" pitchFamily="34" charset="-122"/>
+                <a:cs typeface="Calibri" pitchFamily="34" charset="-120"/>
+              </a:rPr>
+              <a:t>1.2 - 3.5 m</a:t>
+            </a:r>
+            <a:endParaRPr lang="en-US" sz="2700" dirty="0"/>
+          </a:p>
+        </p:txBody>
+      </p:sp>
+      <p:sp>
+        <p:nvSpPr>
+          <p:cNvPr id="9" name="Text 7"/>
+          <p:cNvSpPr txBox="1"/>
+          <p:nvPr/>
+        </p:nvSpPr>
+        <p:spPr>
+          <a:xfrm>
+            <a:off x="923544" y="3822192"/>
+            <a:ext cx="3017520" cy="274320"/>
+          </a:xfrm>
+          <a:prstGeom prst="rect">
+            <a:avLst/>
+          </a:prstGeom>
+          <a:noFill/>
+          <a:ln/>
+        </p:spPr>
+        <p:txBody>
+          <a:bodyPr wrap="square" lIns="0" tIns="0" rIns="0" bIns="0" rtlCol="0" anchor="ctr"/>
+          <a:lstStyle/>
+          <a:p>
+            <a:pPr indent="0" marL="0">
+              <a:buNone/>
+            </a:pPr>
+            <a:r>
+              <a:rPr lang="en-US" sz="1250" b="1" dirty="0">
                 <a:solidFill>
                   <a:srgbClr val="E8EEF8"/>
                 </a:solidFill>
@@ -11536,22 +12735,22 @@
                 <a:ea typeface="Calibri" pitchFamily="34" charset="-122"/>
                 <a:cs typeface="Calibri" pitchFamily="34" charset="-120"/>
               </a:rPr>
-              <a:t>Cracks only</a:t>
-            </a:r>
-            <a:endParaRPr lang="en-US" sz="1300" dirty="0"/>
-          </a:p>
-        </p:txBody>
-      </p:sp>
-      <p:sp>
-        <p:nvSpPr>
-          <p:cNvPr id="9" name="Text 7"/>
-          <p:cNvSpPr txBox="1"/>
-          <p:nvPr/>
-        </p:nvSpPr>
-        <p:spPr>
-          <a:xfrm>
-            <a:off x="923544" y="2807208"/>
-            <a:ext cx="3017520" cy="658368"/>
+              <a:t>Working standoff envelope</a:t>
+            </a:r>
+            <a:endParaRPr lang="en-US" sz="1250" dirty="0"/>
+          </a:p>
+        </p:txBody>
+      </p:sp>
+      <p:sp>
+        <p:nvSpPr>
+          <p:cNvPr id="10" name="Text 8"/>
+          <p:cNvSpPr txBox="1"/>
+          <p:nvPr/>
+        </p:nvSpPr>
+        <p:spPr>
+          <a:xfrm>
+            <a:off x="923544" y="4133088"/>
+            <a:ext cx="3035808" cy="868680"/>
           </a:xfrm>
           <a:prstGeom prst="rect">
             <a:avLst/>
@@ -11578,7 +12777,7 @@
                 <a:ea typeface="Calibri" pitchFamily="34" charset="-122"/>
                 <a:cs typeface="Calibri" pitchFamily="34" charset="-120"/>
               </a:rPr>
-              <a:t>One defect class. It has never seen corrosion or spalling and will not report them.</a:t>
+              <a:t>Measured, not guessed. Beyond 5 m a crack is too few pixels; at 0.8 m it overflows the frame and returns nothing.</a:t>
             </a:r>
             <a:endParaRPr lang="en-US" sz="1050" dirty="0"/>
           </a:p>
@@ -11586,18 +12785,18 @@
       </p:sp>
       <p:sp>
         <p:nvSpPr>
-          <p:cNvPr id="10" name="Shape 8"/>
+          <p:cNvPr id="11" name="Shape 9"/>
           <p:cNvSpPr/>
           <p:nvPr/>
         </p:nvSpPr>
         <p:spPr>
           <a:xfrm>
-            <a:off x="4370832" y="2395728"/>
-            <a:ext cx="3429000" cy="1143000"/>
+            <a:off x="4370832" y="3127248"/>
+            <a:ext cx="3429000" cy="1965960"/>
           </a:xfrm>
           <a:prstGeom prst="roundRect">
             <a:avLst>
-              <a:gd name="adj" fmla="val 9600"/>
+              <a:gd name="adj" fmla="val 5581"/>
             </a:avLst>
           </a:prstGeom>
           <a:solidFill>
@@ -11622,30 +12821,69 @@
       </p:sp>
       <p:sp>
         <p:nvSpPr>
-          <p:cNvPr id="11" name="Text 9"/>
-          <p:cNvSpPr txBox="1"/>
-          <p:nvPr/>
-        </p:nvSpPr>
-        <p:spPr>
-          <a:xfrm>
-            <a:off x="4608576" y="2514600"/>
-            <a:ext cx="2971800" cy="274320"/>
-          </a:xfrm>
-          <a:prstGeom prst="rect">
-            <a:avLst/>
-          </a:prstGeom>
-          <a:noFill/>
-          <a:ln/>
-        </p:spPr>
-        <p:txBody>
-          <a:bodyPr wrap="square" lIns="0" tIns="0" rIns="0" bIns="0" rtlCol="0" anchor="ctr"/>
-          <a:lstStyle/>
-          <a:p>
-            <a:pPr indent="0" marL="0">
-              <a:buNone/>
-            </a:pPr>
-            <a:r>
-              <a:rPr lang="en-US" sz="1300" b="1" dirty="0">
+          <p:cNvPr id="12" name="Text 10"/>
+          <p:cNvSpPr txBox="1"/>
+          <p:nvPr/>
+        </p:nvSpPr>
+        <p:spPr>
+          <a:xfrm>
+            <a:off x="4608576" y="3310128"/>
+            <a:ext cx="3017520" cy="502920"/>
+          </a:xfrm>
+          <a:prstGeom prst="rect">
+            <a:avLst/>
+          </a:prstGeom>
+          <a:noFill/>
+          <a:ln/>
+        </p:spPr>
+        <p:txBody>
+          <a:bodyPr wrap="square" lIns="0" tIns="0" rIns="0" bIns="0" rtlCol="0" anchor="ctr"/>
+          <a:lstStyle/>
+          <a:p>
+            <a:pPr indent="0" marL="0">
+              <a:buNone/>
+            </a:pPr>
+            <a:r>
+              <a:rPr lang="en-US" sz="2700" b="1" dirty="0">
+                <a:solidFill>
+                  <a:srgbClr val="6366F1"/>
+                </a:solidFill>
+                <a:latin typeface="Calibri" pitchFamily="34" charset="0"/>
+                <a:ea typeface="Calibri" pitchFamily="34" charset="-122"/>
+                <a:cs typeface="Calibri" pitchFamily="34" charset="-120"/>
+              </a:rPr>
+              <a:t>60%</a:t>
+            </a:r>
+            <a:endParaRPr lang="en-US" sz="2700" dirty="0"/>
+          </a:p>
+        </p:txBody>
+      </p:sp>
+      <p:sp>
+        <p:nvSpPr>
+          <p:cNvPr id="13" name="Text 11"/>
+          <p:cNvSpPr txBox="1"/>
+          <p:nvPr/>
+        </p:nvSpPr>
+        <p:spPr>
+          <a:xfrm>
+            <a:off x="4608576" y="3822192"/>
+            <a:ext cx="3017520" cy="274320"/>
+          </a:xfrm>
+          <a:prstGeom prst="rect">
+            <a:avLst/>
+          </a:prstGeom>
+          <a:noFill/>
+          <a:ln/>
+        </p:spPr>
+        <p:txBody>
+          <a:bodyPr wrap="square" lIns="0" tIns="0" rIns="0" bIns="0" rtlCol="0" anchor="ctr"/>
+          <a:lstStyle/>
+          <a:p>
+            <a:pPr indent="0" marL="0">
+              <a:buNone/>
+            </a:pPr>
+            <a:r>
+              <a:rPr lang="en-US" sz="1250" b="1" dirty="0">
                 <a:solidFill>
                   <a:srgbClr val="E8EEF8"/>
                 </a:solidFill>
@@ -11653,22 +12891,22 @@
                 <a:ea typeface="Calibri" pitchFamily="34" charset="-122"/>
                 <a:cs typeface="Calibri" pitchFamily="34" charset="-120"/>
               </a:rPr>
-              <a:t>We flag 60% of photographs</a:t>
-            </a:r>
-            <a:endParaRPr lang="en-US" sz="1300" dirty="0"/>
-          </a:p>
-        </p:txBody>
-      </p:sp>
-      <p:sp>
-        <p:nvSpPr>
-          <p:cNvPr id="12" name="Text 10"/>
-          <p:cNvSpPr txBox="1"/>
-          <p:nvPr/>
-        </p:nvSpPr>
-        <p:spPr>
-          <a:xfrm>
-            <a:off x="4608576" y="2807208"/>
-            <a:ext cx="3017520" cy="658368"/>
+              <a:t>Survey recall on known cracks</a:t>
+            </a:r>
+            <a:endParaRPr lang="en-US" sz="1250" dirty="0"/>
+          </a:p>
+        </p:txBody>
+      </p:sp>
+      <p:sp>
+        <p:nvSpPr>
+          <p:cNvPr id="14" name="Text 12"/>
+          <p:cNvSpPr txBox="1"/>
+          <p:nvPr/>
+        </p:nvSpPr>
+        <p:spPr>
+          <a:xfrm>
+            <a:off x="4608576" y="4133088"/>
+            <a:ext cx="3035808" cy="868680"/>
           </a:xfrm>
           <a:prstGeom prst="rect">
             <a:avLst/>
@@ -11695,7 +12933,7 @@
                 <a:ea typeface="Calibri" pitchFamily="34" charset="-122"/>
                 <a:cs typeface="Calibri" pitchFamily="34" charset="-120"/>
               </a:rPr>
-              <a:t>Deliberate. Recall is the safety metric; review time is the cost. The threshold is a slider.</a:t>
+              <a:t>11 frames, 5 cracks photographed, 3 found — scored against positions the world knows exactly.</a:t>
             </a:r>
             <a:endParaRPr lang="en-US" sz="1050" dirty="0"/>
           </a:p>
@@ -11703,18 +12941,18 @@
       </p:sp>
       <p:sp>
         <p:nvSpPr>
-          <p:cNvPr id="13" name="Shape 11"/>
+          <p:cNvPr id="15" name="Shape 13"/>
           <p:cNvSpPr/>
           <p:nvPr/>
         </p:nvSpPr>
         <p:spPr>
           <a:xfrm>
-            <a:off x="8055864" y="2395728"/>
-            <a:ext cx="3429000" cy="1143000"/>
+            <a:off x="8055864" y="3127248"/>
+            <a:ext cx="3429000" cy="1965960"/>
           </a:xfrm>
           <a:prstGeom prst="roundRect">
             <a:avLst>
-              <a:gd name="adj" fmla="val 9600"/>
+              <a:gd name="adj" fmla="val 5581"/>
             </a:avLst>
           </a:prstGeom>
           <a:solidFill>
@@ -11739,30 +12977,69 @@
       </p:sp>
       <p:sp>
         <p:nvSpPr>
-          <p:cNvPr id="14" name="Text 12"/>
-          <p:cNvSpPr txBox="1"/>
-          <p:nvPr/>
-        </p:nvSpPr>
-        <p:spPr>
-          <a:xfrm>
-            <a:off x="8293608" y="2514600"/>
-            <a:ext cx="2971800" cy="274320"/>
-          </a:xfrm>
-          <a:prstGeom prst="rect">
-            <a:avLst/>
-          </a:prstGeom>
-          <a:noFill/>
-          <a:ln/>
-        </p:spPr>
-        <p:txBody>
-          <a:bodyPr wrap="square" lIns="0" tIns="0" rIns="0" bIns="0" rtlCol="0" anchor="ctr"/>
-          <a:lstStyle/>
-          <a:p>
-            <a:pPr indent="0" marL="0">
-              <a:buNone/>
-            </a:pPr>
-            <a:r>
-              <a:rPr lang="en-US" sz="1300" b="1" dirty="0">
+          <p:cNvPr id="16" name="Text 14"/>
+          <p:cNvSpPr txBox="1"/>
+          <p:nvPr/>
+        </p:nvSpPr>
+        <p:spPr>
+          <a:xfrm>
+            <a:off x="8293608" y="3310128"/>
+            <a:ext cx="3017520" cy="502920"/>
+          </a:xfrm>
+          <a:prstGeom prst="rect">
+            <a:avLst/>
+          </a:prstGeom>
+          <a:noFill/>
+          <a:ln/>
+        </p:spPr>
+        <p:txBody>
+          <a:bodyPr wrap="square" lIns="0" tIns="0" rIns="0" bIns="0" rtlCol="0" anchor="ctr"/>
+          <a:lstStyle/>
+          <a:p>
+            <a:pPr indent="0" marL="0">
+              <a:buNone/>
+            </a:pPr>
+            <a:r>
+              <a:rPr lang="en-US" sz="2700" b="1" dirty="0">
+                <a:solidFill>
+                  <a:srgbClr val="A78BFA"/>
+                </a:solidFill>
+                <a:latin typeface="Calibri" pitchFamily="34" charset="0"/>
+                <a:ea typeface="Calibri" pitchFamily="34" charset="-122"/>
+                <a:cs typeface="Calibri" pitchFamily="34" charset="-120"/>
+              </a:rPr>
+              <a:t>0.71 px</a:t>
+            </a:r>
+            <a:endParaRPr lang="en-US" sz="2700" dirty="0"/>
+          </a:p>
+        </p:txBody>
+      </p:sp>
+      <p:sp>
+        <p:nvSpPr>
+          <p:cNvPr id="17" name="Text 15"/>
+          <p:cNvSpPr txBox="1"/>
+          <p:nvPr/>
+        </p:nvSpPr>
+        <p:spPr>
+          <a:xfrm>
+            <a:off x="8293608" y="3822192"/>
+            <a:ext cx="3017520" cy="274320"/>
+          </a:xfrm>
+          <a:prstGeom prst="rect">
+            <a:avLst/>
+          </a:prstGeom>
+          <a:noFill/>
+          <a:ln/>
+        </p:spPr>
+        <p:txBody>
+          <a:bodyPr wrap="square" lIns="0" tIns="0" rIns="0" bIns="0" rtlCol="0" anchor="ctr"/>
+          <a:lstStyle/>
+          <a:p>
+            <a:pPr indent="0" marL="0">
+              <a:buNone/>
+            </a:pPr>
+            <a:r>
+              <a:rPr lang="en-US" sz="1250" b="1" dirty="0">
                 <a:solidFill>
                   <a:srgbClr val="E8EEF8"/>
                 </a:solidFill>
@@ -11770,22 +13047,22 @@
                 <a:ea typeface="Calibri" pitchFamily="34" charset="-122"/>
                 <a:cs typeface="Calibri" pitchFamily="34" charset="-120"/>
               </a:rPr>
-              <a:t>56% on the one unseen source</a:t>
-            </a:r>
-            <a:endParaRPr lang="en-US" sz="1300" dirty="0"/>
-          </a:p>
-        </p:txBody>
-      </p:sp>
-      <p:sp>
-        <p:nvSpPr>
-          <p:cNvPr id="15" name="Text 13"/>
-          <p:cNvSpPr txBox="1"/>
-          <p:nvPr/>
-        </p:nvSpPr>
-        <p:spPr>
-          <a:xfrm>
-            <a:off x="8293608" y="2807208"/>
-            <a:ext cx="3017520" cy="658368"/>
+              <a:t>Camera calibration error</a:t>
+            </a:r>
+            <a:endParaRPr lang="en-US" sz="1250" dirty="0"/>
+          </a:p>
+        </p:txBody>
+      </p:sp>
+      <p:sp>
+        <p:nvSpPr>
+          <p:cNvPr id="18" name="Text 16"/>
+          <p:cNvSpPr txBox="1"/>
+          <p:nvPr/>
+        </p:nvSpPr>
+        <p:spPr>
+          <a:xfrm>
+            <a:off x="8293608" y="4133088"/>
+            <a:ext cx="3035808" cy="868680"/>
           </a:xfrm>
           <a:prstGeom prst="rect">
             <a:avLst/>
@@ -11812,7 +13089,7 @@
                 <a:ea typeface="Calibri" pitchFamily="34" charset="-122"/>
                 <a:cs typeface="Calibri" pitchFamily="34" charset="-120"/>
               </a:rPr>
-              <a:t>Versus 84-100% on the three in training. Only bridge-defect is wholly unseen, and we say so.</a:t>
+              <a:t>Projection convention measured from rendered markers, not derived. The derivation was wrong twice.</a:t>
             </a:r>
             <a:endParaRPr lang="en-US" sz="1050" dirty="0"/>
           </a:p>
@@ -11820,156 +13097,42 @@
       </p:sp>
       <p:sp>
         <p:nvSpPr>
-          <p:cNvPr id="16" name="Shape 14"/>
-          <p:cNvSpPr/>
-          <p:nvPr/>
-        </p:nvSpPr>
-        <p:spPr>
-          <a:xfrm>
-            <a:off x="685800" y="3675888"/>
-            <a:ext cx="3429000" cy="1143000"/>
-          </a:xfrm>
-          <a:prstGeom prst="roundRect">
-            <a:avLst>
-              <a:gd name="adj" fmla="val 9600"/>
-            </a:avLst>
-          </a:prstGeom>
-          <a:solidFill>
-            <a:srgbClr val="111A2E">
-              <a:alpha val="82000"/>
-            </a:srgbClr>
-          </a:solidFill>
-          <a:ln w="12700">
-            <a:solidFill>
-              <a:srgbClr val="1E2B44"/>
-            </a:solidFill>
-            <a:prstDash val="solid"/>
-          </a:ln>
-          <a:effectLst>
-            <a:outerShdw sx="100000" sy="100000" kx="0" ky="0" algn="bl" rotWithShape="0" blurRad="177800" dist="38100" dir="5400000">
-              <a:srgbClr val="000000">
-                <a:alpha val="35000"/>
-              </a:srgbClr>
-            </a:outerShdw>
-          </a:effectLst>
-        </p:spPr>
-      </p:sp>
-      <p:sp>
-        <p:nvSpPr>
-          <p:cNvPr id="17" name="Text 15"/>
-          <p:cNvSpPr txBox="1"/>
-          <p:nvPr/>
-        </p:nvSpPr>
-        <p:spPr>
-          <a:xfrm>
-            <a:off x="923544" y="3794760"/>
-            <a:ext cx="2971800" cy="274320"/>
-          </a:xfrm>
-          <a:prstGeom prst="rect">
-            <a:avLst/>
-          </a:prstGeom>
-          <a:noFill/>
-          <a:ln/>
-        </p:spPr>
-        <p:txBody>
-          <a:bodyPr wrap="square" lIns="0" tIns="0" rIns="0" bIns="0" rtlCol="0" anchor="ctr"/>
-          <a:lstStyle/>
-          <a:p>
-            <a:pPr indent="0" marL="0">
-              <a:buNone/>
-            </a:pPr>
-            <a:r>
-              <a:rPr lang="en-US" sz="1300" b="1" dirty="0">
-                <a:solidFill>
-                  <a:srgbClr val="E8EEF8"/>
-                </a:solidFill>
-                <a:latin typeface="Calibri" pitchFamily="34" charset="0"/>
-                <a:ea typeface="Calibri" pitchFamily="34" charset="-122"/>
-                <a:cs typeface="Calibri" pitchFamily="34" charset="-120"/>
-              </a:rPr>
-              <a:t>Severity is relative</a:t>
-            </a:r>
-            <a:endParaRPr lang="en-US" sz="1300" dirty="0"/>
-          </a:p>
-        </p:txBody>
-      </p:sp>
-      <p:sp>
-        <p:nvSpPr>
-          <p:cNvPr id="18" name="Text 16"/>
-          <p:cNvSpPr txBox="1"/>
-          <p:nvPr/>
-        </p:nvSpPr>
-        <p:spPr>
-          <a:xfrm>
-            <a:off x="923544" y="4087368"/>
-            <a:ext cx="3017520" cy="658368"/>
-          </a:xfrm>
-          <a:prstGeom prst="rect">
-            <a:avLst/>
-          </a:prstGeom>
-          <a:noFill/>
-          <a:ln/>
-        </p:spPr>
-        <p:txBody>
-          <a:bodyPr wrap="square" lIns="0" tIns="0" rIns="0" bIns="0" rtlCol="0" anchor="ctr"/>
-          <a:lstStyle/>
-          <a:p>
-            <a:pPr indent="0" marL="0">
-              <a:lnSpc>
-                <a:spcPct val="105000"/>
-              </a:lnSpc>
-              <a:buNone/>
-            </a:pPr>
-            <a:r>
-              <a:rPr lang="en-US" sz="1050" dirty="0">
-                <a:solidFill>
-                  <a:srgbClr val="9FB0CC"/>
-                </a:solidFill>
-                <a:latin typeface="Calibri" pitchFamily="34" charset="0"/>
-                <a:ea typeface="Calibri" pitchFamily="34" charset="-122"/>
-                <a:cs typeface="Calibri" pitchFamily="34" charset="-120"/>
-              </a:rPr>
-              <a:t>It ranks which crack to look at first. It does not measure width in millimetres.</a:t>
-            </a:r>
-            <a:endParaRPr lang="en-US" sz="1050" dirty="0"/>
-          </a:p>
-        </p:txBody>
-      </p:sp>
-      <p:sp>
-        <p:nvSpPr>
-          <p:cNvPr id="19" name="Shape 17"/>
-          <p:cNvSpPr/>
-          <p:nvPr/>
-        </p:nvSpPr>
-        <p:spPr>
-          <a:xfrm>
-            <a:off x="4370832" y="3675888"/>
-            <a:ext cx="3429000" cy="1143000"/>
-          </a:xfrm>
-          <a:prstGeom prst="roundRect">
-            <a:avLst>
-              <a:gd name="adj" fmla="val 9600"/>
-            </a:avLst>
-          </a:prstGeom>
-          <a:solidFill>
-            <a:srgbClr val="111A2E">
-              <a:alpha val="82000"/>
-            </a:srgbClr>
-          </a:solidFill>
-          <a:ln w="12700">
-            <a:solidFill>
-              <a:srgbClr val="1E2B44"/>
-            </a:solidFill>
-            <a:prstDash val="solid"/>
-          </a:ln>
-          <a:effectLst>
-            <a:outerShdw sx="100000" sy="100000" kx="0" ky="0" algn="bl" rotWithShape="0" blurRad="177800" dist="38100" dir="5400000">
-              <a:srgbClr val="000000">
-                <a:alpha val="35000"/>
-              </a:srgbClr>
-            </a:outerShdw>
-          </a:effectLst>
-        </p:spPr>
+          <p:cNvPr id="19" name="Text 17"/>
+          <p:cNvSpPr txBox="1"/>
+          <p:nvPr/>
+        </p:nvSpPr>
+        <p:spPr>
+          <a:xfrm>
+            <a:off x="685800" y="5321808"/>
+            <a:ext cx="10789920" cy="365760"/>
+          </a:xfrm>
+          <a:prstGeom prst="rect">
+            <a:avLst/>
+          </a:prstGeom>
+          <a:noFill/>
+          <a:ln/>
+        </p:spPr>
+        <p:txBody>
+          <a:bodyPr wrap="square" lIns="0" tIns="0" rIns="0" bIns="0" rtlCol="0" anchor="ctr"/>
+          <a:lstStyle/>
+          <a:p>
+            <a:pPr algn="ctr" indent="0" marL="0">
+              <a:buNone/>
+            </a:pPr>
+            <a:r>
+              <a:rPr lang="en-US" sz="1400" i="1" dirty="0">
+                <a:solidFill>
+                  <a:srgbClr val="22D3EE"/>
+                </a:solidFill>
+                <a:latin typeface="Calibri" pitchFamily="34" charset="0"/>
+                <a:ea typeface="Calibri" pitchFamily="34" charset="-122"/>
+                <a:cs typeface="Calibri" pitchFamily="34" charset="-120"/>
+              </a:rPr>
+              <a:t>The two cracks it missed were the largest and the best-centred. Size does not predict detectability — contrast does.</a:t>
+            </a:r>
+            <a:endParaRPr lang="en-US" sz="1400" dirty="0"/>
+          </a:p>
+        </p:txBody>
       </p:sp>
       <p:sp>
         <p:nvSpPr>
@@ -11979,322 +13142,7 @@
         </p:nvSpPr>
         <p:spPr>
           <a:xfrm>
-            <a:off x="4608576" y="3794760"/>
-            <a:ext cx="2971800" cy="274320"/>
-          </a:xfrm>
-          <a:prstGeom prst="rect">
-            <a:avLst/>
-          </a:prstGeom>
-          <a:noFill/>
-          <a:ln/>
-        </p:spPr>
-        <p:txBody>
-          <a:bodyPr wrap="square" lIns="0" tIns="0" rIns="0" bIns="0" rtlCol="0" anchor="ctr"/>
-          <a:lstStyle/>
-          <a:p>
-            <a:pPr indent="0" marL="0">
-              <a:buNone/>
-            </a:pPr>
-            <a:r>
-              <a:rPr lang="en-US" sz="1300" b="1" dirty="0">
-                <a:solidFill>
-                  <a:srgbClr val="E8EEF8"/>
-                </a:solidFill>
-                <a:latin typeface="Calibri" pitchFamily="34" charset="0"/>
-                <a:ea typeface="Calibri" pitchFamily="34" charset="-122"/>
-                <a:cs typeface="Calibri" pitchFamily="34" charset="-120"/>
-              </a:rPr>
-              <a:t>The 3D view is illustrative</a:t>
-            </a:r>
-            <a:endParaRPr lang="en-US" sz="1300" dirty="0"/>
-          </a:p>
-        </p:txBody>
-      </p:sp>
-      <p:sp>
-        <p:nvSpPr>
-          <p:cNvPr id="21" name="Text 19"/>
-          <p:cNvSpPr txBox="1"/>
-          <p:nvPr/>
-        </p:nvSpPr>
-        <p:spPr>
-          <a:xfrm>
-            <a:off x="4608576" y="4087368"/>
-            <a:ext cx="3017520" cy="658368"/>
-          </a:xfrm>
-          <a:prstGeom prst="rect">
-            <a:avLst/>
-          </a:prstGeom>
-          <a:noFill/>
-          <a:ln/>
-        </p:spPr>
-        <p:txBody>
-          <a:bodyPr wrap="square" lIns="0" tIns="0" rIns="0" bIns="0" rtlCol="0" anchor="ctr"/>
-          <a:lstStyle/>
-          <a:p>
-            <a:pPr indent="0" marL="0">
-              <a:lnSpc>
-                <a:spcPct val="105000"/>
-              </a:lnSpc>
-              <a:buNone/>
-            </a:pPr>
-            <a:r>
-              <a:rPr lang="en-US" sz="1050" dirty="0">
-                <a:solidFill>
-                  <a:srgbClr val="9FB0CC"/>
-                </a:solidFill>
-                <a:latin typeface="Calibri" pitchFamily="34" charset="0"/>
-                <a:ea typeface="Calibri" pitchFamily="34" charset="-122"/>
-                <a:cs typeface="Calibri" pitchFamily="34" charset="-120"/>
-              </a:rPr>
-              <a:t>Marker positions come from capture order, not surveyed coordinates.</a:t>
-            </a:r>
-            <a:endParaRPr lang="en-US" sz="1050" dirty="0"/>
-          </a:p>
-        </p:txBody>
-      </p:sp>
-      <p:sp>
-        <p:nvSpPr>
-          <p:cNvPr id="22" name="Shape 20"/>
-          <p:cNvSpPr/>
-          <p:nvPr/>
-        </p:nvSpPr>
-        <p:spPr>
-          <a:xfrm>
-            <a:off x="8055864" y="3675888"/>
-            <a:ext cx="3429000" cy="1143000"/>
-          </a:xfrm>
-          <a:prstGeom prst="roundRect">
-            <a:avLst>
-              <a:gd name="adj" fmla="val 9600"/>
-            </a:avLst>
-          </a:prstGeom>
-          <a:solidFill>
-            <a:srgbClr val="111A2E">
-              <a:alpha val="82000"/>
-            </a:srgbClr>
-          </a:solidFill>
-          <a:ln w="12700">
-            <a:solidFill>
-              <a:srgbClr val="1E2B44"/>
-            </a:solidFill>
-            <a:prstDash val="solid"/>
-          </a:ln>
-          <a:effectLst>
-            <a:outerShdw sx="100000" sy="100000" kx="0" ky="0" algn="bl" rotWithShape="0" blurRad="177800" dist="38100" dir="5400000">
-              <a:srgbClr val="000000">
-                <a:alpha val="35000"/>
-              </a:srgbClr>
-            </a:outerShdw>
-          </a:effectLst>
-        </p:spPr>
-      </p:sp>
-      <p:sp>
-        <p:nvSpPr>
-          <p:cNvPr id="23" name="Text 21"/>
-          <p:cNvSpPr txBox="1"/>
-          <p:nvPr/>
-        </p:nvSpPr>
-        <p:spPr>
-          <a:xfrm>
-            <a:off x="8293608" y="3794760"/>
-            <a:ext cx="2971800" cy="274320"/>
-          </a:xfrm>
-          <a:prstGeom prst="rect">
-            <a:avLst/>
-          </a:prstGeom>
-          <a:noFill/>
-          <a:ln/>
-        </p:spPr>
-        <p:txBody>
-          <a:bodyPr wrap="square" lIns="0" tIns="0" rIns="0" bIns="0" rtlCol="0" anchor="ctr"/>
-          <a:lstStyle/>
-          <a:p>
-            <a:pPr indent="0" marL="0">
-              <a:buNone/>
-            </a:pPr>
-            <a:r>
-              <a:rPr lang="en-US" sz="1300" b="1" dirty="0">
-                <a:solidFill>
-                  <a:srgbClr val="E8EEF8"/>
-                </a:solidFill>
-                <a:latin typeface="Calibri" pitchFamily="34" charset="0"/>
-                <a:ea typeface="Calibri" pitchFamily="34" charset="-122"/>
-                <a:cs typeface="Calibri" pitchFamily="34" charset="-120"/>
-              </a:rPr>
-              <a:t>Video counts are inflated</a:t>
-            </a:r>
-            <a:endParaRPr lang="en-US" sz="1300" dirty="0"/>
-          </a:p>
-        </p:txBody>
-      </p:sp>
-      <p:sp>
-        <p:nvSpPr>
-          <p:cNvPr id="24" name="Text 22"/>
-          <p:cNvSpPr txBox="1"/>
-          <p:nvPr/>
-        </p:nvSpPr>
-        <p:spPr>
-          <a:xfrm>
-            <a:off x="8293608" y="4087368"/>
-            <a:ext cx="3017520" cy="658368"/>
-          </a:xfrm>
-          <a:prstGeom prst="rect">
-            <a:avLst/>
-          </a:prstGeom>
-          <a:noFill/>
-          <a:ln/>
-        </p:spPr>
-        <p:txBody>
-          <a:bodyPr wrap="square" lIns="0" tIns="0" rIns="0" bIns="0" rtlCol="0" anchor="ctr"/>
-          <a:lstStyle/>
-          <a:p>
-            <a:pPr indent="0" marL="0">
-              <a:lnSpc>
-                <a:spcPct val="105000"/>
-              </a:lnSpc>
-              <a:buNone/>
-            </a:pPr>
-            <a:r>
-              <a:rPr lang="en-US" sz="1050" dirty="0">
-                <a:solidFill>
-                  <a:srgbClr val="9FB0CC"/>
-                </a:solidFill>
-                <a:latin typeface="Calibri" pitchFamily="34" charset="0"/>
-                <a:ea typeface="Calibri" pitchFamily="34" charset="-122"/>
-                <a:cs typeface="Calibri" pitchFamily="34" charset="-120"/>
-              </a:rPr>
-              <a:t>Frames are analysed independently, so one crack can be counted many times.</a:t>
-            </a:r>
-            <a:endParaRPr lang="en-US" sz="1050" dirty="0"/>
-          </a:p>
-        </p:txBody>
-      </p:sp>
-      <p:sp>
-        <p:nvSpPr>
-          <p:cNvPr id="25" name="Shape 23"/>
-          <p:cNvSpPr/>
-          <p:nvPr/>
-        </p:nvSpPr>
-        <p:spPr>
-          <a:xfrm>
-            <a:off x="685800" y="4956048"/>
-            <a:ext cx="3429000" cy="1143000"/>
-          </a:xfrm>
-          <a:prstGeom prst="roundRect">
-            <a:avLst>
-              <a:gd name="adj" fmla="val 9600"/>
-            </a:avLst>
-          </a:prstGeom>
-          <a:solidFill>
-            <a:srgbClr val="111A2E">
-              <a:alpha val="82000"/>
-            </a:srgbClr>
-          </a:solidFill>
-          <a:ln w="12700">
-            <a:solidFill>
-              <a:srgbClr val="1E2B44"/>
-            </a:solidFill>
-            <a:prstDash val="solid"/>
-          </a:ln>
-          <a:effectLst>
-            <a:outerShdw sx="100000" sy="100000" kx="0" ky="0" algn="bl" rotWithShape="0" blurRad="177800" dist="38100" dir="5400000">
-              <a:srgbClr val="000000">
-                <a:alpha val="35000"/>
-              </a:srgbClr>
-            </a:outerShdw>
-          </a:effectLst>
-        </p:spPr>
-      </p:sp>
-      <p:sp>
-        <p:nvSpPr>
-          <p:cNvPr id="26" name="Text 24"/>
-          <p:cNvSpPr txBox="1"/>
-          <p:nvPr/>
-        </p:nvSpPr>
-        <p:spPr>
-          <a:xfrm>
-            <a:off x="923544" y="5074920"/>
-            <a:ext cx="2971800" cy="274320"/>
-          </a:xfrm>
-          <a:prstGeom prst="rect">
-            <a:avLst/>
-          </a:prstGeom>
-          <a:noFill/>
-          <a:ln/>
-        </p:spPr>
-        <p:txBody>
-          <a:bodyPr wrap="square" lIns="0" tIns="0" rIns="0" bIns="0" rtlCol="0" anchor="ctr"/>
-          <a:lstStyle/>
-          <a:p>
-            <a:pPr indent="0" marL="0">
-              <a:buNone/>
-            </a:pPr>
-            <a:r>
-              <a:rPr lang="en-US" sz="1300" b="1" dirty="0">
-                <a:solidFill>
-                  <a:srgbClr val="E8EEF8"/>
-                </a:solidFill>
-                <a:latin typeface="Calibri" pitchFamily="34" charset="0"/>
-                <a:ea typeface="Calibri" pitchFamily="34" charset="-122"/>
-                <a:cs typeface="Calibri" pitchFamily="34" charset="-120"/>
-              </a:rPr>
-              <a:t>Not an engineering assessment</a:t>
-            </a:r>
-            <a:endParaRPr lang="en-US" sz="1300" dirty="0"/>
-          </a:p>
-        </p:txBody>
-      </p:sp>
-      <p:sp>
-        <p:nvSpPr>
-          <p:cNvPr id="27" name="Text 25"/>
-          <p:cNvSpPr txBox="1"/>
-          <p:nvPr/>
-        </p:nvSpPr>
-        <p:spPr>
-          <a:xfrm>
-            <a:off x="923544" y="5367528"/>
-            <a:ext cx="3017520" cy="658368"/>
-          </a:xfrm>
-          <a:prstGeom prst="rect">
-            <a:avLst/>
-          </a:prstGeom>
-          <a:noFill/>
-          <a:ln/>
-        </p:spPr>
-        <p:txBody>
-          <a:bodyPr wrap="square" lIns="0" tIns="0" rIns="0" bIns="0" rtlCol="0" anchor="ctr"/>
-          <a:lstStyle/>
-          <a:p>
-            <a:pPr indent="0" marL="0">
-              <a:lnSpc>
-                <a:spcPct val="105000"/>
-              </a:lnSpc>
-              <a:buNone/>
-            </a:pPr>
-            <a:r>
-              <a:rPr lang="en-US" sz="1050" dirty="0">
-                <a:solidFill>
-                  <a:srgbClr val="9FB0CC"/>
-                </a:solidFill>
-                <a:latin typeface="Calibri" pitchFamily="34" charset="0"/>
-                <a:ea typeface="Calibri" pitchFamily="34" charset="-122"/>
-                <a:cs typeface="Calibri" pitchFamily="34" charset="-120"/>
-              </a:rPr>
-              <a:t>It is a screening pass. A qualified engineer still signs off.</a:t>
-            </a:r>
-            <a:endParaRPr lang="en-US" sz="1050" dirty="0"/>
-          </a:p>
-        </p:txBody>
-      </p:sp>
-      <p:sp>
-        <p:nvSpPr>
-          <p:cNvPr id="28" name="Text 26"/>
-          <p:cNvSpPr txBox="1"/>
-          <p:nvPr/>
-        </p:nvSpPr>
-        <p:spPr>
-          <a:xfrm>
-            <a:off x="685800" y="6263640"/>
+            <a:off x="685800" y="5779008"/>
             <a:ext cx="10789920" cy="320040"/>
           </a:xfrm>
           <a:prstGeom prst="rect">
@@ -12311,17 +13159,17 @@
               <a:buNone/>
             </a:pPr>
             <a:r>
-              <a:rPr lang="en-US" sz="1400" i="1" dirty="0">
-                <a:solidFill>
-                  <a:srgbClr val="22D3EE"/>
-                </a:solidFill>
-                <a:latin typeface="Calibri" pitchFamily="34" charset="0"/>
-                <a:ea typeface="Calibri" pitchFamily="34" charset="-122"/>
-                <a:cs typeface="Calibri" pitchFamily="34" charset="-120"/>
-              </a:rPr>
-              <a:t>Naming a weakness costs far less than being caught by it.</a:t>
-            </a:r>
-            <a:endParaRPr lang="en-US" sz="1400" dirty="0"/>
+              <a:rPr lang="en-US" sz="1150" i="1" dirty="0">
+                <a:solidFill>
+                  <a:srgbClr val="64748B"/>
+                </a:solidFill>
+                <a:latin typeface="Calibri" pitchFamily="34" charset="0"/>
+                <a:ea typeface="Calibri" pitchFamily="34" charset="-122"/>
+                <a:cs typeface="Calibri" pitchFamily="34" charset="-120"/>
+              </a:rPr>
+              <a:t>Play sim_survey.mp4 here — the drone's view with detections and known cracks side by side.</a:t>
+            </a:r>
+            <a:endParaRPr lang="en-US" sz="1150" dirty="0"/>
           </a:p>
         </p:txBody>
       </p:sp>
